--- a/Planning docs/Slides/lesson-9-2-teacher-slides.pptx
+++ b/Planning docs/Slides/lesson-9-2-teacher-slides.pptx
@@ -21,9 +21,12 @@
     <p:sldId id="269" r:id="rId15"/>
     <p:sldId id="270" r:id="rId16"/>
     <p:sldId id="271" r:id="rId17"/>
+    <p:sldId id="272" r:id="rId18"/>
+    <p:sldId id="273" r:id="rId19"/>
+    <p:sldId id="274" r:id="rId20"/>
   </p:sldIdLst>
   <p:notesMasterIdLst>
-    <p:notesMasterId r:id="rId18"/>
+    <p:notesMasterId r:id="rId21"/>
   </p:notesMasterIdLst>
   <p:sldSz cx="9144000" cy="5143500"/>
   <p:notesSz cx="5143500" cy="9144000"/>
@@ -605,7 +608,7 @@
           <a:p>
             <a:r>
               <a:rPr lang="en-US" dirty="0"/>
-              <a:t>Each word appears in the chapters read this week, in the author’s own sentence.</a:t>
+              <a:t>Break the word into base + word part. Ask what the part adds to the meaning.</a:t>
             </a:r>
             <a:endParaRPr lang="en-US" dirty="0"/>
           </a:p>
@@ -693,7 +696,7 @@
           <a:p>
             <a:r>
               <a:rPr lang="en-US" dirty="0"/>
-              <a:t>Answers: Despereaux's, threadmaster's, king's, Antoinette's</a:t>
+              <a:t>Each word appears in the chapters read this week, in the author’s own sentence.</a:t>
             </a:r>
             <a:endParaRPr lang="en-US" dirty="0"/>
           </a:p>
@@ -781,7 +784,9 @@
           <a:p>
             <a:r>
               <a:rPr lang="en-US" dirty="0"/>
-              <a:t>Answers: Despereaux's, threadmaster's, king's, Antoinette's</a:t>
+              <a:t>Let students talk through the questions before revealing the pattern.
+A possessive noun shows that something belongs to someone. Add an apostrophe and s to a singular noun: the mouse’s tail. The apostrophe is what makes it possessive — without it, the word is just a plural.
+Despereaux’s — the heart belongs to Despereaux.</a:t>
             </a:r>
             <a:endParaRPr lang="en-US" dirty="0"/>
           </a:p>
@@ -869,7 +874,9 @@
           <a:p>
             <a:r>
               <a:rPr lang="en-US" dirty="0"/>
-              <a:t>Dropped the e: shining, staring, named, waved | Kept the e: hopeful, careful, useless, bravely</a:t>
+              <a:t>Let students talk through the questions before revealing the pattern.
+A possessive noun shows that something belongs to someone. Add an apostrophe and s to a singular noun: the mouse’s tail. The apostrophe is what makes it possessive — without it, the word is just a plural.
+Despereaux’s — the heart belongs to Despereaux.</a:t>
             </a:r>
             <a:endParaRPr lang="en-US" dirty="0"/>
           </a:p>
@@ -957,7 +964,7 @@
           <a:p>
             <a:r>
               <a:rPr lang="en-US" dirty="0"/>
-              <a:t>Dropped the e: shining, staring, named, waved | Kept the e: hopeful, careful, useless, bravely</a:t>
+              <a:t>Answers: Despereaux’s, brother’s, king’s, princess’s, Mig’s, hen’s, mouse’s, rat’s</a:t>
             </a:r>
             <a:endParaRPr lang="en-US" dirty="0"/>
           </a:p>
@@ -1045,7 +1052,7 @@
           <a:p>
             <a:r>
               <a:rPr lang="en-US" dirty="0"/>
-              <a:t>Read the chapters, then return to the pause questions.</a:t>
+              <a:t>Answers: Despereaux’s, brother’s, king’s, princess’s, Mig’s, hen’s, mouse’s, rat’s</a:t>
             </a:r>
             <a:endParaRPr lang="en-US" dirty="0"/>
           </a:p>
@@ -1133,7 +1140,8 @@
           <a:p>
             <a:r>
               <a:rPr lang="en-US" dirty="0"/>
-              <a:t>Writer’s Workshop stage for the week.</a:t>
+              <a:t>Rule: When a word ends in a consonant + y, change the y to i before most endings: carry → carried. Two exceptions: keep the y before -ing (carrying), and change nothing when a vowel comes before the y (played).
+Answers: carried, happier, cities, tried</a:t>
             </a:r>
             <a:endParaRPr lang="en-US" dirty="0"/>
           </a:p>
@@ -1157,6 +1165,271 @@
             <a:fld id="{F7021451-1387-4CA6-816F-3879F97B5CBC}" type="slidenum">
               <a:rPr lang="en-US"/>
               <a:t>16</a:t>
+            </a:fld>
+            <a:endParaRPr lang="en-US"/>
+          </a:p>
+        </p:txBody>
+      </p:sp>
+    </p:spTree>
+    <p:extLst>
+      <p:ext uri="{BB962C8B-B14F-4D97-AF65-F5344CB8AC3E}">
+        <p14:creationId xmlns:p14="http://schemas.microsoft.com/office/powerpoint/2010/main" val="1024086991"/>
+      </p:ext>
+    </p:extLst>
+  </p:cSld>
+  <p:clrMapOvr>
+    <a:masterClrMapping/>
+  </p:clrMapOvr>
+</p:notes>
+</file>
+
+<file path=ppt/notesSlides/notesSlide17.xml><?xml version="1.0" encoding="utf-8"?>
+<p:notes xmlns:a="http://schemas.openxmlformats.org/drawingml/2006/main" xmlns:r="http://schemas.openxmlformats.org/officeDocument/2006/relationships" xmlns:p="http://schemas.openxmlformats.org/presentationml/2006/main">
+  <p:cSld>
+    <p:spTree>
+      <p:nvGrpSpPr>
+        <p:cNvPr id="1" name=""/>
+        <p:cNvGrpSpPr/>
+        <p:nvPr/>
+      </p:nvGrpSpPr>
+      <p:grpSpPr>
+        <a:xfrm>
+          <a:off x="0" y="0"/>
+          <a:ext cx="0" cy="0"/>
+          <a:chOff x="0" y="0"/>
+          <a:chExt cx="0" cy="0"/>
+        </a:xfrm>
+      </p:grpSpPr>
+      <p:sp>
+        <p:nvSpPr>
+          <p:cNvPr id="2" name="Slide Image Placeholder 1"/>
+          <p:cNvSpPr>
+            <a:spLocks noGrp="1" noRot="1" noChangeAspect="1"/>
+          </p:cNvSpPr>
+          <p:nvPr>
+            <p:ph type="sldImg"/>
+          </p:nvPr>
+        </p:nvSpPr>
+        <p:spPr/>
+      </p:sp>
+      <p:sp>
+        <p:nvSpPr>
+          <p:cNvPr id="3" name="Notes Placeholder 2"/>
+          <p:cNvSpPr>
+            <a:spLocks noGrp="1"/>
+          </p:cNvSpPr>
+          <p:nvPr>
+            <p:ph type="body" idx="1"/>
+          </p:nvPr>
+        </p:nvSpPr>
+        <p:spPr/>
+        <p:txBody>
+          <a:bodyPr/>
+          <a:lstStyle/>
+          <a:p>
+            <a:r>
+              <a:rPr lang="en-US" dirty="0"/>
+              <a:t>Rule: When a word ends in a consonant + y, change the y to i before most endings: carry → carried. Two exceptions: keep the y before -ing (carrying), and change nothing when a vowel comes before the y (played).
+Answers: carried, happier, cities, tried</a:t>
+            </a:r>
+            <a:endParaRPr lang="en-US" dirty="0"/>
+          </a:p>
+        </p:txBody>
+      </p:sp>
+      <p:sp>
+        <p:nvSpPr>
+          <p:cNvPr id="4" name="Slide Number Placeholder 3"/>
+          <p:cNvSpPr>
+            <a:spLocks noGrp="1"/>
+          </p:cNvSpPr>
+          <p:nvPr>
+            <p:ph type="sldNum" sz="quarter" idx="10"/>
+          </p:nvPr>
+        </p:nvSpPr>
+        <p:spPr/>
+        <p:txBody>
+          <a:bodyPr/>
+          <a:lstStyle/>
+          <a:p>
+            <a:fld id="{F7021451-1387-4CA6-816F-3879F97B5CBC}" type="slidenum">
+              <a:rPr lang="en-US"/>
+              <a:t>17</a:t>
+            </a:fld>
+            <a:endParaRPr lang="en-US"/>
+          </a:p>
+        </p:txBody>
+      </p:sp>
+    </p:spTree>
+    <p:extLst>
+      <p:ext uri="{BB962C8B-B14F-4D97-AF65-F5344CB8AC3E}">
+        <p14:creationId xmlns:p14="http://schemas.microsoft.com/office/powerpoint/2010/main" val="1024086991"/>
+      </p:ext>
+    </p:extLst>
+  </p:cSld>
+  <p:clrMapOvr>
+    <a:masterClrMapping/>
+  </p:clrMapOvr>
+</p:notes>
+</file>
+
+<file path=ppt/notesSlides/notesSlide18.xml><?xml version="1.0" encoding="utf-8"?>
+<p:notes xmlns:a="http://schemas.openxmlformats.org/drawingml/2006/main" xmlns:r="http://schemas.openxmlformats.org/officeDocument/2006/relationships" xmlns:p="http://schemas.openxmlformats.org/presentationml/2006/main">
+  <p:cSld>
+    <p:spTree>
+      <p:nvGrpSpPr>
+        <p:cNvPr id="1" name=""/>
+        <p:cNvGrpSpPr/>
+        <p:nvPr/>
+      </p:nvGrpSpPr>
+      <p:grpSpPr>
+        <a:xfrm>
+          <a:off x="0" y="0"/>
+          <a:ext cx="0" cy="0"/>
+          <a:chOff x="0" y="0"/>
+          <a:chExt cx="0" cy="0"/>
+        </a:xfrm>
+      </p:grpSpPr>
+      <p:sp>
+        <p:nvSpPr>
+          <p:cNvPr id="2" name="Slide Image Placeholder 1"/>
+          <p:cNvSpPr>
+            <a:spLocks noGrp="1" noRot="1" noChangeAspect="1"/>
+          </p:cNvSpPr>
+          <p:nvPr>
+            <p:ph type="sldImg"/>
+          </p:nvPr>
+        </p:nvSpPr>
+        <p:spPr/>
+      </p:sp>
+      <p:sp>
+        <p:nvSpPr>
+          <p:cNvPr id="3" name="Notes Placeholder 2"/>
+          <p:cNvSpPr>
+            <a:spLocks noGrp="1"/>
+          </p:cNvSpPr>
+          <p:nvPr>
+            <p:ph type="body" idx="1"/>
+          </p:nvPr>
+        </p:nvSpPr>
+        <p:spPr/>
+        <p:txBody>
+          <a:bodyPr/>
+          <a:lstStyle/>
+          <a:p>
+            <a:r>
+              <a:rPr lang="en-US" dirty="0"/>
+              <a:t>Read the chapters, then return to the pause questions.</a:t>
+            </a:r>
+            <a:endParaRPr lang="en-US" dirty="0"/>
+          </a:p>
+        </p:txBody>
+      </p:sp>
+      <p:sp>
+        <p:nvSpPr>
+          <p:cNvPr id="4" name="Slide Number Placeholder 3"/>
+          <p:cNvSpPr>
+            <a:spLocks noGrp="1"/>
+          </p:cNvSpPr>
+          <p:nvPr>
+            <p:ph type="sldNum" sz="quarter" idx="10"/>
+          </p:nvPr>
+        </p:nvSpPr>
+        <p:spPr/>
+        <p:txBody>
+          <a:bodyPr/>
+          <a:lstStyle/>
+          <a:p>
+            <a:fld id="{F7021451-1387-4CA6-816F-3879F97B5CBC}" type="slidenum">
+              <a:rPr lang="en-US"/>
+              <a:t>18</a:t>
+            </a:fld>
+            <a:endParaRPr lang="en-US"/>
+          </a:p>
+        </p:txBody>
+      </p:sp>
+    </p:spTree>
+    <p:extLst>
+      <p:ext uri="{BB962C8B-B14F-4D97-AF65-F5344CB8AC3E}">
+        <p14:creationId xmlns:p14="http://schemas.microsoft.com/office/powerpoint/2010/main" val="1024086991"/>
+      </p:ext>
+    </p:extLst>
+  </p:cSld>
+  <p:clrMapOvr>
+    <a:masterClrMapping/>
+  </p:clrMapOvr>
+</p:notes>
+</file>
+
+<file path=ppt/notesSlides/notesSlide19.xml><?xml version="1.0" encoding="utf-8"?>
+<p:notes xmlns:a="http://schemas.openxmlformats.org/drawingml/2006/main" xmlns:r="http://schemas.openxmlformats.org/officeDocument/2006/relationships" xmlns:p="http://schemas.openxmlformats.org/presentationml/2006/main">
+  <p:cSld>
+    <p:spTree>
+      <p:nvGrpSpPr>
+        <p:cNvPr id="1" name=""/>
+        <p:cNvGrpSpPr/>
+        <p:nvPr/>
+      </p:nvGrpSpPr>
+      <p:grpSpPr>
+        <a:xfrm>
+          <a:off x="0" y="0"/>
+          <a:ext cx="0" cy="0"/>
+          <a:chOff x="0" y="0"/>
+          <a:chExt cx="0" cy="0"/>
+        </a:xfrm>
+      </p:grpSpPr>
+      <p:sp>
+        <p:nvSpPr>
+          <p:cNvPr id="2" name="Slide Image Placeholder 1"/>
+          <p:cNvSpPr>
+            <a:spLocks noGrp="1" noRot="1" noChangeAspect="1"/>
+          </p:cNvSpPr>
+          <p:nvPr>
+            <p:ph type="sldImg"/>
+          </p:nvPr>
+        </p:nvSpPr>
+        <p:spPr/>
+      </p:sp>
+      <p:sp>
+        <p:nvSpPr>
+          <p:cNvPr id="3" name="Notes Placeholder 2"/>
+          <p:cNvSpPr>
+            <a:spLocks noGrp="1"/>
+          </p:cNvSpPr>
+          <p:nvPr>
+            <p:ph type="body" idx="1"/>
+          </p:nvPr>
+        </p:nvSpPr>
+        <p:spPr/>
+        <p:txBody>
+          <a:bodyPr/>
+          <a:lstStyle/>
+          <a:p>
+            <a:r>
+              <a:rPr lang="en-US" dirty="0"/>
+              <a:t>Writer’s Workshop stage for the week.</a:t>
+            </a:r>
+            <a:endParaRPr lang="en-US" dirty="0"/>
+          </a:p>
+        </p:txBody>
+      </p:sp>
+      <p:sp>
+        <p:nvSpPr>
+          <p:cNvPr id="4" name="Slide Number Placeholder 3"/>
+          <p:cNvSpPr>
+            <a:spLocks noGrp="1"/>
+          </p:cNvSpPr>
+          <p:nvPr>
+            <p:ph type="sldNum" sz="quarter" idx="10"/>
+          </p:nvPr>
+        </p:nvSpPr>
+        <p:spPr/>
+        <p:txBody>
+          <a:bodyPr/>
+          <a:lstStyle/>
+          <a:p>
+            <a:fld id="{F7021451-1387-4CA6-816F-3879F97B5CBC}" type="slidenum">
+              <a:rPr lang="en-US"/>
+              <a:t>19</a:t>
             </a:fld>
             <a:endParaRPr lang="en-US"/>
           </a:p>
@@ -1573,7 +1846,7 @@
           <a:p>
             <a:r>
               <a:rPr lang="en-US" dirty="0"/>
-              <a:t>Reading lens: Good readers watch for unexpected connections . This week, pay attention to the moments when two very different characters find something in common.</a:t>
+              <a:t>Reading lens: Good readers watch for unexpected connections. This week, pay attention to the moments when two very different characters find something in common.</a:t>
             </a:r>
             <a:endParaRPr lang="en-US" dirty="0"/>
           </a:p>
@@ -1661,8 +1934,7 @@
           <a:p>
             <a:r>
               <a:rPr lang="en-US" dirty="0"/>
-              <a:t>Corrected:  1. Gregory the jailer carried a candle with a long rope tied around his waist so he could find his way.
-Look for: Did you catch the proper noun (Gregory, Roscuro), the comma, and capital letters at the start of each sentence?</a:t>
+              <a:t>Tap through each highlighted word in the lesson and name what it does right before moving to the fix-it.</a:t>
             </a:r>
             <a:endParaRPr lang="en-US" dirty="0"/>
           </a:p>
@@ -1750,8 +2022,8 @@
           <a:p>
             <a:r>
               <a:rPr lang="en-US" dirty="0"/>
-              <a:t>Corrected:  1. Gregory the jailer carried a candle with a long rope tied around his waist so he could find his way.
-Look for: Did you catch the proper noun (Gregory, Roscuro), the comma, and capital letters at the start of each sentence?</a:t>
+              <a:t>Corrected: Gregory the jailer carried a candle with a long rope tied around his waist so he could find his way. 
+Look for: </a:t>
             </a:r>
             <a:endParaRPr lang="en-US" dirty="0"/>
           </a:p>
@@ -1839,7 +2111,8 @@
           <a:p>
             <a:r>
               <a:rPr lang="en-US" dirty="0"/>
-              <a:t>Break the word into base + word part. Ask what the part adds to the meaning.</a:t>
+              <a:t>Corrected: Gregory the jailer carried a candle with a long rope tied around his waist so he could find his way. 
+Look for: </a:t>
             </a:r>
             <a:endParaRPr lang="en-US" dirty="0"/>
           </a:p>
@@ -2412,7 +2685,7 @@
             <a:avLst/>
           </a:prstGeom>
           <a:solidFill>
-            <a:srgbClr val="55C8E8"/>
+            <a:srgbClr val="8B6FC0"/>
           </a:solidFill>
           <a:ln/>
         </p:spPr>
@@ -2450,7 +2723,7 @@
                 <a:ea typeface="Calibri" pitchFamily="34" charset="-122"/>
                 <a:cs typeface="Calibri" pitchFamily="34" charset="-120"/>
               </a:rPr>
-              <a:t>🔤  Vocabulary</a:t>
+              <a:t>🌱  Morphology</a:t>
             </a:r>
             <a:endParaRPr lang="en-US" sz="2200" dirty="0"/>
           </a:p>
@@ -2483,13 +2756,13 @@
             <a:r>
               <a:rPr lang="en-US" sz="1100" b="1" spc="100" kern="0" dirty="0">
                 <a:solidFill>
-                  <a:srgbClr val="55C8E8"/>
-                </a:solidFill>
-                <a:latin typeface="Calibri" pitchFamily="34" charset="0"/>
-                <a:ea typeface="Calibri" pitchFamily="34" charset="-122"/>
-                <a:cs typeface="Calibri" pitchFamily="34" charset="-120"/>
-              </a:rPr>
-              <a:t>VOCABULARY</a:t>
+                  <a:srgbClr val="8B6FC0"/>
+                </a:solidFill>
+                <a:latin typeface="Calibri" pitchFamily="34" charset="0"/>
+                <a:ea typeface="Calibri" pitchFamily="34" charset="-122"/>
+                <a:cs typeface="Calibri" pitchFamily="34" charset="-120"/>
+              </a:rPr>
+              <a:t>DIS-</a:t>
             </a:r>
             <a:endParaRPr lang="en-US" sz="1100" dirty="0"/>
           </a:p>
@@ -2504,15 +2777,15 @@
         <p:spPr>
           <a:xfrm>
             <a:off x="365760" y="1097280"/>
-            <a:ext cx="8412480" cy="658368"/>
+            <a:ext cx="8412480" cy="621792"/>
           </a:xfrm>
           <a:prstGeom prst="roundRect">
             <a:avLst>
-              <a:gd name="adj" fmla="val 13889"/>
+              <a:gd name="adj" fmla="val 14706"/>
             </a:avLst>
           </a:prstGeom>
           <a:solidFill>
-            <a:srgbClr val="E5F7FC"/>
+            <a:srgbClr val="F0E8FF"/>
           </a:solidFill>
           <a:ln/>
           <a:effectLst>
@@ -2532,48 +2805,34 @@
         </p:nvSpPr>
         <p:spPr>
           <a:xfrm>
-            <a:off x="594360" y="1225296"/>
-            <a:ext cx="7863840" cy="420624"/>
-          </a:xfrm>
-          <a:prstGeom prst="rect">
-            <a:avLst/>
-          </a:prstGeom>
-          <a:noFill/>
-          <a:ln/>
-        </p:spPr>
-        <p:txBody>
-          <a:bodyPr wrap="square" lIns="0" tIns="0" rIns="0" bIns="0" rtlCol="0" anchor="ctr"/>
-          <a:lstStyle/>
-          <a:p>
-            <a:pPr indent="0" marL="0">
-              <a:buNone/>
-            </a:pPr>
-            <a:r>
-              <a:rPr lang="en-US" sz="1700" b="1" dirty="0">
-                <a:solidFill>
-                  <a:srgbClr val="0E1C42"/>
-                </a:solidFill>
-                <a:latin typeface="Calibri" pitchFamily="34" charset="0"/>
-                <a:ea typeface="Calibri" pitchFamily="34" charset="-122"/>
-                <a:cs typeface="Calibri" pitchFamily="34" charset="-120"/>
-              </a:rPr>
-              <a:t>dungeon  </a:t>
-            </a:r>
-            <a:pPr indent="0" marL="0">
-              <a:buNone/>
-            </a:pPr>
-            <a:r>
-              <a:rPr lang="en-US" sz="1400" dirty="0">
-                <a:solidFill>
-                  <a:srgbClr val="1E293B"/>
-                </a:solidFill>
-                <a:latin typeface="Calibri" pitchFamily="34" charset="0"/>
-                <a:ea typeface="Calibri" pitchFamily="34" charset="-122"/>
-                <a:cs typeface="Calibri" pitchFamily="34" charset="-120"/>
-              </a:rPr>
-              <a:t>A dark prison room, usually underground.</a:t>
-            </a:r>
-            <a:endParaRPr lang="en-US" sz="1700" dirty="0"/>
+            <a:off x="594360" y="1216152"/>
+            <a:ext cx="7863840" cy="384048"/>
+          </a:xfrm>
+          <a:prstGeom prst="rect">
+            <a:avLst/>
+          </a:prstGeom>
+          <a:noFill/>
+          <a:ln/>
+        </p:spPr>
+        <p:txBody>
+          <a:bodyPr wrap="square" lIns="0" tIns="0" rIns="0" bIns="0" rtlCol="0" anchor="ctr"/>
+          <a:lstStyle/>
+          <a:p>
+            <a:pPr indent="0" marL="0">
+              <a:buNone/>
+            </a:pPr>
+            <a:r>
+              <a:rPr lang="en-US" sz="1500" dirty="0">
+                <a:solidFill>
+                  <a:srgbClr val="1E293B"/>
+                </a:solidFill>
+                <a:latin typeface="Calibri" pitchFamily="34" charset="0"/>
+                <a:ea typeface="Calibri" pitchFamily="34" charset="-122"/>
+                <a:cs typeface="Calibri" pitchFamily="34" charset="-120"/>
+              </a:rPr>
+              <a:t>🌱  dis- means not, or the opposite.</a:t>
+            </a:r>
+            <a:endParaRPr lang="en-US" sz="1500" dirty="0"/>
           </a:p>
         </p:txBody>
       </p:sp>
@@ -2585,16 +2844,16 @@
         </p:nvSpPr>
         <p:spPr>
           <a:xfrm>
-            <a:off x="365760" y="1828800"/>
-            <a:ext cx="8412480" cy="658368"/>
+            <a:off x="365760" y="1792224"/>
+            <a:ext cx="8412480" cy="621792"/>
           </a:xfrm>
           <a:prstGeom prst="roundRect">
             <a:avLst>
-              <a:gd name="adj" fmla="val 13889"/>
+              <a:gd name="adj" fmla="val 14706"/>
             </a:avLst>
           </a:prstGeom>
           <a:solidFill>
-            <a:srgbClr val="FFFFFF"/>
+            <a:srgbClr val="F8F4FF"/>
           </a:solidFill>
           <a:ln/>
           <a:effectLst>
@@ -2614,48 +2873,34 @@
         </p:nvSpPr>
         <p:spPr>
           <a:xfrm>
-            <a:off x="594360" y="1956816"/>
-            <a:ext cx="7863840" cy="420624"/>
-          </a:xfrm>
-          <a:prstGeom prst="rect">
-            <a:avLst/>
-          </a:prstGeom>
-          <a:noFill/>
-          <a:ln/>
-        </p:spPr>
-        <p:txBody>
-          <a:bodyPr wrap="square" lIns="0" tIns="0" rIns="0" bIns="0" rtlCol="0" anchor="ctr"/>
-          <a:lstStyle/>
-          <a:p>
-            <a:pPr indent="0" marL="0">
-              <a:buNone/>
-            </a:pPr>
-            <a:r>
-              <a:rPr lang="en-US" sz="1700" b="1" dirty="0">
-                <a:solidFill>
-                  <a:srgbClr val="0E1C42"/>
-                </a:solidFill>
-                <a:latin typeface="Calibri" pitchFamily="34" charset="0"/>
-                <a:ea typeface="Calibri" pitchFamily="34" charset="-122"/>
-                <a:cs typeface="Calibri" pitchFamily="34" charset="-120"/>
-              </a:rPr>
-              <a:t>sacred  </a:t>
-            </a:r>
-            <a:pPr indent="0" marL="0">
-              <a:buNone/>
-            </a:pPr>
-            <a:r>
-              <a:rPr lang="en-US" sz="1400" dirty="0">
-                <a:solidFill>
-                  <a:srgbClr val="1E293B"/>
-                </a:solidFill>
-                <a:latin typeface="Calibri" pitchFamily="34" charset="0"/>
-                <a:ea typeface="Calibri" pitchFamily="34" charset="-122"/>
-                <a:cs typeface="Calibri" pitchFamily="34" charset="-120"/>
-              </a:rPr>
-              <a:t>So important and respected that it must never be broken.</a:t>
-            </a:r>
-            <a:endParaRPr lang="en-US" sz="1700" dirty="0"/>
+            <a:off x="594360" y="1911096"/>
+            <a:ext cx="7863840" cy="384048"/>
+          </a:xfrm>
+          <a:prstGeom prst="rect">
+            <a:avLst/>
+          </a:prstGeom>
+          <a:noFill/>
+          <a:ln/>
+        </p:spPr>
+        <p:txBody>
+          <a:bodyPr wrap="square" lIns="0" tIns="0" rIns="0" bIns="0" rtlCol="0" anchor="ctr"/>
+          <a:lstStyle/>
+          <a:p>
+            <a:pPr indent="0" marL="0">
+              <a:buNone/>
+            </a:pPr>
+            <a:r>
+              <a:rPr lang="en-US" sz="1500" dirty="0">
+                <a:solidFill>
+                  <a:srgbClr val="1E293B"/>
+                </a:solidFill>
+                <a:latin typeface="Calibri" pitchFamily="34" charset="0"/>
+                <a:ea typeface="Calibri" pitchFamily="34" charset="-122"/>
+                <a:cs typeface="Calibri" pitchFamily="34" charset="-120"/>
+              </a:rPr>
+              <a:t>🌱  disappear = to stop being seen · dislike = to not like · disagree = to not agree</a:t>
+            </a:r>
+            <a:endParaRPr lang="en-US" sz="1500" dirty="0"/>
           </a:p>
         </p:txBody>
       </p:sp>
@@ -2667,16 +2912,16 @@
         </p:nvSpPr>
         <p:spPr>
           <a:xfrm>
-            <a:off x="365760" y="2560320"/>
-            <a:ext cx="8412480" cy="658368"/>
+            <a:off x="365760" y="2487168"/>
+            <a:ext cx="8412480" cy="621792"/>
           </a:xfrm>
           <a:prstGeom prst="roundRect">
             <a:avLst>
-              <a:gd name="adj" fmla="val 13889"/>
+              <a:gd name="adj" fmla="val 14706"/>
             </a:avLst>
           </a:prstGeom>
           <a:solidFill>
-            <a:srgbClr val="E5F7FC"/>
+            <a:srgbClr val="F0E8FF"/>
           </a:solidFill>
           <a:ln/>
           <a:effectLst>
@@ -2696,130 +2941,34 @@
         </p:nvSpPr>
         <p:spPr>
           <a:xfrm>
-            <a:off x="594360" y="2688336"/>
-            <a:ext cx="7863840" cy="420624"/>
-          </a:xfrm>
-          <a:prstGeom prst="rect">
-            <a:avLst/>
-          </a:prstGeom>
-          <a:noFill/>
-          <a:ln/>
-        </p:spPr>
-        <p:txBody>
-          <a:bodyPr wrap="square" lIns="0" tIns="0" rIns="0" bIns="0" rtlCol="0" anchor="ctr"/>
-          <a:lstStyle/>
-          <a:p>
-            <a:pPr indent="0" marL="0">
-              <a:buNone/>
-            </a:pPr>
-            <a:r>
-              <a:rPr lang="en-US" sz="1700" b="1" dirty="0">
-                <a:solidFill>
-                  <a:srgbClr val="0E1C42"/>
-                </a:solidFill>
-                <a:latin typeface="Calibri" pitchFamily="34" charset="0"/>
-                <a:ea typeface="Calibri" pitchFamily="34" charset="-122"/>
-                <a:cs typeface="Calibri" pitchFamily="34" charset="-120"/>
-              </a:rPr>
-              <a:t>darkness  </a:t>
-            </a:r>
-            <a:pPr indent="0" marL="0">
-              <a:buNone/>
-            </a:pPr>
-            <a:r>
-              <a:rPr lang="en-US" sz="1400" dirty="0">
-                <a:solidFill>
-                  <a:srgbClr val="1E293B"/>
-                </a:solidFill>
-                <a:latin typeface="Calibri" pitchFamily="34" charset="0"/>
-                <a:ea typeface="Calibri" pitchFamily="34" charset="-122"/>
-                <a:cs typeface="Calibri" pitchFamily="34" charset="-120"/>
-              </a:rPr>
-              <a:t>The complete absence of light.</a:t>
-            </a:r>
-            <a:endParaRPr lang="en-US" sz="1700" dirty="0"/>
-          </a:p>
-        </p:txBody>
-      </p:sp>
-      <p:sp>
-        <p:nvSpPr>
-          <p:cNvPr id="11" name="Shape 9"/>
-          <p:cNvSpPr/>
-          <p:nvPr/>
-        </p:nvSpPr>
-        <p:spPr>
-          <a:xfrm>
-            <a:off x="365760" y="3291840"/>
-            <a:ext cx="8412480" cy="658368"/>
-          </a:xfrm>
-          <a:prstGeom prst="roundRect">
-            <a:avLst>
-              <a:gd name="adj" fmla="val 13889"/>
-            </a:avLst>
-          </a:prstGeom>
-          <a:solidFill>
-            <a:srgbClr val="FFFFFF"/>
-          </a:solidFill>
-          <a:ln/>
-          <a:effectLst>
-            <a:outerShdw sx="100000" sy="100000" kx="0" ky="0" algn="bl" rotWithShape="0" blurRad="101600" dist="38100" dir="2700000">
-              <a:srgbClr val="000000">
-                <a:alpha val="12000"/>
-              </a:srgbClr>
-            </a:outerShdw>
-          </a:effectLst>
-        </p:spPr>
-      </p:sp>
-      <p:sp>
-        <p:nvSpPr>
-          <p:cNvPr id="12" name="Text 10"/>
-          <p:cNvSpPr/>
-          <p:nvPr/>
-        </p:nvSpPr>
-        <p:spPr>
-          <a:xfrm>
-            <a:off x="594360" y="3419856"/>
-            <a:ext cx="7863840" cy="420624"/>
-          </a:xfrm>
-          <a:prstGeom prst="rect">
-            <a:avLst/>
-          </a:prstGeom>
-          <a:noFill/>
-          <a:ln/>
-        </p:spPr>
-        <p:txBody>
-          <a:bodyPr wrap="square" lIns="0" tIns="0" rIns="0" bIns="0" rtlCol="0" anchor="ctr"/>
-          <a:lstStyle/>
-          <a:p>
-            <a:pPr indent="0" marL="0">
-              <a:buNone/>
-            </a:pPr>
-            <a:r>
-              <a:rPr lang="en-US" sz="1700" b="1" dirty="0">
-                <a:solidFill>
-                  <a:srgbClr val="0E1C42"/>
-                </a:solidFill>
-                <a:latin typeface="Calibri" pitchFamily="34" charset="0"/>
-                <a:ea typeface="Calibri" pitchFamily="34" charset="-122"/>
-                <a:cs typeface="Calibri" pitchFamily="34" charset="-120"/>
-              </a:rPr>
-              <a:t>whisper  </a:t>
-            </a:r>
-            <a:pPr indent="0" marL="0">
-              <a:buNone/>
-            </a:pPr>
-            <a:r>
-              <a:rPr lang="en-US" sz="1400" dirty="0">
-                <a:solidFill>
-                  <a:srgbClr val="1E293B"/>
-                </a:solidFill>
-                <a:latin typeface="Calibri" pitchFamily="34" charset="0"/>
-                <a:ea typeface="Calibri" pitchFamily="34" charset="-122"/>
-                <a:cs typeface="Calibri" pitchFamily="34" charset="-120"/>
-              </a:rPr>
-              <a:t>To speak very quietly, using breath instead of voice.</a:t>
-            </a:r>
-            <a:endParaRPr lang="en-US" sz="1700" dirty="0"/>
+            <a:off x="594360" y="2606040"/>
+            <a:ext cx="7863840" cy="384048"/>
+          </a:xfrm>
+          <a:prstGeom prst="rect">
+            <a:avLst/>
+          </a:prstGeom>
+          <a:noFill/>
+          <a:ln/>
+        </p:spPr>
+        <p:txBody>
+          <a:bodyPr wrap="square" lIns="0" tIns="0" rIns="0" bIns="0" rtlCol="0" anchor="ctr"/>
+          <a:lstStyle/>
+          <a:p>
+            <a:pPr indent="0" marL="0">
+              <a:buNone/>
+            </a:pPr>
+            <a:r>
+              <a:rPr lang="en-US" sz="1500" dirty="0">
+                <a:solidFill>
+                  <a:srgbClr val="1E293B"/>
+                </a:solidFill>
+                <a:latin typeface="Calibri" pitchFamily="34" charset="0"/>
+                <a:ea typeface="Calibri" pitchFamily="34" charset="-122"/>
+                <a:cs typeface="Calibri" pitchFamily="34" charset="-120"/>
+              </a:rPr>
+              <a:t>🌱  Practice: Match the Word to Its Meaning! Tap a word, then tap what it means.</a:t>
+            </a:r>
+            <a:endParaRPr lang="en-US" sz="1500" dirty="0"/>
           </a:p>
         </p:txBody>
       </p:sp>
@@ -2837,7 +2986,7 @@
     <p:bg>
       <p:bgPr>
         <a:solidFill>
-          <a:srgbClr val="F8FAFC"/>
+          <a:srgbClr val="FFFFFF"/>
         </a:solidFill>
       </p:bgPr>
     </p:bg>
@@ -2870,7 +3019,7 @@
             <a:avLst/>
           </a:prstGeom>
           <a:solidFill>
-            <a:srgbClr val="C7922C"/>
+            <a:srgbClr val="55C8E8"/>
           </a:solidFill>
           <a:ln/>
         </p:spPr>
@@ -2908,7 +3057,7 @@
                 <a:ea typeface="Calibri" pitchFamily="34" charset="-122"/>
                 <a:cs typeface="Calibri" pitchFamily="34" charset="-120"/>
               </a:rPr>
-              <a:t>✏️  Grammar</a:t>
+              <a:t>🔤  Vocabulary</a:t>
             </a:r>
             <a:endParaRPr lang="en-US" sz="2200" dirty="0"/>
           </a:p>
@@ -2922,7 +3071,7 @@
         </p:nvSpPr>
         <p:spPr>
           <a:xfrm>
-            <a:off x="365760" y="777240"/>
+            <a:off x="365760" y="804672"/>
             <a:ext cx="8229600" cy="237744"/>
           </a:xfrm>
           <a:prstGeom prst="rect">
@@ -2941,13 +3090,13 @@
             <a:r>
               <a:rPr lang="en-US" sz="1100" b="1" spc="100" kern="0" dirty="0">
                 <a:solidFill>
-                  <a:srgbClr val="C7922C"/>
-                </a:solidFill>
-                <a:latin typeface="Calibri" pitchFamily="34" charset="0"/>
-                <a:ea typeface="Calibri" pitchFamily="34" charset="-122"/>
-                <a:cs typeface="Calibri" pitchFamily="34" charset="-120"/>
-              </a:rPr>
-              <a:t>POSSESSIVE NOUNS</a:t>
+                  <a:srgbClr val="55C8E8"/>
+                </a:solidFill>
+                <a:latin typeface="Calibri" pitchFamily="34" charset="0"/>
+                <a:ea typeface="Calibri" pitchFamily="34" charset="-122"/>
+                <a:cs typeface="Calibri" pitchFamily="34" charset="-120"/>
+              </a:rPr>
+              <a:t>VOCABULARY</a:t>
             </a:r>
             <a:endParaRPr lang="en-US" sz="1100" dirty="0"/>
           </a:p>
@@ -2961,7 +3110,7 @@
         </p:nvSpPr>
         <p:spPr>
           <a:xfrm>
-            <a:off x="365760" y="1078992"/>
+            <a:off x="365760" y="1097280"/>
             <a:ext cx="8412480" cy="658368"/>
           </a:xfrm>
           <a:prstGeom prst="roundRect">
@@ -2970,7 +3119,7 @@
             </a:avLst>
           </a:prstGeom>
           <a:solidFill>
-            <a:srgbClr val="FEF6E8"/>
+            <a:srgbClr val="E5F7FC"/>
           </a:solidFill>
           <a:ln/>
           <a:effectLst>
@@ -2991,33 +3140,47 @@
         <p:spPr>
           <a:xfrm>
             <a:off x="594360" y="1225296"/>
-            <a:ext cx="7863840" cy="402336"/>
-          </a:xfrm>
-          <a:prstGeom prst="rect">
-            <a:avLst/>
-          </a:prstGeom>
-          <a:noFill/>
-          <a:ln/>
-        </p:spPr>
-        <p:txBody>
-          <a:bodyPr wrap="square" lIns="0" tIns="0" rIns="0" bIns="0" rtlCol="0" anchor="ctr"/>
-          <a:lstStyle/>
-          <a:p>
-            <a:pPr indent="0" marL="0">
-              <a:buNone/>
-            </a:pPr>
-            <a:r>
-              <a:rPr lang="en-US" sz="1600" dirty="0">
-                <a:solidFill>
-                  <a:srgbClr val="1E293B"/>
-                </a:solidFill>
-                <a:latin typeface="Calibri" pitchFamily="34" charset="0"/>
-                <a:ea typeface="Calibri" pitchFamily="34" charset="-122"/>
-                <a:cs typeface="Calibri" pitchFamily="34" charset="-120"/>
-              </a:rPr>
-              <a:t>Despereaux's heart thudded once, twice.</a:t>
-            </a:r>
-            <a:endParaRPr lang="en-US" sz="1600" dirty="0"/>
+            <a:ext cx="7863840" cy="420624"/>
+          </a:xfrm>
+          <a:prstGeom prst="rect">
+            <a:avLst/>
+          </a:prstGeom>
+          <a:noFill/>
+          <a:ln/>
+        </p:spPr>
+        <p:txBody>
+          <a:bodyPr wrap="square" lIns="0" tIns="0" rIns="0" bIns="0" rtlCol="0" anchor="ctr"/>
+          <a:lstStyle/>
+          <a:p>
+            <a:pPr indent="0" marL="0">
+              <a:buNone/>
+            </a:pPr>
+            <a:r>
+              <a:rPr lang="en-US" sz="1700" b="1" dirty="0">
+                <a:solidFill>
+                  <a:srgbClr val="0E1C42"/>
+                </a:solidFill>
+                <a:latin typeface="Calibri" pitchFamily="34" charset="0"/>
+                <a:ea typeface="Calibri" pitchFamily="34" charset="-122"/>
+                <a:cs typeface="Calibri" pitchFamily="34" charset="-120"/>
+              </a:rPr>
+              <a:t>dungeon  </a:t>
+            </a:r>
+            <a:pPr indent="0" marL="0">
+              <a:buNone/>
+            </a:pPr>
+            <a:r>
+              <a:rPr lang="en-US" sz="1400" dirty="0">
+                <a:solidFill>
+                  <a:srgbClr val="1E293B"/>
+                </a:solidFill>
+                <a:latin typeface="Calibri" pitchFamily="34" charset="0"/>
+                <a:ea typeface="Calibri" pitchFamily="34" charset="-122"/>
+                <a:cs typeface="Calibri" pitchFamily="34" charset="-120"/>
+              </a:rPr>
+              <a:t>A dark prison room, usually underground.</a:t>
+            </a:r>
+            <a:endParaRPr lang="en-US" sz="1700" dirty="0"/>
           </a:p>
         </p:txBody>
       </p:sp>
@@ -3029,7 +3192,7 @@
         </p:nvSpPr>
         <p:spPr>
           <a:xfrm>
-            <a:off x="365760" y="1810512"/>
+            <a:off x="365760" y="1828800"/>
             <a:ext cx="8412480" cy="658368"/>
           </a:xfrm>
           <a:prstGeom prst="roundRect">
@@ -3059,33 +3222,47 @@
         <p:spPr>
           <a:xfrm>
             <a:off x="594360" y="1956816"/>
-            <a:ext cx="7863840" cy="402336"/>
-          </a:xfrm>
-          <a:prstGeom prst="rect">
-            <a:avLst/>
-          </a:prstGeom>
-          <a:noFill/>
-          <a:ln/>
-        </p:spPr>
-        <p:txBody>
-          <a:bodyPr wrap="square" lIns="0" tIns="0" rIns="0" bIns="0" rtlCol="0" anchor="ctr"/>
-          <a:lstStyle/>
-          <a:p>
-            <a:pPr indent="0" marL="0">
-              <a:buNone/>
-            </a:pPr>
-            <a:r>
-              <a:rPr lang="en-US" sz="1600" dirty="0">
-                <a:solidFill>
-                  <a:srgbClr val="1E293B"/>
-                </a:solidFill>
-                <a:latin typeface="Calibri" pitchFamily="34" charset="0"/>
-                <a:ea typeface="Calibri" pitchFamily="34" charset="-122"/>
-                <a:cs typeface="Calibri" pitchFamily="34" charset="-120"/>
-              </a:rPr>
-              <a:t>The threadmaster's breath was in his ear.</a:t>
-            </a:r>
-            <a:endParaRPr lang="en-US" sz="1600" dirty="0"/>
+            <a:ext cx="7863840" cy="420624"/>
+          </a:xfrm>
+          <a:prstGeom prst="rect">
+            <a:avLst/>
+          </a:prstGeom>
+          <a:noFill/>
+          <a:ln/>
+        </p:spPr>
+        <p:txBody>
+          <a:bodyPr wrap="square" lIns="0" tIns="0" rIns="0" bIns="0" rtlCol="0" anchor="ctr"/>
+          <a:lstStyle/>
+          <a:p>
+            <a:pPr indent="0" marL="0">
+              <a:buNone/>
+            </a:pPr>
+            <a:r>
+              <a:rPr lang="en-US" sz="1700" b="1" dirty="0">
+                <a:solidFill>
+                  <a:srgbClr val="0E1C42"/>
+                </a:solidFill>
+                <a:latin typeface="Calibri" pitchFamily="34" charset="0"/>
+                <a:ea typeface="Calibri" pitchFamily="34" charset="-122"/>
+                <a:cs typeface="Calibri" pitchFamily="34" charset="-120"/>
+              </a:rPr>
+              <a:t>sacred  </a:t>
+            </a:r>
+            <a:pPr indent="0" marL="0">
+              <a:buNone/>
+            </a:pPr>
+            <a:r>
+              <a:rPr lang="en-US" sz="1400" dirty="0">
+                <a:solidFill>
+                  <a:srgbClr val="1E293B"/>
+                </a:solidFill>
+                <a:latin typeface="Calibri" pitchFamily="34" charset="0"/>
+                <a:ea typeface="Calibri" pitchFamily="34" charset="-122"/>
+                <a:cs typeface="Calibri" pitchFamily="34" charset="-120"/>
+              </a:rPr>
+              <a:t>So important and respected that it must never be broken.</a:t>
+            </a:r>
+            <a:endParaRPr lang="en-US" sz="1700" dirty="0"/>
           </a:p>
         </p:txBody>
       </p:sp>
@@ -3097,7 +3274,7 @@
         </p:nvSpPr>
         <p:spPr>
           <a:xfrm>
-            <a:off x="365760" y="2542032"/>
+            <a:off x="365760" y="2560320"/>
             <a:ext cx="8412480" cy="658368"/>
           </a:xfrm>
           <a:prstGeom prst="roundRect">
@@ -3106,7 +3283,7 @@
             </a:avLst>
           </a:prstGeom>
           <a:solidFill>
-            <a:srgbClr val="FEF6E8"/>
+            <a:srgbClr val="E5F7FC"/>
           </a:solidFill>
           <a:ln/>
           <a:effectLst>
@@ -3127,33 +3304,47 @@
         <p:spPr>
           <a:xfrm>
             <a:off x="594360" y="2688336"/>
-            <a:ext cx="7863840" cy="402336"/>
-          </a:xfrm>
-          <a:prstGeom prst="rect">
-            <a:avLst/>
-          </a:prstGeom>
-          <a:noFill/>
-          <a:ln/>
-        </p:spPr>
-        <p:txBody>
-          <a:bodyPr wrap="square" lIns="0" tIns="0" rIns="0" bIns="0" rtlCol="0" anchor="ctr"/>
-          <a:lstStyle/>
-          <a:p>
-            <a:pPr indent="0" marL="0">
-              <a:buNone/>
-            </a:pPr>
-            <a:r>
-              <a:rPr lang="en-US" sz="1600" dirty="0">
-                <a:solidFill>
-                  <a:srgbClr val="1E293B"/>
-                </a:solidFill>
-                <a:latin typeface="Calibri" pitchFamily="34" charset="0"/>
-                <a:ea typeface="Calibri" pitchFamily="34" charset="-122"/>
-                <a:cs typeface="Calibri" pitchFamily="34" charset="-120"/>
-              </a:rPr>
-              <a:t>The king's music filled the room.</a:t>
-            </a:r>
-            <a:endParaRPr lang="en-US" sz="1600" dirty="0"/>
+            <a:ext cx="7863840" cy="420624"/>
+          </a:xfrm>
+          <a:prstGeom prst="rect">
+            <a:avLst/>
+          </a:prstGeom>
+          <a:noFill/>
+          <a:ln/>
+        </p:spPr>
+        <p:txBody>
+          <a:bodyPr wrap="square" lIns="0" tIns="0" rIns="0" bIns="0" rtlCol="0" anchor="ctr"/>
+          <a:lstStyle/>
+          <a:p>
+            <a:pPr indent="0" marL="0">
+              <a:buNone/>
+            </a:pPr>
+            <a:r>
+              <a:rPr lang="en-US" sz="1700" b="1" dirty="0">
+                <a:solidFill>
+                  <a:srgbClr val="0E1C42"/>
+                </a:solidFill>
+                <a:latin typeface="Calibri" pitchFamily="34" charset="0"/>
+                <a:ea typeface="Calibri" pitchFamily="34" charset="-122"/>
+                <a:cs typeface="Calibri" pitchFamily="34" charset="-120"/>
+              </a:rPr>
+              <a:t>darkness  </a:t>
+            </a:r>
+            <a:pPr indent="0" marL="0">
+              <a:buNone/>
+            </a:pPr>
+            <a:r>
+              <a:rPr lang="en-US" sz="1400" dirty="0">
+                <a:solidFill>
+                  <a:srgbClr val="1E293B"/>
+                </a:solidFill>
+                <a:latin typeface="Calibri" pitchFamily="34" charset="0"/>
+                <a:ea typeface="Calibri" pitchFamily="34" charset="-122"/>
+                <a:cs typeface="Calibri" pitchFamily="34" charset="-120"/>
+              </a:rPr>
+              <a:t>The complete absence of light.</a:t>
+            </a:r>
+            <a:endParaRPr lang="en-US" sz="1700" dirty="0"/>
           </a:p>
         </p:txBody>
       </p:sp>
@@ -3165,7 +3356,7 @@
         </p:nvSpPr>
         <p:spPr>
           <a:xfrm>
-            <a:off x="365760" y="3273552"/>
+            <a:off x="365760" y="3291840"/>
             <a:ext cx="8412480" cy="658368"/>
           </a:xfrm>
           <a:prstGeom prst="roundRect">
@@ -3195,72 +3386,47 @@
         <p:spPr>
           <a:xfrm>
             <a:off x="594360" y="3419856"/>
-            <a:ext cx="7863840" cy="402336"/>
-          </a:xfrm>
-          <a:prstGeom prst="rect">
-            <a:avLst/>
-          </a:prstGeom>
-          <a:noFill/>
-          <a:ln/>
-        </p:spPr>
-        <p:txBody>
-          <a:bodyPr wrap="square" lIns="0" tIns="0" rIns="0" bIns="0" rtlCol="0" anchor="ctr"/>
-          <a:lstStyle/>
-          <a:p>
-            <a:pPr indent="0" marL="0">
-              <a:buNone/>
-            </a:pPr>
-            <a:r>
-              <a:rPr lang="en-US" sz="1600" dirty="0">
-                <a:solidFill>
-                  <a:srgbClr val="1E293B"/>
-                </a:solidFill>
-                <a:latin typeface="Calibri" pitchFamily="34" charset="0"/>
-                <a:ea typeface="Calibri" pitchFamily="34" charset="-122"/>
-                <a:cs typeface="Calibri" pitchFamily="34" charset="-120"/>
-              </a:rPr>
-              <a:t>Antoinette's children gathered around to stare.</a:t>
-            </a:r>
-            <a:endParaRPr lang="en-US" sz="1600" dirty="0"/>
-          </a:p>
-        </p:txBody>
-      </p:sp>
-      <p:sp>
-        <p:nvSpPr>
-          <p:cNvPr id="13" name="Text 11"/>
-          <p:cNvSpPr/>
-          <p:nvPr/>
-        </p:nvSpPr>
-        <p:spPr>
-          <a:xfrm>
-            <a:off x="365760" y="4050792"/>
-            <a:ext cx="8412480" cy="365760"/>
-          </a:xfrm>
-          <a:prstGeom prst="rect">
-            <a:avLst/>
-          </a:prstGeom>
-          <a:noFill/>
-          <a:ln/>
-        </p:spPr>
-        <p:txBody>
-          <a:bodyPr wrap="square" lIns="0" tIns="0" rIns="0" bIns="0" rtlCol="0" anchor="ctr"/>
-          <a:lstStyle/>
-          <a:p>
-            <a:pPr indent="0" marL="0">
-              <a:buNone/>
-            </a:pPr>
-            <a:r>
-              <a:rPr lang="en-US" sz="1500" i="1" dirty="0">
-                <a:solidFill>
-                  <a:srgbClr val="64748B"/>
-                </a:solidFill>
-                <a:latin typeface="Calibri" pitchFamily="34" charset="0"/>
-                <a:ea typeface="Calibri" pitchFamily="34" charset="-122"/>
-                <a:cs typeface="Calibri" pitchFamily="34" charset="-120"/>
-              </a:rPr>
-              <a:t>Your turn. Find the possessive noun — the one with an apostrophe. Tap a word to check — green means you got it.</a:t>
-            </a:r>
-            <a:endParaRPr lang="en-US" sz="1500" dirty="0"/>
+            <a:ext cx="7863840" cy="420624"/>
+          </a:xfrm>
+          <a:prstGeom prst="rect">
+            <a:avLst/>
+          </a:prstGeom>
+          <a:noFill/>
+          <a:ln/>
+        </p:spPr>
+        <p:txBody>
+          <a:bodyPr wrap="square" lIns="0" tIns="0" rIns="0" bIns="0" rtlCol="0" anchor="ctr"/>
+          <a:lstStyle/>
+          <a:p>
+            <a:pPr indent="0" marL="0">
+              <a:buNone/>
+            </a:pPr>
+            <a:r>
+              <a:rPr lang="en-US" sz="1700" b="1" dirty="0">
+                <a:solidFill>
+                  <a:srgbClr val="0E1C42"/>
+                </a:solidFill>
+                <a:latin typeface="Calibri" pitchFamily="34" charset="0"/>
+                <a:ea typeface="Calibri" pitchFamily="34" charset="-122"/>
+                <a:cs typeface="Calibri" pitchFamily="34" charset="-120"/>
+              </a:rPr>
+              <a:t>whisper  </a:t>
+            </a:r>
+            <a:pPr indent="0" marL="0">
+              <a:buNone/>
+            </a:pPr>
+            <a:r>
+              <a:rPr lang="en-US" sz="1400" dirty="0">
+                <a:solidFill>
+                  <a:srgbClr val="1E293B"/>
+                </a:solidFill>
+                <a:latin typeface="Calibri" pitchFamily="34" charset="0"/>
+                <a:ea typeface="Calibri" pitchFamily="34" charset="-122"/>
+                <a:cs typeface="Calibri" pitchFamily="34" charset="-120"/>
+              </a:rPr>
+              <a:t>To speak very quietly, using breath instead of voice.</a:t>
+            </a:r>
+            <a:endParaRPr lang="en-US" sz="1700" dirty="0"/>
           </a:p>
         </p:txBody>
       </p:sp>
@@ -3349,7 +3515,7 @@
                 <a:ea typeface="Calibri" pitchFamily="34" charset="-122"/>
                 <a:cs typeface="Calibri" pitchFamily="34" charset="-120"/>
               </a:rPr>
-              <a:t>✏️  Grammar</a:t>
+              <a:t>✏️  Grammar — What do you notice?</a:t>
             </a:r>
             <a:endParaRPr lang="en-US" sz="2200" dirty="0"/>
           </a:p>
@@ -3363,7 +3529,7 @@
         </p:nvSpPr>
         <p:spPr>
           <a:xfrm>
-            <a:off x="365760" y="777240"/>
+            <a:off x="365760" y="749808"/>
             <a:ext cx="8229600" cy="237744"/>
           </a:xfrm>
           <a:prstGeom prst="rect">
@@ -3396,13 +3562,52 @@
       </p:sp>
       <p:sp>
         <p:nvSpPr>
-          <p:cNvPr id="5" name="Shape 3"/>
-          <p:cNvSpPr/>
-          <p:nvPr/>
-        </p:nvSpPr>
-        <p:spPr>
-          <a:xfrm>
-            <a:off x="365760" y="1078992"/>
+          <p:cNvPr id="5" name="Text 3"/>
+          <p:cNvSpPr/>
+          <p:nvPr/>
+        </p:nvSpPr>
+        <p:spPr>
+          <a:xfrm>
+            <a:off x="365760" y="987552"/>
+            <a:ext cx="8412480" cy="411480"/>
+          </a:xfrm>
+          <a:prstGeom prst="rect">
+            <a:avLst/>
+          </a:prstGeom>
+          <a:noFill/>
+          <a:ln/>
+        </p:spPr>
+        <p:txBody>
+          <a:bodyPr wrap="square" lIns="0" tIns="0" rIns="0" bIns="0" rtlCol="0" anchor="ctr"/>
+          <a:lstStyle/>
+          <a:p>
+            <a:pPr indent="0" marL="0">
+              <a:buNone/>
+            </a:pPr>
+            <a:r>
+              <a:rPr lang="en-US" sz="1500" i="1" dirty="0">
+                <a:solidFill>
+                  <a:srgbClr val="64748B"/>
+                </a:solidFill>
+                <a:latin typeface="Calibri" pitchFamily="34" charset="0"/>
+                <a:ea typeface="Calibri" pitchFamily="34" charset="-122"/>
+                <a:cs typeface="Calibri" pitchFamily="34" charset="-120"/>
+              </a:rPr>
+              <a:t>Every noun below has an apostrophe. Look at where it sits.</a:t>
+            </a:r>
+            <a:endParaRPr lang="en-US" sz="1500" dirty="0"/>
+          </a:p>
+        </p:txBody>
+      </p:sp>
+      <p:sp>
+        <p:nvSpPr>
+          <p:cNvPr id="6" name="Shape 4"/>
+          <p:cNvSpPr/>
+          <p:nvPr/>
+        </p:nvSpPr>
+        <p:spPr>
+          <a:xfrm>
+            <a:off x="365760" y="1463040"/>
             <a:ext cx="8412480" cy="658368"/>
           </a:xfrm>
           <a:prstGeom prst="roundRect">
@@ -3413,7 +3618,12 @@
           <a:solidFill>
             <a:srgbClr val="FEF6E8"/>
           </a:solidFill>
-          <a:ln/>
+          <a:ln w="19050">
+            <a:solidFill>
+              <a:srgbClr val="C7922C"/>
+            </a:solidFill>
+            <a:prstDash val="solid"/>
+          </a:ln>
           <a:effectLst>
             <a:outerShdw sx="100000" sy="100000" kx="0" ky="0" algn="bl" rotWithShape="0" blurRad="101600" dist="38100" dir="2700000">
               <a:srgbClr val="000000">
@@ -3425,66 +3635,304 @@
       </p:sp>
       <p:sp>
         <p:nvSpPr>
-          <p:cNvPr id="6" name="Text 4"/>
-          <p:cNvSpPr/>
-          <p:nvPr/>
-        </p:nvSpPr>
-        <p:spPr>
-          <a:xfrm>
-            <a:off x="594360" y="1225296"/>
-            <a:ext cx="7863840" cy="402336"/>
-          </a:xfrm>
-          <a:prstGeom prst="rect">
-            <a:avLst/>
-          </a:prstGeom>
-          <a:noFill/>
-          <a:ln/>
-        </p:spPr>
-        <p:txBody>
-          <a:bodyPr wrap="square" lIns="0" tIns="0" rIns="0" bIns="0" rtlCol="0" anchor="ctr"/>
-          <a:lstStyle/>
-          <a:p>
-            <a:pPr indent="0" marL="0">
-              <a:buNone/>
-            </a:pPr>
-            <a:r>
-              <a:rPr lang="en-US" sz="1600" b="1" dirty="0">
-                <a:solidFill>
-                  <a:srgbClr val="34B76F"/>
-                </a:solidFill>
-                <a:latin typeface="Calibri" pitchFamily="34" charset="0"/>
-                <a:ea typeface="Calibri" pitchFamily="34" charset="-122"/>
-                <a:cs typeface="Calibri" pitchFamily="34" charset="-120"/>
-              </a:rPr>
-              <a:t>Despereaux's</a:t>
-            </a:r>
-            <a:pPr indent="0" marL="0">
-              <a:buNone/>
-            </a:pPr>
-            <a:r>
-              <a:rPr lang="en-US" sz="1600" dirty="0">
-                <a:solidFill>
-                  <a:srgbClr val="1E293B"/>
-                </a:solidFill>
-                <a:latin typeface="Calibri" pitchFamily="34" charset="0"/>
-                <a:ea typeface="Calibri" pitchFamily="34" charset="-122"/>
-                <a:cs typeface="Calibri" pitchFamily="34" charset="-120"/>
-              </a:rPr>
-              <a:t> heart thudded once, twice.</a:t>
-            </a:r>
-            <a:endParaRPr lang="en-US" sz="1600" dirty="0"/>
-          </a:p>
-        </p:txBody>
-      </p:sp>
-      <p:sp>
-        <p:nvSpPr>
-          <p:cNvPr id="7" name="Shape 5"/>
-          <p:cNvSpPr/>
-          <p:nvPr/>
-        </p:nvSpPr>
-        <p:spPr>
-          <a:xfrm>
-            <a:off x="365760" y="1810512"/>
+          <p:cNvPr id="7" name="Text 5"/>
+          <p:cNvSpPr/>
+          <p:nvPr/>
+        </p:nvSpPr>
+        <p:spPr>
+          <a:xfrm>
+            <a:off x="594360" y="1591056"/>
+            <a:ext cx="7955280" cy="402336"/>
+          </a:xfrm>
+          <a:prstGeom prst="rect">
+            <a:avLst/>
+          </a:prstGeom>
+          <a:noFill/>
+          <a:ln/>
+        </p:spPr>
+        <p:txBody>
+          <a:bodyPr wrap="square" lIns="0" tIns="0" rIns="0" bIns="0" rtlCol="0" anchor="ctr"/>
+          <a:lstStyle/>
+          <a:p>
+            <a:pPr indent="0" marL="0">
+              <a:buNone/>
+            </a:pPr>
+            <a:endParaRPr lang="en-US" sz="1700" dirty="0"/>
+          </a:p>
+        </p:txBody>
+      </p:sp>
+      <p:sp>
+        <p:nvSpPr>
+          <p:cNvPr id="8" name="Text 6"/>
+          <p:cNvSpPr/>
+          <p:nvPr/>
+        </p:nvSpPr>
+        <p:spPr>
+          <a:xfrm>
+            <a:off x="594360" y="1591056"/>
+            <a:ext cx="7955280" cy="402336"/>
+          </a:xfrm>
+          <a:prstGeom prst="rect">
+            <a:avLst/>
+          </a:prstGeom>
+          <a:noFill/>
+          <a:ln/>
+        </p:spPr>
+        <p:txBody>
+          <a:bodyPr wrap="square" lIns="0" tIns="0" rIns="0" bIns="0" rtlCol="0" anchor="ctr"/>
+          <a:lstStyle/>
+          <a:p>
+            <a:pPr indent="0" marL="0">
+              <a:buNone/>
+            </a:pPr>
+            <a:r>
+              <a:rPr lang="en-US" sz="1700" dirty="0">
+                <a:solidFill>
+                  <a:srgbClr val="1E293B"/>
+                </a:solidFill>
+                <a:latin typeface="Calibri" pitchFamily="34" charset="0"/>
+                <a:ea typeface="Calibri" pitchFamily="34" charset="-122"/>
+                <a:cs typeface="Calibri" pitchFamily="34" charset="-120"/>
+              </a:rPr>
+              <a:t>And</a:t>
+            </a:r>
+            <a:pPr indent="0" marL="0">
+              <a:buNone/>
+            </a:pPr>
+            <a:r>
+              <a:rPr lang="en-US" sz="1700" dirty="0">
+                <a:solidFill>
+                  <a:srgbClr val="1E293B"/>
+                </a:solidFill>
+                <a:latin typeface="Calibri" pitchFamily="34" charset="0"/>
+                <a:ea typeface="Calibri" pitchFamily="34" charset="-122"/>
+                <a:cs typeface="Calibri" pitchFamily="34" charset="-120"/>
+              </a:rPr>
+              <a:t> </a:t>
+            </a:r>
+            <a:pPr indent="0" marL="0">
+              <a:buNone/>
+            </a:pPr>
+            <a:r>
+              <a:rPr lang="en-US" sz="1700" dirty="0">
+                <a:solidFill>
+                  <a:srgbClr val="1E293B"/>
+                </a:solidFill>
+                <a:latin typeface="Calibri" pitchFamily="34" charset="0"/>
+                <a:ea typeface="Calibri" pitchFamily="34" charset="-122"/>
+                <a:cs typeface="Calibri" pitchFamily="34" charset="-120"/>
+              </a:rPr>
+              <a:t>looking</a:t>
+            </a:r>
+            <a:pPr indent="0" marL="0">
+              <a:buNone/>
+            </a:pPr>
+            <a:r>
+              <a:rPr lang="en-US" sz="1700" dirty="0">
+                <a:solidFill>
+                  <a:srgbClr val="1E293B"/>
+                </a:solidFill>
+                <a:latin typeface="Calibri" pitchFamily="34" charset="0"/>
+                <a:ea typeface="Calibri" pitchFamily="34" charset="-122"/>
+                <a:cs typeface="Calibri" pitchFamily="34" charset="-120"/>
+              </a:rPr>
+              <a:t> </a:t>
+            </a:r>
+            <a:pPr indent="0" marL="0">
+              <a:buNone/>
+            </a:pPr>
+            <a:r>
+              <a:rPr lang="en-US" sz="1700" dirty="0">
+                <a:solidFill>
+                  <a:srgbClr val="1E293B"/>
+                </a:solidFill>
+                <a:latin typeface="Calibri" pitchFamily="34" charset="0"/>
+                <a:ea typeface="Calibri" pitchFamily="34" charset="-122"/>
+                <a:cs typeface="Calibri" pitchFamily="34" charset="-120"/>
+              </a:rPr>
+              <a:t>into</a:t>
+            </a:r>
+            <a:pPr indent="0" marL="0">
+              <a:buNone/>
+            </a:pPr>
+            <a:r>
+              <a:rPr lang="en-US" sz="1700" dirty="0">
+                <a:solidFill>
+                  <a:srgbClr val="1E293B"/>
+                </a:solidFill>
+                <a:latin typeface="Calibri" pitchFamily="34" charset="0"/>
+                <a:ea typeface="Calibri" pitchFamily="34" charset="-122"/>
+                <a:cs typeface="Calibri" pitchFamily="34" charset="-120"/>
+              </a:rPr>
+              <a:t> </a:t>
+            </a:r>
+            <a:pPr indent="0" marL="0">
+              <a:buNone/>
+            </a:pPr>
+            <a:r>
+              <a:rPr lang="en-US" sz="1700" dirty="0">
+                <a:solidFill>
+                  <a:srgbClr val="1E293B"/>
+                </a:solidFill>
+                <a:latin typeface="Calibri" pitchFamily="34" charset="0"/>
+                <a:ea typeface="Calibri" pitchFamily="34" charset="-122"/>
+                <a:cs typeface="Calibri" pitchFamily="34" charset="-120"/>
+              </a:rPr>
+              <a:t>them,</a:t>
+            </a:r>
+            <a:pPr indent="0" marL="0">
+              <a:buNone/>
+            </a:pPr>
+            <a:r>
+              <a:rPr lang="en-US" sz="1700" dirty="0">
+                <a:solidFill>
+                  <a:srgbClr val="1E293B"/>
+                </a:solidFill>
+                <a:latin typeface="Calibri" pitchFamily="34" charset="0"/>
+                <a:ea typeface="Calibri" pitchFamily="34" charset="-122"/>
+                <a:cs typeface="Calibri" pitchFamily="34" charset="-120"/>
+              </a:rPr>
+              <a:t> </a:t>
+            </a:r>
+            <a:pPr indent="0" marL="0">
+              <a:buNone/>
+            </a:pPr>
+            <a:r>
+              <a:rPr lang="en-US" sz="1700" dirty="0">
+                <a:solidFill>
+                  <a:srgbClr val="1E293B"/>
+                </a:solidFill>
+                <a:latin typeface="Calibri" pitchFamily="34" charset="0"/>
+                <a:ea typeface="Calibri" pitchFamily="34" charset="-122"/>
+                <a:cs typeface="Calibri" pitchFamily="34" charset="-120"/>
+              </a:rPr>
+              <a:t>Despereaux’s</a:t>
+            </a:r>
+            <a:pPr indent="0" marL="0">
+              <a:buNone/>
+            </a:pPr>
+            <a:r>
+              <a:rPr lang="en-US" sz="1700" dirty="0">
+                <a:solidFill>
+                  <a:srgbClr val="1E293B"/>
+                </a:solidFill>
+                <a:latin typeface="Calibri" pitchFamily="34" charset="0"/>
+                <a:ea typeface="Calibri" pitchFamily="34" charset="-122"/>
+                <a:cs typeface="Calibri" pitchFamily="34" charset="-120"/>
+              </a:rPr>
+              <a:t> </a:t>
+            </a:r>
+            <a:pPr indent="0" marL="0">
+              <a:buNone/>
+            </a:pPr>
+            <a:r>
+              <a:rPr lang="en-US" sz="1700" dirty="0">
+                <a:solidFill>
+                  <a:srgbClr val="1E293B"/>
+                </a:solidFill>
+                <a:latin typeface="Calibri" pitchFamily="34" charset="0"/>
+                <a:ea typeface="Calibri" pitchFamily="34" charset="-122"/>
+                <a:cs typeface="Calibri" pitchFamily="34" charset="-120"/>
+              </a:rPr>
+              <a:t>heart</a:t>
+            </a:r>
+            <a:pPr indent="0" marL="0">
+              <a:buNone/>
+            </a:pPr>
+            <a:r>
+              <a:rPr lang="en-US" sz="1700" dirty="0">
+                <a:solidFill>
+                  <a:srgbClr val="1E293B"/>
+                </a:solidFill>
+                <a:latin typeface="Calibri" pitchFamily="34" charset="0"/>
+                <a:ea typeface="Calibri" pitchFamily="34" charset="-122"/>
+                <a:cs typeface="Calibri" pitchFamily="34" charset="-120"/>
+              </a:rPr>
+              <a:t> </a:t>
+            </a:r>
+            <a:pPr indent="0" marL="0">
+              <a:buNone/>
+            </a:pPr>
+            <a:r>
+              <a:rPr lang="en-US" sz="1700" dirty="0">
+                <a:solidFill>
+                  <a:srgbClr val="1E293B"/>
+                </a:solidFill>
+                <a:latin typeface="Calibri" pitchFamily="34" charset="0"/>
+                <a:ea typeface="Calibri" pitchFamily="34" charset="-122"/>
+                <a:cs typeface="Calibri" pitchFamily="34" charset="-120"/>
+              </a:rPr>
+              <a:t>thudded</a:t>
+            </a:r>
+            <a:pPr indent="0" marL="0">
+              <a:buNone/>
+            </a:pPr>
+            <a:r>
+              <a:rPr lang="en-US" sz="1700" dirty="0">
+                <a:solidFill>
+                  <a:srgbClr val="1E293B"/>
+                </a:solidFill>
+                <a:latin typeface="Calibri" pitchFamily="34" charset="0"/>
+                <a:ea typeface="Calibri" pitchFamily="34" charset="-122"/>
+                <a:cs typeface="Calibri" pitchFamily="34" charset="-120"/>
+              </a:rPr>
+              <a:t> </a:t>
+            </a:r>
+            <a:pPr indent="0" marL="0">
+              <a:buNone/>
+            </a:pPr>
+            <a:r>
+              <a:rPr lang="en-US" sz="1700" dirty="0">
+                <a:solidFill>
+                  <a:srgbClr val="1E293B"/>
+                </a:solidFill>
+                <a:latin typeface="Calibri" pitchFamily="34" charset="0"/>
+                <a:ea typeface="Calibri" pitchFamily="34" charset="-122"/>
+                <a:cs typeface="Calibri" pitchFamily="34" charset="-120"/>
+              </a:rPr>
+              <a:t>once,</a:t>
+            </a:r>
+            <a:pPr indent="0" marL="0">
+              <a:buNone/>
+            </a:pPr>
+            <a:r>
+              <a:rPr lang="en-US" sz="1700" dirty="0">
+                <a:solidFill>
+                  <a:srgbClr val="1E293B"/>
+                </a:solidFill>
+                <a:latin typeface="Calibri" pitchFamily="34" charset="0"/>
+                <a:ea typeface="Calibri" pitchFamily="34" charset="-122"/>
+                <a:cs typeface="Calibri" pitchFamily="34" charset="-120"/>
+              </a:rPr>
+              <a:t> </a:t>
+            </a:r>
+            <a:pPr indent="0" marL="0">
+              <a:buNone/>
+            </a:pPr>
+            <a:r>
+              <a:rPr lang="en-US" sz="1700" dirty="0">
+                <a:solidFill>
+                  <a:srgbClr val="1E293B"/>
+                </a:solidFill>
+                <a:latin typeface="Calibri" pitchFamily="34" charset="0"/>
+                <a:ea typeface="Calibri" pitchFamily="34" charset="-122"/>
+                <a:cs typeface="Calibri" pitchFamily="34" charset="-120"/>
+              </a:rPr>
+              <a:t>twice.</a:t>
+            </a:r>
+            <a:endParaRPr lang="en-US" sz="1700" dirty="0"/>
+          </a:p>
+        </p:txBody>
+      </p:sp>
+      <p:sp>
+        <p:nvSpPr>
+          <p:cNvPr id="9" name="Shape 7"/>
+          <p:cNvSpPr/>
+          <p:nvPr/>
+        </p:nvSpPr>
+        <p:spPr>
+          <a:xfrm>
+            <a:off x="365760" y="2212848"/>
             <a:ext cx="8412480" cy="658368"/>
           </a:xfrm>
           <a:prstGeom prst="roundRect">
@@ -3495,7 +3943,12 @@
           <a:solidFill>
             <a:srgbClr val="FFFFFF"/>
           </a:solidFill>
-          <a:ln/>
+          <a:ln w="19050">
+            <a:solidFill>
+              <a:srgbClr val="C7922C"/>
+            </a:solidFill>
+            <a:prstDash val="solid"/>
+          </a:ln>
           <a:effectLst>
             <a:outerShdw sx="100000" sy="100000" kx="0" ky="0" algn="bl" rotWithShape="0" blurRad="101600" dist="38100" dir="2700000">
               <a:srgbClr val="000000">
@@ -3507,195 +3960,238 @@
       </p:sp>
       <p:sp>
         <p:nvSpPr>
-          <p:cNvPr id="8" name="Text 6"/>
-          <p:cNvSpPr/>
-          <p:nvPr/>
-        </p:nvSpPr>
-        <p:spPr>
-          <a:xfrm>
-            <a:off x="594360" y="1956816"/>
-            <a:ext cx="7863840" cy="402336"/>
-          </a:xfrm>
-          <a:prstGeom prst="rect">
-            <a:avLst/>
-          </a:prstGeom>
-          <a:noFill/>
-          <a:ln/>
-        </p:spPr>
-        <p:txBody>
-          <a:bodyPr wrap="square" lIns="0" tIns="0" rIns="0" bIns="0" rtlCol="0" anchor="ctr"/>
-          <a:lstStyle/>
-          <a:p>
-            <a:pPr indent="0" marL="0">
-              <a:buNone/>
-            </a:pPr>
-            <a:r>
-              <a:rPr lang="en-US" sz="1600" dirty="0">
-                <a:solidFill>
-                  <a:srgbClr val="1E293B"/>
-                </a:solidFill>
-                <a:latin typeface="Calibri" pitchFamily="34" charset="0"/>
-                <a:ea typeface="Calibri" pitchFamily="34" charset="-122"/>
-                <a:cs typeface="Calibri" pitchFamily="34" charset="-120"/>
-              </a:rPr>
-              <a:t>The </a:t>
-            </a:r>
-            <a:pPr indent="0" marL="0">
-              <a:buNone/>
-            </a:pPr>
-            <a:r>
-              <a:rPr lang="en-US" sz="1600" b="1" dirty="0">
-                <a:solidFill>
-                  <a:srgbClr val="34B76F"/>
-                </a:solidFill>
-                <a:latin typeface="Calibri" pitchFamily="34" charset="0"/>
-                <a:ea typeface="Calibri" pitchFamily="34" charset="-122"/>
-                <a:cs typeface="Calibri" pitchFamily="34" charset="-120"/>
-              </a:rPr>
-              <a:t>threadmaster's</a:t>
-            </a:r>
-            <a:pPr indent="0" marL="0">
-              <a:buNone/>
-            </a:pPr>
-            <a:r>
-              <a:rPr lang="en-US" sz="1600" dirty="0">
-                <a:solidFill>
-                  <a:srgbClr val="1E293B"/>
-                </a:solidFill>
-                <a:latin typeface="Calibri" pitchFamily="34" charset="0"/>
-                <a:ea typeface="Calibri" pitchFamily="34" charset="-122"/>
-                <a:cs typeface="Calibri" pitchFamily="34" charset="-120"/>
-              </a:rPr>
-              <a:t> breath was in his ear.</a:t>
-            </a:r>
-            <a:endParaRPr lang="en-US" sz="1600" dirty="0"/>
-          </a:p>
-        </p:txBody>
-      </p:sp>
-      <p:sp>
-        <p:nvSpPr>
-          <p:cNvPr id="9" name="Shape 7"/>
-          <p:cNvSpPr/>
-          <p:nvPr/>
-        </p:nvSpPr>
-        <p:spPr>
-          <a:xfrm>
-            <a:off x="365760" y="2542032"/>
-            <a:ext cx="8412480" cy="658368"/>
-          </a:xfrm>
-          <a:prstGeom prst="roundRect">
-            <a:avLst>
-              <a:gd name="adj" fmla="val 13889"/>
-            </a:avLst>
-          </a:prstGeom>
-          <a:solidFill>
-            <a:srgbClr val="FEF6E8"/>
-          </a:solidFill>
-          <a:ln/>
-          <a:effectLst>
-            <a:outerShdw sx="100000" sy="100000" kx="0" ky="0" algn="bl" rotWithShape="0" blurRad="101600" dist="38100" dir="2700000">
-              <a:srgbClr val="000000">
-                <a:alpha val="12000"/>
-              </a:srgbClr>
-            </a:outerShdw>
-          </a:effectLst>
-        </p:spPr>
-      </p:sp>
-      <p:sp>
-        <p:nvSpPr>
           <p:cNvPr id="10" name="Text 8"/>
           <p:cNvSpPr/>
           <p:nvPr/>
         </p:nvSpPr>
         <p:spPr>
           <a:xfrm>
-            <a:off x="594360" y="2688336"/>
-            <a:ext cx="7863840" cy="402336"/>
-          </a:xfrm>
-          <a:prstGeom prst="rect">
-            <a:avLst/>
-          </a:prstGeom>
-          <a:noFill/>
-          <a:ln/>
-        </p:spPr>
-        <p:txBody>
-          <a:bodyPr wrap="square" lIns="0" tIns="0" rIns="0" bIns="0" rtlCol="0" anchor="ctr"/>
-          <a:lstStyle/>
-          <a:p>
-            <a:pPr indent="0" marL="0">
-              <a:buNone/>
-            </a:pPr>
-            <a:r>
-              <a:rPr lang="en-US" sz="1600" dirty="0">
-                <a:solidFill>
-                  <a:srgbClr val="1E293B"/>
-                </a:solidFill>
-                <a:latin typeface="Calibri" pitchFamily="34" charset="0"/>
-                <a:ea typeface="Calibri" pitchFamily="34" charset="-122"/>
-                <a:cs typeface="Calibri" pitchFamily="34" charset="-120"/>
-              </a:rPr>
-              <a:t>The </a:t>
-            </a:r>
-            <a:pPr indent="0" marL="0">
-              <a:buNone/>
-            </a:pPr>
-            <a:r>
-              <a:rPr lang="en-US" sz="1600" b="1" dirty="0">
-                <a:solidFill>
-                  <a:srgbClr val="34B76F"/>
-                </a:solidFill>
-                <a:latin typeface="Calibri" pitchFamily="34" charset="0"/>
-                <a:ea typeface="Calibri" pitchFamily="34" charset="-122"/>
-                <a:cs typeface="Calibri" pitchFamily="34" charset="-120"/>
-              </a:rPr>
-              <a:t>king's</a:t>
-            </a:r>
-            <a:pPr indent="0" marL="0">
-              <a:buNone/>
-            </a:pPr>
-            <a:r>
-              <a:rPr lang="en-US" sz="1600" dirty="0">
-                <a:solidFill>
-                  <a:srgbClr val="1E293B"/>
-                </a:solidFill>
-                <a:latin typeface="Calibri" pitchFamily="34" charset="0"/>
-                <a:ea typeface="Calibri" pitchFamily="34" charset="-122"/>
-                <a:cs typeface="Calibri" pitchFamily="34" charset="-120"/>
-              </a:rPr>
-              <a:t> music filled the room.</a:t>
-            </a:r>
-            <a:endParaRPr lang="en-US" sz="1600" dirty="0"/>
-          </a:p>
-        </p:txBody>
-      </p:sp>
-      <p:sp>
-        <p:nvSpPr>
-          <p:cNvPr id="11" name="Shape 9"/>
-          <p:cNvSpPr/>
-          <p:nvPr/>
-        </p:nvSpPr>
-        <p:spPr>
-          <a:xfrm>
-            <a:off x="365760" y="3273552"/>
-            <a:ext cx="8412480" cy="658368"/>
-          </a:xfrm>
-          <a:prstGeom prst="roundRect">
-            <a:avLst>
-              <a:gd name="adj" fmla="val 13889"/>
-            </a:avLst>
-          </a:prstGeom>
-          <a:solidFill>
-            <a:srgbClr val="FFFFFF"/>
-          </a:solidFill>
-          <a:ln/>
-          <a:effectLst>
-            <a:outerShdw sx="100000" sy="100000" kx="0" ky="0" algn="bl" rotWithShape="0" blurRad="101600" dist="38100" dir="2700000">
-              <a:srgbClr val="000000">
-                <a:alpha val="12000"/>
-              </a:srgbClr>
-            </a:outerShdw>
-          </a:effectLst>
-        </p:spPr>
+            <a:off x="594360" y="2340864"/>
+            <a:ext cx="7955280" cy="402336"/>
+          </a:xfrm>
+          <a:prstGeom prst="rect">
+            <a:avLst/>
+          </a:prstGeom>
+          <a:noFill/>
+          <a:ln/>
+        </p:spPr>
+        <p:txBody>
+          <a:bodyPr wrap="square" lIns="0" tIns="0" rIns="0" bIns="0" rtlCol="0" anchor="ctr"/>
+          <a:lstStyle/>
+          <a:p>
+            <a:pPr indent="0" marL="0">
+              <a:buNone/>
+            </a:pPr>
+            <a:endParaRPr lang="en-US" sz="1700" dirty="0"/>
+          </a:p>
+        </p:txBody>
+      </p:sp>
+      <p:sp>
+        <p:nvSpPr>
+          <p:cNvPr id="11" name="Text 9"/>
+          <p:cNvSpPr/>
+          <p:nvPr/>
+        </p:nvSpPr>
+        <p:spPr>
+          <a:xfrm>
+            <a:off x="594360" y="2340864"/>
+            <a:ext cx="7955280" cy="402336"/>
+          </a:xfrm>
+          <a:prstGeom prst="rect">
+            <a:avLst/>
+          </a:prstGeom>
+          <a:noFill/>
+          <a:ln/>
+        </p:spPr>
+        <p:txBody>
+          <a:bodyPr wrap="square" lIns="0" tIns="0" rIns="0" bIns="0" rtlCol="0" anchor="ctr"/>
+          <a:lstStyle/>
+          <a:p>
+            <a:pPr indent="0" marL="0">
+              <a:buNone/>
+            </a:pPr>
+            <a:r>
+              <a:rPr lang="en-US" sz="1700" dirty="0">
+                <a:solidFill>
+                  <a:srgbClr val="1E293B"/>
+                </a:solidFill>
+                <a:latin typeface="Calibri" pitchFamily="34" charset="0"/>
+                <a:ea typeface="Calibri" pitchFamily="34" charset="-122"/>
+                <a:cs typeface="Calibri" pitchFamily="34" charset="-120"/>
+              </a:rPr>
+              <a:t>The</a:t>
+            </a:r>
+            <a:pPr indent="0" marL="0">
+              <a:buNone/>
+            </a:pPr>
+            <a:r>
+              <a:rPr lang="en-US" sz="1700" dirty="0">
+                <a:solidFill>
+                  <a:srgbClr val="1E293B"/>
+                </a:solidFill>
+                <a:latin typeface="Calibri" pitchFamily="34" charset="0"/>
+                <a:ea typeface="Calibri" pitchFamily="34" charset="-122"/>
+                <a:cs typeface="Calibri" pitchFamily="34" charset="-120"/>
+              </a:rPr>
+              <a:t> </a:t>
+            </a:r>
+            <a:pPr indent="0" marL="0">
+              <a:buNone/>
+            </a:pPr>
+            <a:r>
+              <a:rPr lang="en-US" sz="1700" dirty="0">
+                <a:solidFill>
+                  <a:srgbClr val="1E293B"/>
+                </a:solidFill>
+                <a:latin typeface="Calibri" pitchFamily="34" charset="0"/>
+                <a:ea typeface="Calibri" pitchFamily="34" charset="-122"/>
+                <a:cs typeface="Calibri" pitchFamily="34" charset="-120"/>
+              </a:rPr>
+              <a:t>thread</a:t>
+            </a:r>
+            <a:pPr indent="0" marL="0">
+              <a:buNone/>
+            </a:pPr>
+            <a:r>
+              <a:rPr lang="en-US" sz="1700" dirty="0">
+                <a:solidFill>
+                  <a:srgbClr val="1E293B"/>
+                </a:solidFill>
+                <a:latin typeface="Calibri" pitchFamily="34" charset="0"/>
+                <a:ea typeface="Calibri" pitchFamily="34" charset="-122"/>
+                <a:cs typeface="Calibri" pitchFamily="34" charset="-120"/>
+              </a:rPr>
+              <a:t> </a:t>
+            </a:r>
+            <a:pPr indent="0" marL="0">
+              <a:buNone/>
+            </a:pPr>
+            <a:r>
+              <a:rPr lang="en-US" sz="1700" dirty="0">
+                <a:solidFill>
+                  <a:srgbClr val="1E293B"/>
+                </a:solidFill>
+                <a:latin typeface="Calibri" pitchFamily="34" charset="0"/>
+                <a:ea typeface="Calibri" pitchFamily="34" charset="-122"/>
+                <a:cs typeface="Calibri" pitchFamily="34" charset="-120"/>
+              </a:rPr>
+              <a:t>around</a:t>
+            </a:r>
+            <a:pPr indent="0" marL="0">
+              <a:buNone/>
+            </a:pPr>
+            <a:r>
+              <a:rPr lang="en-US" sz="1700" dirty="0">
+                <a:solidFill>
+                  <a:srgbClr val="1E293B"/>
+                </a:solidFill>
+                <a:latin typeface="Calibri" pitchFamily="34" charset="0"/>
+                <a:ea typeface="Calibri" pitchFamily="34" charset="-122"/>
+                <a:cs typeface="Calibri" pitchFamily="34" charset="-120"/>
+              </a:rPr>
+              <a:t> </a:t>
+            </a:r>
+            <a:pPr indent="0" marL="0">
+              <a:buNone/>
+            </a:pPr>
+            <a:r>
+              <a:rPr lang="en-US" sz="1700" dirty="0">
+                <a:solidFill>
+                  <a:srgbClr val="1E293B"/>
+                </a:solidFill>
+                <a:latin typeface="Calibri" pitchFamily="34" charset="0"/>
+                <a:ea typeface="Calibri" pitchFamily="34" charset="-122"/>
+                <a:cs typeface="Calibri" pitchFamily="34" charset="-120"/>
+              </a:rPr>
+              <a:t>Despereaux’s</a:t>
+            </a:r>
+            <a:pPr indent="0" marL="0">
+              <a:buNone/>
+            </a:pPr>
+            <a:r>
+              <a:rPr lang="en-US" sz="1700" dirty="0">
+                <a:solidFill>
+                  <a:srgbClr val="1E293B"/>
+                </a:solidFill>
+                <a:latin typeface="Calibri" pitchFamily="34" charset="0"/>
+                <a:ea typeface="Calibri" pitchFamily="34" charset="-122"/>
+                <a:cs typeface="Calibri" pitchFamily="34" charset="-120"/>
+              </a:rPr>
+              <a:t> </a:t>
+            </a:r>
+            <a:pPr indent="0" marL="0">
+              <a:buNone/>
+            </a:pPr>
+            <a:r>
+              <a:rPr lang="en-US" sz="1700" dirty="0">
+                <a:solidFill>
+                  <a:srgbClr val="1E293B"/>
+                </a:solidFill>
+                <a:latin typeface="Calibri" pitchFamily="34" charset="0"/>
+                <a:ea typeface="Calibri" pitchFamily="34" charset="-122"/>
+                <a:cs typeface="Calibri" pitchFamily="34" charset="-120"/>
+              </a:rPr>
+              <a:t>neck</a:t>
+            </a:r>
+            <a:pPr indent="0" marL="0">
+              <a:buNone/>
+            </a:pPr>
+            <a:r>
+              <a:rPr lang="en-US" sz="1700" dirty="0">
+                <a:solidFill>
+                  <a:srgbClr val="1E293B"/>
+                </a:solidFill>
+                <a:latin typeface="Calibri" pitchFamily="34" charset="0"/>
+                <a:ea typeface="Calibri" pitchFamily="34" charset="-122"/>
+                <a:cs typeface="Calibri" pitchFamily="34" charset="-120"/>
+              </a:rPr>
+              <a:t> </a:t>
+            </a:r>
+            <a:pPr indent="0" marL="0">
+              <a:buNone/>
+            </a:pPr>
+            <a:r>
+              <a:rPr lang="en-US" sz="1700" dirty="0">
+                <a:solidFill>
+                  <a:srgbClr val="1E293B"/>
+                </a:solidFill>
+                <a:latin typeface="Calibri" pitchFamily="34" charset="0"/>
+                <a:ea typeface="Calibri" pitchFamily="34" charset="-122"/>
+                <a:cs typeface="Calibri" pitchFamily="34" charset="-120"/>
+              </a:rPr>
+              <a:t>was</a:t>
+            </a:r>
+            <a:pPr indent="0" marL="0">
+              <a:buNone/>
+            </a:pPr>
+            <a:r>
+              <a:rPr lang="en-US" sz="1700" dirty="0">
+                <a:solidFill>
+                  <a:srgbClr val="1E293B"/>
+                </a:solidFill>
+                <a:latin typeface="Calibri" pitchFamily="34" charset="0"/>
+                <a:ea typeface="Calibri" pitchFamily="34" charset="-122"/>
+                <a:cs typeface="Calibri" pitchFamily="34" charset="-120"/>
+              </a:rPr>
+              <a:t> </a:t>
+            </a:r>
+            <a:pPr indent="0" marL="0">
+              <a:buNone/>
+            </a:pPr>
+            <a:r>
+              <a:rPr lang="en-US" sz="1700" dirty="0">
+                <a:solidFill>
+                  <a:srgbClr val="1E293B"/>
+                </a:solidFill>
+                <a:latin typeface="Calibri" pitchFamily="34" charset="0"/>
+                <a:ea typeface="Calibri" pitchFamily="34" charset="-122"/>
+                <a:cs typeface="Calibri" pitchFamily="34" charset="-120"/>
+              </a:rPr>
+              <a:t>tight.</a:t>
+            </a:r>
+            <a:endParaRPr lang="en-US" sz="1700" dirty="0"/>
+          </a:p>
+        </p:txBody>
       </p:sp>
       <p:sp>
         <p:nvSpPr>
@@ -3705,48 +4201,34 @@
         </p:nvSpPr>
         <p:spPr>
           <a:xfrm>
-            <a:off x="594360" y="3419856"/>
-            <a:ext cx="7863840" cy="402336"/>
-          </a:xfrm>
-          <a:prstGeom prst="rect">
-            <a:avLst/>
-          </a:prstGeom>
-          <a:noFill/>
-          <a:ln/>
-        </p:spPr>
-        <p:txBody>
-          <a:bodyPr wrap="square" lIns="0" tIns="0" rIns="0" bIns="0" rtlCol="0" anchor="ctr"/>
-          <a:lstStyle/>
-          <a:p>
-            <a:pPr indent="0" marL="0">
-              <a:buNone/>
-            </a:pPr>
-            <a:r>
-              <a:rPr lang="en-US" sz="1600" b="1" dirty="0">
-                <a:solidFill>
-                  <a:srgbClr val="34B76F"/>
-                </a:solidFill>
-                <a:latin typeface="Calibri" pitchFamily="34" charset="0"/>
-                <a:ea typeface="Calibri" pitchFamily="34" charset="-122"/>
-                <a:cs typeface="Calibri" pitchFamily="34" charset="-120"/>
-              </a:rPr>
-              <a:t>Antoinette's</a:t>
-            </a:r>
-            <a:pPr indent="0" marL="0">
-              <a:buNone/>
-            </a:pPr>
-            <a:r>
-              <a:rPr lang="en-US" sz="1600" dirty="0">
-                <a:solidFill>
-                  <a:srgbClr val="1E293B"/>
-                </a:solidFill>
-                <a:latin typeface="Calibri" pitchFamily="34" charset="0"/>
-                <a:ea typeface="Calibri" pitchFamily="34" charset="-122"/>
-                <a:cs typeface="Calibri" pitchFamily="34" charset="-120"/>
-              </a:rPr>
-              <a:t> children gathered around to stare.</a:t>
-            </a:r>
-            <a:endParaRPr lang="en-US" sz="1600" dirty="0"/>
+            <a:off x="365760" y="3008376"/>
+            <a:ext cx="8229600" cy="237744"/>
+          </a:xfrm>
+          <a:prstGeom prst="rect">
+            <a:avLst/>
+          </a:prstGeom>
+          <a:noFill/>
+          <a:ln/>
+        </p:spPr>
+        <p:txBody>
+          <a:bodyPr wrap="square" lIns="0" tIns="0" rIns="0" bIns="0" rtlCol="0" anchor="ctr"/>
+          <a:lstStyle/>
+          <a:p>
+            <a:pPr indent="0" marL="0">
+              <a:buNone/>
+            </a:pPr>
+            <a:r>
+              <a:rPr lang="en-US" sz="1100" b="1" spc="100" kern="0" dirty="0">
+                <a:solidFill>
+                  <a:srgbClr val="C7922C"/>
+                </a:solidFill>
+                <a:latin typeface="Calibri" pitchFamily="34" charset="0"/>
+                <a:ea typeface="Calibri" pitchFamily="34" charset="-122"/>
+                <a:cs typeface="Calibri" pitchFamily="34" charset="-120"/>
+              </a:rPr>
+              <a:t>THINK IT THROUGH</a:t>
+            </a:r>
+            <a:endParaRPr lang="en-US" sz="1100" dirty="0"/>
           </a:p>
         </p:txBody>
       </p:sp>
@@ -3758,34 +4240,68 @@
         </p:nvSpPr>
         <p:spPr>
           <a:xfrm>
-            <a:off x="365760" y="4050792"/>
-            <a:ext cx="8412480" cy="365760"/>
-          </a:xfrm>
-          <a:prstGeom prst="rect">
-            <a:avLst/>
-          </a:prstGeom>
-          <a:noFill/>
-          <a:ln/>
-        </p:spPr>
-        <p:txBody>
-          <a:bodyPr wrap="square" lIns="0" tIns="0" rIns="0" bIns="0" rtlCol="0" anchor="ctr"/>
-          <a:lstStyle/>
-          <a:p>
-            <a:pPr indent="0" marL="0">
-              <a:buNone/>
-            </a:pPr>
-            <a:r>
-              <a:rPr lang="en-US" sz="1500" b="1" dirty="0">
-                <a:solidFill>
-                  <a:srgbClr val="34B76F"/>
-                </a:solidFill>
-                <a:latin typeface="Calibri" pitchFamily="34" charset="0"/>
-                <a:ea typeface="Calibri" pitchFamily="34" charset="-122"/>
-                <a:cs typeface="Calibri" pitchFamily="34" charset="-120"/>
-              </a:rPr>
-              <a:t>✅  Answers revealed</a:t>
-            </a:r>
-            <a:endParaRPr lang="en-US" sz="1500" dirty="0"/>
+            <a:off x="365760" y="3255264"/>
+            <a:ext cx="8412480" cy="1563624"/>
+          </a:xfrm>
+          <a:prstGeom prst="rect">
+            <a:avLst/>
+          </a:prstGeom>
+          <a:noFill/>
+          <a:ln/>
+        </p:spPr>
+        <p:txBody>
+          <a:bodyPr wrap="square" lIns="0" tIns="0" rIns="0" bIns="0" rtlCol="0" anchor="t"/>
+          <a:lstStyle/>
+          <a:p>
+            <a:pPr indent="0" marL="0">
+              <a:buNone/>
+            </a:pPr>
+            <a:r>
+              <a:rPr lang="en-US" sz="1400" dirty="0">
+                <a:solidFill>
+                  <a:srgbClr val="1E293B"/>
+                </a:solidFill>
+                <a:latin typeface="Calibri" pitchFamily="34" charset="0"/>
+                <a:ea typeface="Calibri" pitchFamily="34" charset="-122"/>
+                <a:cs typeface="Calibri" pitchFamily="34" charset="-120"/>
+              </a:rPr>
+              <a:t>1.  What does each of these phrases tell you about who owns what?</a:t>
+            </a:r>
+            <a:endParaRPr lang="en-US" sz="1400" dirty="0"/>
+          </a:p>
+          <a:p>
+            <a:pPr indent="0" marL="0">
+              <a:buNone/>
+            </a:pPr>
+            <a:r>
+              <a:rPr lang="en-US" sz="1400" dirty="0">
+                <a:solidFill>
+                  <a:srgbClr val="1E293B"/>
+                </a:solidFill>
+                <a:latin typeface="Calibri" pitchFamily="34" charset="0"/>
+                <a:ea typeface="Calibri" pitchFamily="34" charset="-122"/>
+                <a:cs typeface="Calibri" pitchFamily="34" charset="-120"/>
+              </a:rPr>
+              <a:t>2.  Is the apostrophe before the s or after it? Is it the same in both?</a:t>
+            </a:r>
+            <a:endParaRPr lang="en-US" sz="1400" dirty="0"/>
+          </a:p>
+          <a:p>
+            <a:pPr indent="0" marL="0">
+              <a:buNone/>
+            </a:pPr>
+            <a:r>
+              <a:rPr lang="en-US" sz="1400" dirty="0">
+                <a:solidFill>
+                  <a:srgbClr val="1E293B"/>
+                </a:solidFill>
+                <a:latin typeface="Calibri" pitchFamily="34" charset="0"/>
+                <a:ea typeface="Calibri" pitchFamily="34" charset="-122"/>
+                <a:cs typeface="Calibri" pitchFamily="34" charset="-120"/>
+              </a:rPr>
+              <a:t>3.  What do you think decides which side it goes on?</a:t>
+            </a:r>
+            <a:endParaRPr lang="en-US" sz="1400" dirty="0"/>
           </a:p>
         </p:txBody>
       </p:sp>
@@ -3836,7 +4352,7 @@
             <a:avLst/>
           </a:prstGeom>
           <a:solidFill>
-            <a:srgbClr val="0E1C42"/>
+            <a:srgbClr val="C7922C"/>
           </a:solidFill>
           <a:ln/>
         </p:spPr>
@@ -3874,7 +4390,7 @@
                 <a:ea typeface="Calibri" pitchFamily="34" charset="-122"/>
                 <a:cs typeface="Calibri" pitchFamily="34" charset="-120"/>
               </a:rPr>
-              <a:t>🔠  Spelling</a:t>
+              <a:t>✏️  Grammar — What do you notice?</a:t>
             </a:r>
             <a:endParaRPr lang="en-US" sz="2200" dirty="0"/>
           </a:p>
@@ -3888,7 +4404,7 @@
         </p:nvSpPr>
         <p:spPr>
           <a:xfrm>
-            <a:off x="365760" y="777240"/>
+            <a:off x="365760" y="749808"/>
             <a:ext cx="8229600" cy="237744"/>
           </a:xfrm>
           <a:prstGeom prst="rect">
@@ -3907,13 +4423,13 @@
             <a:r>
               <a:rPr lang="en-US" sz="1100" b="1" spc="100" kern="0" dirty="0">
                 <a:solidFill>
-                  <a:srgbClr val="0E1C42"/>
-                </a:solidFill>
-                <a:latin typeface="Calibri" pitchFamily="34" charset="0"/>
-                <a:ea typeface="Calibri" pitchFamily="34" charset="-122"/>
-                <a:cs typeface="Calibri" pitchFamily="34" charset="-120"/>
-              </a:rPr>
-              <a:t>DROPPING THE FINAL E</a:t>
+                  <a:srgbClr val="C7922C"/>
+                </a:solidFill>
+                <a:latin typeface="Calibri" pitchFamily="34" charset="0"/>
+                <a:ea typeface="Calibri" pitchFamily="34" charset="-122"/>
+                <a:cs typeface="Calibri" pitchFamily="34" charset="-120"/>
+              </a:rPr>
+              <a:t>POSSESSIVE NOUNS</a:t>
             </a:r>
             <a:endParaRPr lang="en-US" sz="1100" dirty="0"/>
           </a:p>
@@ -3927,24 +4443,24 @@
         </p:nvSpPr>
         <p:spPr>
           <a:xfrm>
-            <a:off x="365760" y="1078992"/>
-            <a:ext cx="8229600" cy="237744"/>
-          </a:xfrm>
-          <a:prstGeom prst="rect">
-            <a:avLst/>
-          </a:prstGeom>
-          <a:noFill/>
-          <a:ln/>
-        </p:spPr>
-        <p:txBody>
-          <a:bodyPr wrap="square" lIns="0" tIns="0" rIns="0" bIns="0" rtlCol="0" anchor="ctr"/>
-          <a:lstStyle/>
-          <a:p>
-            <a:pPr indent="0" marL="0">
-              <a:buNone/>
-            </a:pPr>
-            <a:r>
-              <a:rPr lang="en-US" sz="1100" b="1" spc="100" kern="0" dirty="0">
+            <a:off x="365760" y="987552"/>
+            <a:ext cx="8412480" cy="411480"/>
+          </a:xfrm>
+          <a:prstGeom prst="rect">
+            <a:avLst/>
+          </a:prstGeom>
+          <a:noFill/>
+          <a:ln/>
+        </p:spPr>
+        <p:txBody>
+          <a:bodyPr wrap="square" lIns="0" tIns="0" rIns="0" bIns="0" rtlCol="0" anchor="ctr"/>
+          <a:lstStyle/>
+          <a:p>
+            <a:pPr indent="0" marL="0">
+              <a:buNone/>
+            </a:pPr>
+            <a:r>
+              <a:rPr lang="en-US" sz="1500" i="1" dirty="0">
                 <a:solidFill>
                   <a:srgbClr val="64748B"/>
                 </a:solidFill>
@@ -3952,9 +4468,9 @@
                 <a:ea typeface="Calibri" pitchFamily="34" charset="-122"/>
                 <a:cs typeface="Calibri" pitchFamily="34" charset="-120"/>
               </a:rPr>
-              <a:t>WORD BANK</a:t>
-            </a:r>
-            <a:endParaRPr lang="en-US" sz="1100" dirty="0"/>
+              <a:t>Every noun below has an apostrophe. Look at where it sits.</a:t>
+            </a:r>
+            <a:endParaRPr lang="en-US" sz="1500" dirty="0"/>
           </a:p>
         </p:txBody>
       </p:sp>
@@ -3966,20 +4482,20 @@
         </p:nvSpPr>
         <p:spPr>
           <a:xfrm>
-            <a:off x="365760" y="1353312"/>
-            <a:ext cx="8412480" cy="1005840"/>
+            <a:off x="365760" y="1463040"/>
+            <a:ext cx="8412480" cy="658368"/>
           </a:xfrm>
           <a:prstGeom prst="roundRect">
             <a:avLst>
-              <a:gd name="adj" fmla="val 9091"/>
+              <a:gd name="adj" fmla="val 13889"/>
             </a:avLst>
           </a:prstGeom>
           <a:solidFill>
-            <a:srgbClr val="FFFFFF"/>
+            <a:srgbClr val="FEF6E8"/>
           </a:solidFill>
           <a:ln w="19050">
             <a:solidFill>
-              <a:srgbClr val="0E1C42"/>
+              <a:srgbClr val="C7922C"/>
             </a:solidFill>
             <a:prstDash val="solid"/>
           </a:ln>
@@ -4000,8 +4516,36 @@
         </p:nvSpPr>
         <p:spPr>
           <a:xfrm>
-            <a:off x="594360" y="1481328"/>
-            <a:ext cx="7955280" cy="749808"/>
+            <a:off x="594360" y="1591056"/>
+            <a:ext cx="7955280" cy="402336"/>
+          </a:xfrm>
+          <a:prstGeom prst="rect">
+            <a:avLst/>
+          </a:prstGeom>
+          <a:noFill/>
+          <a:ln/>
+        </p:spPr>
+        <p:txBody>
+          <a:bodyPr wrap="square" lIns="0" tIns="0" rIns="0" bIns="0" rtlCol="0" anchor="ctr"/>
+          <a:lstStyle/>
+          <a:p>
+            <a:pPr indent="0" marL="0">
+              <a:buNone/>
+            </a:pPr>
+            <a:endParaRPr lang="en-US" sz="1700" dirty="0"/>
+          </a:p>
+        </p:txBody>
+      </p:sp>
+      <p:sp>
+        <p:nvSpPr>
+          <p:cNvPr id="8" name="Text 6"/>
+          <p:cNvSpPr/>
+          <p:nvPr/>
+        </p:nvSpPr>
+        <p:spPr>
+          <a:xfrm>
+            <a:off x="594360" y="1591056"/>
+            <a:ext cx="7955280" cy="402336"/>
           </a:xfrm>
           <a:prstGeom prst="rect">
             <a:avLst/>
@@ -4019,13 +4563,237 @@
             <a:r>
               <a:rPr lang="en-US" sz="1700" dirty="0">
                 <a:solidFill>
-                  <a:srgbClr val="0E1C42"/>
-                </a:solidFill>
-                <a:latin typeface="Calibri" pitchFamily="34" charset="0"/>
-                <a:ea typeface="Calibri" pitchFamily="34" charset="-122"/>
-                <a:cs typeface="Calibri" pitchFamily="34" charset="-120"/>
-              </a:rPr>
-              <a:t>shining   ·   staring   ·   named   ·   waved   ·   hopeful   ·   careful   ·   useless   ·   bravely</a:t>
+                  <a:srgbClr val="1E293B"/>
+                </a:solidFill>
+                <a:latin typeface="Calibri" pitchFamily="34" charset="0"/>
+                <a:ea typeface="Calibri" pitchFamily="34" charset="-122"/>
+                <a:cs typeface="Calibri" pitchFamily="34" charset="-120"/>
+              </a:rPr>
+              <a:t>And</a:t>
+            </a:r>
+            <a:pPr indent="0" marL="0">
+              <a:buNone/>
+            </a:pPr>
+            <a:r>
+              <a:rPr lang="en-US" sz="1700" dirty="0">
+                <a:solidFill>
+                  <a:srgbClr val="1E293B"/>
+                </a:solidFill>
+                <a:latin typeface="Calibri" pitchFamily="34" charset="0"/>
+                <a:ea typeface="Calibri" pitchFamily="34" charset="-122"/>
+                <a:cs typeface="Calibri" pitchFamily="34" charset="-120"/>
+              </a:rPr>
+              <a:t> </a:t>
+            </a:r>
+            <a:pPr indent="0" marL="0">
+              <a:buNone/>
+            </a:pPr>
+            <a:r>
+              <a:rPr lang="en-US" sz="1700" dirty="0">
+                <a:solidFill>
+                  <a:srgbClr val="1E293B"/>
+                </a:solidFill>
+                <a:latin typeface="Calibri" pitchFamily="34" charset="0"/>
+                <a:ea typeface="Calibri" pitchFamily="34" charset="-122"/>
+                <a:cs typeface="Calibri" pitchFamily="34" charset="-120"/>
+              </a:rPr>
+              <a:t>looking</a:t>
+            </a:r>
+            <a:pPr indent="0" marL="0">
+              <a:buNone/>
+            </a:pPr>
+            <a:r>
+              <a:rPr lang="en-US" sz="1700" dirty="0">
+                <a:solidFill>
+                  <a:srgbClr val="1E293B"/>
+                </a:solidFill>
+                <a:latin typeface="Calibri" pitchFamily="34" charset="0"/>
+                <a:ea typeface="Calibri" pitchFamily="34" charset="-122"/>
+                <a:cs typeface="Calibri" pitchFamily="34" charset="-120"/>
+              </a:rPr>
+              <a:t> </a:t>
+            </a:r>
+            <a:pPr indent="0" marL="0">
+              <a:buNone/>
+            </a:pPr>
+            <a:r>
+              <a:rPr lang="en-US" sz="1700" dirty="0">
+                <a:solidFill>
+                  <a:srgbClr val="1E293B"/>
+                </a:solidFill>
+                <a:latin typeface="Calibri" pitchFamily="34" charset="0"/>
+                <a:ea typeface="Calibri" pitchFamily="34" charset="-122"/>
+                <a:cs typeface="Calibri" pitchFamily="34" charset="-120"/>
+              </a:rPr>
+              <a:t>into</a:t>
+            </a:r>
+            <a:pPr indent="0" marL="0">
+              <a:buNone/>
+            </a:pPr>
+            <a:r>
+              <a:rPr lang="en-US" sz="1700" dirty="0">
+                <a:solidFill>
+                  <a:srgbClr val="1E293B"/>
+                </a:solidFill>
+                <a:latin typeface="Calibri" pitchFamily="34" charset="0"/>
+                <a:ea typeface="Calibri" pitchFamily="34" charset="-122"/>
+                <a:cs typeface="Calibri" pitchFamily="34" charset="-120"/>
+              </a:rPr>
+              <a:t> </a:t>
+            </a:r>
+            <a:pPr indent="0" marL="0">
+              <a:buNone/>
+            </a:pPr>
+            <a:r>
+              <a:rPr lang="en-US" sz="1700" dirty="0">
+                <a:solidFill>
+                  <a:srgbClr val="1E293B"/>
+                </a:solidFill>
+                <a:latin typeface="Calibri" pitchFamily="34" charset="0"/>
+                <a:ea typeface="Calibri" pitchFamily="34" charset="-122"/>
+                <a:cs typeface="Calibri" pitchFamily="34" charset="-120"/>
+              </a:rPr>
+              <a:t>them,</a:t>
+            </a:r>
+            <a:pPr indent="0" marL="0">
+              <a:buNone/>
+            </a:pPr>
+            <a:r>
+              <a:rPr lang="en-US" sz="1700" dirty="0">
+                <a:solidFill>
+                  <a:srgbClr val="1E293B"/>
+                </a:solidFill>
+                <a:latin typeface="Calibri" pitchFamily="34" charset="0"/>
+                <a:ea typeface="Calibri" pitchFamily="34" charset="-122"/>
+                <a:cs typeface="Calibri" pitchFamily="34" charset="-120"/>
+              </a:rPr>
+              <a:t> </a:t>
+            </a:r>
+            <a:pPr indent="0" marL="0">
+              <a:buNone/>
+            </a:pPr>
+            <a:r>
+              <a:rPr lang="en-US" sz="1700" dirty="0">
+                <a:solidFill>
+                  <a:srgbClr val="1E293B"/>
+                </a:solidFill>
+                <a:latin typeface="Calibri" pitchFamily="34" charset="0"/>
+                <a:ea typeface="Calibri" pitchFamily="34" charset="-122"/>
+                <a:cs typeface="Calibri" pitchFamily="34" charset="-120"/>
+              </a:rPr>
+              <a:t>Despereaux’s</a:t>
+            </a:r>
+            <a:pPr indent="0" marL="0">
+              <a:buNone/>
+            </a:pPr>
+            <a:r>
+              <a:rPr lang="en-US" sz="1700" dirty="0">
+                <a:solidFill>
+                  <a:srgbClr val="1E293B"/>
+                </a:solidFill>
+                <a:latin typeface="Calibri" pitchFamily="34" charset="0"/>
+                <a:ea typeface="Calibri" pitchFamily="34" charset="-122"/>
+                <a:cs typeface="Calibri" pitchFamily="34" charset="-120"/>
+              </a:rPr>
+              <a:t> </a:t>
+            </a:r>
+            <a:pPr indent="0" marL="0">
+              <a:buNone/>
+            </a:pPr>
+            <a:r>
+              <a:rPr lang="en-US" sz="1700" dirty="0">
+                <a:solidFill>
+                  <a:srgbClr val="1E293B"/>
+                </a:solidFill>
+                <a:latin typeface="Calibri" pitchFamily="34" charset="0"/>
+                <a:ea typeface="Calibri" pitchFamily="34" charset="-122"/>
+                <a:cs typeface="Calibri" pitchFamily="34" charset="-120"/>
+              </a:rPr>
+              <a:t>heart</a:t>
+            </a:r>
+            <a:pPr indent="0" marL="0">
+              <a:buNone/>
+            </a:pPr>
+            <a:r>
+              <a:rPr lang="en-US" sz="1700" dirty="0">
+                <a:solidFill>
+                  <a:srgbClr val="1E293B"/>
+                </a:solidFill>
+                <a:latin typeface="Calibri" pitchFamily="34" charset="0"/>
+                <a:ea typeface="Calibri" pitchFamily="34" charset="-122"/>
+                <a:cs typeface="Calibri" pitchFamily="34" charset="-120"/>
+              </a:rPr>
+              <a:t> </a:t>
+            </a:r>
+            <a:pPr indent="0" marL="0">
+              <a:buNone/>
+            </a:pPr>
+            <a:r>
+              <a:rPr lang="en-US" sz="1700" dirty="0">
+                <a:solidFill>
+                  <a:srgbClr val="1E293B"/>
+                </a:solidFill>
+                <a:latin typeface="Calibri" pitchFamily="34" charset="0"/>
+                <a:ea typeface="Calibri" pitchFamily="34" charset="-122"/>
+                <a:cs typeface="Calibri" pitchFamily="34" charset="-120"/>
+              </a:rPr>
+              <a:t>thudded</a:t>
+            </a:r>
+            <a:pPr indent="0" marL="0">
+              <a:buNone/>
+            </a:pPr>
+            <a:r>
+              <a:rPr lang="en-US" sz="1700" dirty="0">
+                <a:solidFill>
+                  <a:srgbClr val="1E293B"/>
+                </a:solidFill>
+                <a:latin typeface="Calibri" pitchFamily="34" charset="0"/>
+                <a:ea typeface="Calibri" pitchFamily="34" charset="-122"/>
+                <a:cs typeface="Calibri" pitchFamily="34" charset="-120"/>
+              </a:rPr>
+              <a:t> </a:t>
+            </a:r>
+            <a:pPr indent="0" marL="0">
+              <a:buNone/>
+            </a:pPr>
+            <a:r>
+              <a:rPr lang="en-US" sz="1700" dirty="0">
+                <a:solidFill>
+                  <a:srgbClr val="1E293B"/>
+                </a:solidFill>
+                <a:latin typeface="Calibri" pitchFamily="34" charset="0"/>
+                <a:ea typeface="Calibri" pitchFamily="34" charset="-122"/>
+                <a:cs typeface="Calibri" pitchFamily="34" charset="-120"/>
+              </a:rPr>
+              <a:t>once,</a:t>
+            </a:r>
+            <a:pPr indent="0" marL="0">
+              <a:buNone/>
+            </a:pPr>
+            <a:r>
+              <a:rPr lang="en-US" sz="1700" dirty="0">
+                <a:solidFill>
+                  <a:srgbClr val="1E293B"/>
+                </a:solidFill>
+                <a:latin typeface="Calibri" pitchFamily="34" charset="0"/>
+                <a:ea typeface="Calibri" pitchFamily="34" charset="-122"/>
+                <a:cs typeface="Calibri" pitchFamily="34" charset="-120"/>
+              </a:rPr>
+              <a:t> </a:t>
+            </a:r>
+            <a:pPr indent="0" marL="0">
+              <a:buNone/>
+            </a:pPr>
+            <a:r>
+              <a:rPr lang="en-US" sz="1700" dirty="0">
+                <a:solidFill>
+                  <a:srgbClr val="1E293B"/>
+                </a:solidFill>
+                <a:latin typeface="Calibri" pitchFamily="34" charset="0"/>
+                <a:ea typeface="Calibri" pitchFamily="34" charset="-122"/>
+                <a:cs typeface="Calibri" pitchFamily="34" charset="-120"/>
+              </a:rPr>
+              <a:t>twice.</a:t>
             </a:r>
             <a:endParaRPr lang="en-US" sz="1700" dirty="0"/>
           </a:p>
@@ -4033,40 +4801,396 @@
       </p:sp>
       <p:sp>
         <p:nvSpPr>
-          <p:cNvPr id="8" name="Text 6"/>
-          <p:cNvSpPr/>
-          <p:nvPr/>
-        </p:nvSpPr>
-        <p:spPr>
-          <a:xfrm>
-            <a:off x="365760" y="2514600"/>
-            <a:ext cx="8412480" cy="457200"/>
-          </a:xfrm>
-          <a:prstGeom prst="rect">
-            <a:avLst/>
-          </a:prstGeom>
-          <a:noFill/>
-          <a:ln/>
-        </p:spPr>
-        <p:txBody>
-          <a:bodyPr wrap="square" lIns="0" tIns="0" rIns="0" bIns="0" rtlCol="0" anchor="ctr"/>
-          <a:lstStyle/>
-          <a:p>
-            <a:pPr indent="0" marL="0">
-              <a:buNone/>
-            </a:pPr>
-            <a:r>
-              <a:rPr lang="en-US" sz="1500" i="1" dirty="0">
-                <a:solidFill>
-                  <a:srgbClr val="64748B"/>
-                </a:solidFill>
-                <a:latin typeface="Calibri" pitchFamily="34" charset="0"/>
-                <a:ea typeface="Calibri" pitchFamily="34" charset="-122"/>
-                <a:cs typeface="Calibri" pitchFamily="34" charset="-120"/>
-              </a:rPr>
-              <a:t>Which column does each word belong in?  Columns: Dropped the e  |  Kept the e</a:t>
-            </a:r>
-            <a:endParaRPr lang="en-US" sz="1500" dirty="0"/>
+          <p:cNvPr id="9" name="Shape 7"/>
+          <p:cNvSpPr/>
+          <p:nvPr/>
+        </p:nvSpPr>
+        <p:spPr>
+          <a:xfrm>
+            <a:off x="365760" y="2212848"/>
+            <a:ext cx="8412480" cy="658368"/>
+          </a:xfrm>
+          <a:prstGeom prst="roundRect">
+            <a:avLst>
+              <a:gd name="adj" fmla="val 13889"/>
+            </a:avLst>
+          </a:prstGeom>
+          <a:solidFill>
+            <a:srgbClr val="FFFFFF"/>
+          </a:solidFill>
+          <a:ln w="19050">
+            <a:solidFill>
+              <a:srgbClr val="C7922C"/>
+            </a:solidFill>
+            <a:prstDash val="solid"/>
+          </a:ln>
+          <a:effectLst>
+            <a:outerShdw sx="100000" sy="100000" kx="0" ky="0" algn="bl" rotWithShape="0" blurRad="101600" dist="38100" dir="2700000">
+              <a:srgbClr val="000000">
+                <a:alpha val="12000"/>
+              </a:srgbClr>
+            </a:outerShdw>
+          </a:effectLst>
+        </p:spPr>
+      </p:sp>
+      <p:sp>
+        <p:nvSpPr>
+          <p:cNvPr id="10" name="Text 8"/>
+          <p:cNvSpPr/>
+          <p:nvPr/>
+        </p:nvSpPr>
+        <p:spPr>
+          <a:xfrm>
+            <a:off x="594360" y="2340864"/>
+            <a:ext cx="7955280" cy="402336"/>
+          </a:xfrm>
+          <a:prstGeom prst="rect">
+            <a:avLst/>
+          </a:prstGeom>
+          <a:noFill/>
+          <a:ln/>
+        </p:spPr>
+        <p:txBody>
+          <a:bodyPr wrap="square" lIns="0" tIns="0" rIns="0" bIns="0" rtlCol="0" anchor="ctr"/>
+          <a:lstStyle/>
+          <a:p>
+            <a:pPr indent="0" marL="0">
+              <a:buNone/>
+            </a:pPr>
+            <a:endParaRPr lang="en-US" sz="1700" dirty="0"/>
+          </a:p>
+        </p:txBody>
+      </p:sp>
+      <p:sp>
+        <p:nvSpPr>
+          <p:cNvPr id="11" name="Text 9"/>
+          <p:cNvSpPr/>
+          <p:nvPr/>
+        </p:nvSpPr>
+        <p:spPr>
+          <a:xfrm>
+            <a:off x="594360" y="2340864"/>
+            <a:ext cx="7955280" cy="402336"/>
+          </a:xfrm>
+          <a:prstGeom prst="rect">
+            <a:avLst/>
+          </a:prstGeom>
+          <a:noFill/>
+          <a:ln/>
+        </p:spPr>
+        <p:txBody>
+          <a:bodyPr wrap="square" lIns="0" tIns="0" rIns="0" bIns="0" rtlCol="0" anchor="ctr"/>
+          <a:lstStyle/>
+          <a:p>
+            <a:pPr indent="0" marL="0">
+              <a:buNone/>
+            </a:pPr>
+            <a:r>
+              <a:rPr lang="en-US" sz="1700" dirty="0">
+                <a:solidFill>
+                  <a:srgbClr val="1E293B"/>
+                </a:solidFill>
+                <a:latin typeface="Calibri" pitchFamily="34" charset="0"/>
+                <a:ea typeface="Calibri" pitchFamily="34" charset="-122"/>
+                <a:cs typeface="Calibri" pitchFamily="34" charset="-120"/>
+              </a:rPr>
+              <a:t>The</a:t>
+            </a:r>
+            <a:pPr indent="0" marL="0">
+              <a:buNone/>
+            </a:pPr>
+            <a:r>
+              <a:rPr lang="en-US" sz="1700" dirty="0">
+                <a:solidFill>
+                  <a:srgbClr val="1E293B"/>
+                </a:solidFill>
+                <a:latin typeface="Calibri" pitchFamily="34" charset="0"/>
+                <a:ea typeface="Calibri" pitchFamily="34" charset="-122"/>
+                <a:cs typeface="Calibri" pitchFamily="34" charset="-120"/>
+              </a:rPr>
+              <a:t> </a:t>
+            </a:r>
+            <a:pPr indent="0" marL="0">
+              <a:buNone/>
+            </a:pPr>
+            <a:r>
+              <a:rPr lang="en-US" sz="1700" dirty="0">
+                <a:solidFill>
+                  <a:srgbClr val="1E293B"/>
+                </a:solidFill>
+                <a:latin typeface="Calibri" pitchFamily="34" charset="0"/>
+                <a:ea typeface="Calibri" pitchFamily="34" charset="-122"/>
+                <a:cs typeface="Calibri" pitchFamily="34" charset="-120"/>
+              </a:rPr>
+              <a:t>thread</a:t>
+            </a:r>
+            <a:pPr indent="0" marL="0">
+              <a:buNone/>
+            </a:pPr>
+            <a:r>
+              <a:rPr lang="en-US" sz="1700" dirty="0">
+                <a:solidFill>
+                  <a:srgbClr val="1E293B"/>
+                </a:solidFill>
+                <a:latin typeface="Calibri" pitchFamily="34" charset="0"/>
+                <a:ea typeface="Calibri" pitchFamily="34" charset="-122"/>
+                <a:cs typeface="Calibri" pitchFamily="34" charset="-120"/>
+              </a:rPr>
+              <a:t> </a:t>
+            </a:r>
+            <a:pPr indent="0" marL="0">
+              <a:buNone/>
+            </a:pPr>
+            <a:r>
+              <a:rPr lang="en-US" sz="1700" dirty="0">
+                <a:solidFill>
+                  <a:srgbClr val="1E293B"/>
+                </a:solidFill>
+                <a:latin typeface="Calibri" pitchFamily="34" charset="0"/>
+                <a:ea typeface="Calibri" pitchFamily="34" charset="-122"/>
+                <a:cs typeface="Calibri" pitchFamily="34" charset="-120"/>
+              </a:rPr>
+              <a:t>around</a:t>
+            </a:r>
+            <a:pPr indent="0" marL="0">
+              <a:buNone/>
+            </a:pPr>
+            <a:r>
+              <a:rPr lang="en-US" sz="1700" dirty="0">
+                <a:solidFill>
+                  <a:srgbClr val="1E293B"/>
+                </a:solidFill>
+                <a:latin typeface="Calibri" pitchFamily="34" charset="0"/>
+                <a:ea typeface="Calibri" pitchFamily="34" charset="-122"/>
+                <a:cs typeface="Calibri" pitchFamily="34" charset="-120"/>
+              </a:rPr>
+              <a:t> </a:t>
+            </a:r>
+            <a:pPr indent="0" marL="0">
+              <a:buNone/>
+            </a:pPr>
+            <a:r>
+              <a:rPr lang="en-US" sz="1700" dirty="0">
+                <a:solidFill>
+                  <a:srgbClr val="1E293B"/>
+                </a:solidFill>
+                <a:latin typeface="Calibri" pitchFamily="34" charset="0"/>
+                <a:ea typeface="Calibri" pitchFamily="34" charset="-122"/>
+                <a:cs typeface="Calibri" pitchFamily="34" charset="-120"/>
+              </a:rPr>
+              <a:t>Despereaux’s</a:t>
+            </a:r>
+            <a:pPr indent="0" marL="0">
+              <a:buNone/>
+            </a:pPr>
+            <a:r>
+              <a:rPr lang="en-US" sz="1700" dirty="0">
+                <a:solidFill>
+                  <a:srgbClr val="1E293B"/>
+                </a:solidFill>
+                <a:latin typeface="Calibri" pitchFamily="34" charset="0"/>
+                <a:ea typeface="Calibri" pitchFamily="34" charset="-122"/>
+                <a:cs typeface="Calibri" pitchFamily="34" charset="-120"/>
+              </a:rPr>
+              <a:t> </a:t>
+            </a:r>
+            <a:pPr indent="0" marL="0">
+              <a:buNone/>
+            </a:pPr>
+            <a:r>
+              <a:rPr lang="en-US" sz="1700" dirty="0">
+                <a:solidFill>
+                  <a:srgbClr val="1E293B"/>
+                </a:solidFill>
+                <a:latin typeface="Calibri" pitchFamily="34" charset="0"/>
+                <a:ea typeface="Calibri" pitchFamily="34" charset="-122"/>
+                <a:cs typeface="Calibri" pitchFamily="34" charset="-120"/>
+              </a:rPr>
+              <a:t>neck</a:t>
+            </a:r>
+            <a:pPr indent="0" marL="0">
+              <a:buNone/>
+            </a:pPr>
+            <a:r>
+              <a:rPr lang="en-US" sz="1700" dirty="0">
+                <a:solidFill>
+                  <a:srgbClr val="1E293B"/>
+                </a:solidFill>
+                <a:latin typeface="Calibri" pitchFamily="34" charset="0"/>
+                <a:ea typeface="Calibri" pitchFamily="34" charset="-122"/>
+                <a:cs typeface="Calibri" pitchFamily="34" charset="-120"/>
+              </a:rPr>
+              <a:t> </a:t>
+            </a:r>
+            <a:pPr indent="0" marL="0">
+              <a:buNone/>
+            </a:pPr>
+            <a:r>
+              <a:rPr lang="en-US" sz="1700" dirty="0">
+                <a:solidFill>
+                  <a:srgbClr val="1E293B"/>
+                </a:solidFill>
+                <a:latin typeface="Calibri" pitchFamily="34" charset="0"/>
+                <a:ea typeface="Calibri" pitchFamily="34" charset="-122"/>
+                <a:cs typeface="Calibri" pitchFamily="34" charset="-120"/>
+              </a:rPr>
+              <a:t>was</a:t>
+            </a:r>
+            <a:pPr indent="0" marL="0">
+              <a:buNone/>
+            </a:pPr>
+            <a:r>
+              <a:rPr lang="en-US" sz="1700" dirty="0">
+                <a:solidFill>
+                  <a:srgbClr val="1E293B"/>
+                </a:solidFill>
+                <a:latin typeface="Calibri" pitchFamily="34" charset="0"/>
+                <a:ea typeface="Calibri" pitchFamily="34" charset="-122"/>
+                <a:cs typeface="Calibri" pitchFamily="34" charset="-120"/>
+              </a:rPr>
+              <a:t> </a:t>
+            </a:r>
+            <a:pPr indent="0" marL="0">
+              <a:buNone/>
+            </a:pPr>
+            <a:r>
+              <a:rPr lang="en-US" sz="1700" dirty="0">
+                <a:solidFill>
+                  <a:srgbClr val="1E293B"/>
+                </a:solidFill>
+                <a:latin typeface="Calibri" pitchFamily="34" charset="0"/>
+                <a:ea typeface="Calibri" pitchFamily="34" charset="-122"/>
+                <a:cs typeface="Calibri" pitchFamily="34" charset="-120"/>
+              </a:rPr>
+              <a:t>tight.</a:t>
+            </a:r>
+            <a:endParaRPr lang="en-US" sz="1700" dirty="0"/>
+          </a:p>
+        </p:txBody>
+      </p:sp>
+      <p:sp>
+        <p:nvSpPr>
+          <p:cNvPr id="12" name="Shape 10"/>
+          <p:cNvSpPr/>
+          <p:nvPr/>
+        </p:nvSpPr>
+        <p:spPr>
+          <a:xfrm>
+            <a:off x="365760" y="3008376"/>
+            <a:ext cx="8412480" cy="1837944"/>
+          </a:xfrm>
+          <a:prstGeom prst="roundRect">
+            <a:avLst>
+              <a:gd name="adj" fmla="val 4975"/>
+            </a:avLst>
+          </a:prstGeom>
+          <a:solidFill>
+            <a:srgbClr val="E8F8EF"/>
+          </a:solidFill>
+          <a:ln/>
+          <a:effectLst>
+            <a:outerShdw sx="100000" sy="100000" kx="0" ky="0" algn="bl" rotWithShape="0" blurRad="101600" dist="38100" dir="2700000">
+              <a:srgbClr val="000000">
+                <a:alpha val="12000"/>
+              </a:srgbClr>
+            </a:outerShdw>
+          </a:effectLst>
+        </p:spPr>
+      </p:sp>
+      <p:sp>
+        <p:nvSpPr>
+          <p:cNvPr id="13" name="Text 11"/>
+          <p:cNvSpPr/>
+          <p:nvPr/>
+        </p:nvSpPr>
+        <p:spPr>
+          <a:xfrm>
+            <a:off x="566928" y="3072384"/>
+            <a:ext cx="8229600" cy="237744"/>
+          </a:xfrm>
+          <a:prstGeom prst="rect">
+            <a:avLst/>
+          </a:prstGeom>
+          <a:noFill/>
+          <a:ln/>
+        </p:spPr>
+        <p:txBody>
+          <a:bodyPr wrap="square" lIns="0" tIns="0" rIns="0" bIns="0" rtlCol="0" anchor="ctr"/>
+          <a:lstStyle/>
+          <a:p>
+            <a:pPr indent="0" marL="0">
+              <a:buNone/>
+            </a:pPr>
+            <a:r>
+              <a:rPr lang="en-US" sz="1100" b="1" spc="100" kern="0" dirty="0">
+                <a:solidFill>
+                  <a:srgbClr val="34B76F"/>
+                </a:solidFill>
+                <a:latin typeface="Calibri" pitchFamily="34" charset="0"/>
+                <a:ea typeface="Calibri" pitchFamily="34" charset="-122"/>
+                <a:cs typeface="Calibri" pitchFamily="34" charset="-120"/>
+              </a:rPr>
+              <a:t>✅  THE PATTERN</a:t>
+            </a:r>
+            <a:endParaRPr lang="en-US" sz="1100" dirty="0"/>
+          </a:p>
+        </p:txBody>
+      </p:sp>
+      <p:sp>
+        <p:nvSpPr>
+          <p:cNvPr id="14" name="Text 12"/>
+          <p:cNvSpPr/>
+          <p:nvPr/>
+        </p:nvSpPr>
+        <p:spPr>
+          <a:xfrm>
+            <a:off x="566928" y="3328416"/>
+            <a:ext cx="8010144" cy="1380744"/>
+          </a:xfrm>
+          <a:prstGeom prst="rect">
+            <a:avLst/>
+          </a:prstGeom>
+          <a:noFill/>
+          <a:ln/>
+        </p:spPr>
+        <p:txBody>
+          <a:bodyPr wrap="square" lIns="0" tIns="0" rIns="0" bIns="0" rtlCol="0" anchor="t">
+            <a:normAutofit/>
+          </a:bodyPr>
+          <a:lstStyle/>
+          <a:p>
+            <a:pPr indent="0" marL="0">
+              <a:buNone/>
+            </a:pPr>
+            <a:r>
+              <a:rPr lang="en-US" sz="1300" dirty="0">
+                <a:solidFill>
+                  <a:srgbClr val="1E293B"/>
+                </a:solidFill>
+                <a:latin typeface="Calibri" pitchFamily="34" charset="0"/>
+                <a:ea typeface="Calibri" pitchFamily="34" charset="-122"/>
+                <a:cs typeface="Calibri" pitchFamily="34" charset="-120"/>
+              </a:rPr>
+              <a:t>A possessive noun shows that something belongs to someone. Add an apostrophe and s to a singular noun: the mouse’s tail. The apostrophe is what makes it possessive — without it, the word is just a plural.</a:t>
+            </a:r>
+            <a:endParaRPr lang="en-US" sz="1300" dirty="0"/>
+          </a:p>
+          <a:p>
+            <a:pPr indent="0" marL="0">
+              <a:buNone/>
+            </a:pPr>
+            <a:r>
+              <a:rPr lang="en-US" sz="1300" dirty="0">
+                <a:solidFill>
+                  <a:srgbClr val="1E293B"/>
+                </a:solidFill>
+                <a:latin typeface="Calibri" pitchFamily="34" charset="0"/>
+                <a:ea typeface="Calibri" pitchFamily="34" charset="-122"/>
+                <a:cs typeface="Calibri" pitchFamily="34" charset="-120"/>
+              </a:rPr>
+              <a:t>Despereaux’s — the heart belongs to Despereaux.</a:t>
+            </a:r>
+            <a:endParaRPr lang="en-US" sz="1300" dirty="0"/>
           </a:p>
         </p:txBody>
       </p:sp>
@@ -4117,7 +5241,7 @@
             <a:avLst/>
           </a:prstGeom>
           <a:solidFill>
-            <a:srgbClr val="0E1C42"/>
+            <a:srgbClr val="C7922C"/>
           </a:solidFill>
           <a:ln/>
         </p:spPr>
@@ -4155,7 +5279,7 @@
                 <a:ea typeface="Calibri" pitchFamily="34" charset="-122"/>
                 <a:cs typeface="Calibri" pitchFamily="34" charset="-120"/>
               </a:rPr>
-              <a:t>🔠  Spelling</a:t>
+              <a:t>✏️  Grammar</a:t>
             </a:r>
             <a:endParaRPr lang="en-US" sz="2200" dirty="0"/>
           </a:p>
@@ -4188,13 +5312,13 @@
             <a:r>
               <a:rPr lang="en-US" sz="1100" b="1" spc="100" kern="0" dirty="0">
                 <a:solidFill>
-                  <a:srgbClr val="0E1C42"/>
-                </a:solidFill>
-                <a:latin typeface="Calibri" pitchFamily="34" charset="0"/>
-                <a:ea typeface="Calibri" pitchFamily="34" charset="-122"/>
-                <a:cs typeface="Calibri" pitchFamily="34" charset="-120"/>
-              </a:rPr>
-              <a:t>DROPPING THE FINAL E</a:t>
+                  <a:srgbClr val="C7922C"/>
+                </a:solidFill>
+                <a:latin typeface="Calibri" pitchFamily="34" charset="0"/>
+                <a:ea typeface="Calibri" pitchFamily="34" charset="-122"/>
+                <a:cs typeface="Calibri" pitchFamily="34" charset="-120"/>
+              </a:rPr>
+              <a:t>POSSESSIVE NOUNS</a:t>
             </a:r>
             <a:endParaRPr lang="en-US" sz="1100" dirty="0"/>
           </a:p>
@@ -4208,77 +5332,16 @@
         </p:nvSpPr>
         <p:spPr>
           <a:xfrm>
-            <a:off x="411480" y="1078992"/>
-            <a:ext cx="4114800" cy="457200"/>
+            <a:off x="365760" y="1078992"/>
+            <a:ext cx="8412480" cy="658368"/>
           </a:xfrm>
           <a:prstGeom prst="roundRect">
             <a:avLst>
-              <a:gd name="adj" fmla="val 16000"/>
+              <a:gd name="adj" fmla="val 13889"/>
             </a:avLst>
           </a:prstGeom>
           <a:solidFill>
-            <a:srgbClr val="0E1C42"/>
-          </a:solidFill>
-          <a:ln/>
-        </p:spPr>
-      </p:sp>
-      <p:sp>
-        <p:nvSpPr>
-          <p:cNvPr id="6" name="Text 4"/>
-          <p:cNvSpPr/>
-          <p:nvPr/>
-        </p:nvSpPr>
-        <p:spPr>
-          <a:xfrm>
-            <a:off x="457200" y="1133856"/>
-            <a:ext cx="4023360" cy="347472"/>
-          </a:xfrm>
-          <a:prstGeom prst="rect">
-            <a:avLst/>
-          </a:prstGeom>
-          <a:noFill/>
-          <a:ln/>
-        </p:spPr>
-        <p:txBody>
-          <a:bodyPr wrap="square" lIns="0" tIns="0" rIns="0" bIns="0" rtlCol="0" anchor="ctr"/>
-          <a:lstStyle/>
-          <a:p>
-            <a:pPr algn="ctr" indent="0" marL="0">
-              <a:buNone/>
-            </a:pPr>
-            <a:r>
-              <a:rPr lang="en-US" sz="1300" b="1" dirty="0">
-                <a:solidFill>
-                  <a:srgbClr val="FFFFFF"/>
-                </a:solidFill>
-                <a:latin typeface="Calibri" pitchFamily="34" charset="0"/>
-                <a:ea typeface="Calibri" pitchFamily="34" charset="-122"/>
-                <a:cs typeface="Calibri" pitchFamily="34" charset="-120"/>
-              </a:rPr>
-              <a:t>Dropped the e</a:t>
-            </a:r>
-            <a:endParaRPr lang="en-US" sz="1300" dirty="0"/>
-          </a:p>
-        </p:txBody>
-      </p:sp>
-      <p:sp>
-        <p:nvSpPr>
-          <p:cNvPr id="7" name="Shape 5"/>
-          <p:cNvSpPr/>
-          <p:nvPr/>
-        </p:nvSpPr>
-        <p:spPr>
-          <a:xfrm>
-            <a:off x="411480" y="1591056"/>
-            <a:ext cx="4114800" cy="2103120"/>
-          </a:xfrm>
-          <a:prstGeom prst="roundRect">
-            <a:avLst>
-              <a:gd name="adj" fmla="val 4348"/>
-            </a:avLst>
-          </a:prstGeom>
-          <a:solidFill>
-            <a:srgbClr val="FFFFFF"/>
+            <a:srgbClr val="FEF6E8"/>
           </a:solidFill>
           <a:ln/>
           <a:effectLst>
@@ -4292,169 +5355,57 @@
       </p:sp>
       <p:sp>
         <p:nvSpPr>
-          <p:cNvPr id="8" name="Text 6"/>
-          <p:cNvSpPr/>
-          <p:nvPr/>
-        </p:nvSpPr>
-        <p:spPr>
-          <a:xfrm>
-            <a:off x="502920" y="1700784"/>
-            <a:ext cx="3931920" cy="1883664"/>
-          </a:xfrm>
-          <a:prstGeom prst="rect">
-            <a:avLst/>
-          </a:prstGeom>
-          <a:noFill/>
-          <a:ln/>
-        </p:spPr>
-        <p:txBody>
-          <a:bodyPr wrap="square" lIns="0" tIns="0" rIns="0" bIns="0" rtlCol="0" anchor="ctr"/>
-          <a:lstStyle/>
-          <a:p>
-            <a:pPr algn="ctr" indent="0" marL="0">
-              <a:buNone/>
-            </a:pPr>
-            <a:r>
-              <a:rPr lang="en-US" sz="1400" dirty="0">
-                <a:solidFill>
-                  <a:srgbClr val="1E293B"/>
-                </a:solidFill>
-                <a:latin typeface="Calibri" pitchFamily="34" charset="0"/>
-                <a:ea typeface="Calibri" pitchFamily="34" charset="-122"/>
-                <a:cs typeface="Calibri" pitchFamily="34" charset="-120"/>
-              </a:rPr>
-              <a:t>shining</a:t>
-            </a:r>
-            <a:endParaRPr lang="en-US" sz="1400" dirty="0"/>
-          </a:p>
-          <a:p>
-            <a:pPr algn="ctr" indent="0" marL="0">
-              <a:buNone/>
-            </a:pPr>
-            <a:r>
-              <a:rPr lang="en-US" sz="1400" dirty="0">
-                <a:solidFill>
-                  <a:srgbClr val="1E293B"/>
-                </a:solidFill>
-                <a:latin typeface="Calibri" pitchFamily="34" charset="0"/>
-                <a:ea typeface="Calibri" pitchFamily="34" charset="-122"/>
-                <a:cs typeface="Calibri" pitchFamily="34" charset="-120"/>
-              </a:rPr>
-              <a:t>staring</a:t>
-            </a:r>
-            <a:endParaRPr lang="en-US" sz="1400" dirty="0"/>
-          </a:p>
-          <a:p>
-            <a:pPr algn="ctr" indent="0" marL="0">
-              <a:buNone/>
-            </a:pPr>
-            <a:r>
-              <a:rPr lang="en-US" sz="1400" dirty="0">
-                <a:solidFill>
-                  <a:srgbClr val="1E293B"/>
-                </a:solidFill>
-                <a:latin typeface="Calibri" pitchFamily="34" charset="0"/>
-                <a:ea typeface="Calibri" pitchFamily="34" charset="-122"/>
-                <a:cs typeface="Calibri" pitchFamily="34" charset="-120"/>
-              </a:rPr>
-              <a:t>named</a:t>
-            </a:r>
-            <a:endParaRPr lang="en-US" sz="1400" dirty="0"/>
-          </a:p>
-          <a:p>
-            <a:pPr algn="ctr" indent="0" marL="0">
-              <a:buNone/>
-            </a:pPr>
-            <a:r>
-              <a:rPr lang="en-US" sz="1400" dirty="0">
-                <a:solidFill>
-                  <a:srgbClr val="1E293B"/>
-                </a:solidFill>
-                <a:latin typeface="Calibri" pitchFamily="34" charset="0"/>
-                <a:ea typeface="Calibri" pitchFamily="34" charset="-122"/>
-                <a:cs typeface="Calibri" pitchFamily="34" charset="-120"/>
-              </a:rPr>
-              <a:t>waved</a:t>
-            </a:r>
-            <a:endParaRPr lang="en-US" sz="1400" dirty="0"/>
-          </a:p>
-        </p:txBody>
-      </p:sp>
-      <p:sp>
-        <p:nvSpPr>
-          <p:cNvPr id="9" name="Shape 7"/>
-          <p:cNvSpPr/>
-          <p:nvPr/>
-        </p:nvSpPr>
-        <p:spPr>
-          <a:xfrm>
-            <a:off x="4617720" y="1078992"/>
-            <a:ext cx="4114800" cy="457200"/>
+          <p:cNvPr id="6" name="Text 4"/>
+          <p:cNvSpPr/>
+          <p:nvPr/>
+        </p:nvSpPr>
+        <p:spPr>
+          <a:xfrm>
+            <a:off x="594360" y="1225296"/>
+            <a:ext cx="7863840" cy="402336"/>
+          </a:xfrm>
+          <a:prstGeom prst="rect">
+            <a:avLst/>
+          </a:prstGeom>
+          <a:noFill/>
+          <a:ln/>
+        </p:spPr>
+        <p:txBody>
+          <a:bodyPr wrap="square" lIns="0" tIns="0" rIns="0" bIns="0" rtlCol="0" anchor="ctr"/>
+          <a:lstStyle/>
+          <a:p>
+            <a:pPr indent="0" marL="0">
+              <a:buNone/>
+            </a:pPr>
+            <a:r>
+              <a:rPr lang="en-US" sz="1600" dirty="0">
+                <a:solidFill>
+                  <a:srgbClr val="1E293B"/>
+                </a:solidFill>
+                <a:latin typeface="Calibri" pitchFamily="34" charset="0"/>
+                <a:ea typeface="Calibri" pitchFamily="34" charset="-122"/>
+                <a:cs typeface="Calibri" pitchFamily="34" charset="-120"/>
+              </a:rPr>
+              <a:t>Despereaux’s ears were bigger than his brother’s ears.</a:t>
+            </a:r>
+            <a:endParaRPr lang="en-US" sz="1600" dirty="0"/>
+          </a:p>
+        </p:txBody>
+      </p:sp>
+      <p:sp>
+        <p:nvSpPr>
+          <p:cNvPr id="7" name="Shape 5"/>
+          <p:cNvSpPr/>
+          <p:nvPr/>
+        </p:nvSpPr>
+        <p:spPr>
+          <a:xfrm>
+            <a:off x="365760" y="1810512"/>
+            <a:ext cx="8412480" cy="658368"/>
           </a:xfrm>
           <a:prstGeom prst="roundRect">
             <a:avLst>
-              <a:gd name="adj" fmla="val 16000"/>
-            </a:avLst>
-          </a:prstGeom>
-          <a:solidFill>
-            <a:srgbClr val="0E1C42"/>
-          </a:solidFill>
-          <a:ln/>
-        </p:spPr>
-      </p:sp>
-      <p:sp>
-        <p:nvSpPr>
-          <p:cNvPr id="10" name="Text 8"/>
-          <p:cNvSpPr/>
-          <p:nvPr/>
-        </p:nvSpPr>
-        <p:spPr>
-          <a:xfrm>
-            <a:off x="4663440" y="1133856"/>
-            <a:ext cx="4023360" cy="347472"/>
-          </a:xfrm>
-          <a:prstGeom prst="rect">
-            <a:avLst/>
-          </a:prstGeom>
-          <a:noFill/>
-          <a:ln/>
-        </p:spPr>
-        <p:txBody>
-          <a:bodyPr wrap="square" lIns="0" tIns="0" rIns="0" bIns="0" rtlCol="0" anchor="ctr"/>
-          <a:lstStyle/>
-          <a:p>
-            <a:pPr algn="ctr" indent="0" marL="0">
-              <a:buNone/>
-            </a:pPr>
-            <a:r>
-              <a:rPr lang="en-US" sz="1300" b="1" dirty="0">
-                <a:solidFill>
-                  <a:srgbClr val="FFFFFF"/>
-                </a:solidFill>
-                <a:latin typeface="Calibri" pitchFamily="34" charset="0"/>
-                <a:ea typeface="Calibri" pitchFamily="34" charset="-122"/>
-                <a:cs typeface="Calibri" pitchFamily="34" charset="-120"/>
-              </a:rPr>
-              <a:t>Kept the e</a:t>
-            </a:r>
-            <a:endParaRPr lang="en-US" sz="1300" dirty="0"/>
-          </a:p>
-        </p:txBody>
-      </p:sp>
-      <p:sp>
-        <p:nvSpPr>
-          <p:cNvPr id="11" name="Shape 9"/>
-          <p:cNvSpPr/>
-          <p:nvPr/>
-        </p:nvSpPr>
-        <p:spPr>
-          <a:xfrm>
-            <a:off x="4617720" y="1591056"/>
-            <a:ext cx="4114800" cy="2103120"/>
-          </a:xfrm>
-          <a:prstGeom prst="roundRect">
-            <a:avLst>
-              <a:gd name="adj" fmla="val 4348"/>
+              <a:gd name="adj" fmla="val 13889"/>
             </a:avLst>
           </a:prstGeom>
           <a:solidFill>
@@ -4472,91 +5423,215 @@
       </p:sp>
       <p:sp>
         <p:nvSpPr>
+          <p:cNvPr id="8" name="Text 6"/>
+          <p:cNvSpPr/>
+          <p:nvPr/>
+        </p:nvSpPr>
+        <p:spPr>
+          <a:xfrm>
+            <a:off x="594360" y="1956816"/>
+            <a:ext cx="7863840" cy="402336"/>
+          </a:xfrm>
+          <a:prstGeom prst="rect">
+            <a:avLst/>
+          </a:prstGeom>
+          <a:noFill/>
+          <a:ln/>
+        </p:spPr>
+        <p:txBody>
+          <a:bodyPr wrap="square" lIns="0" tIns="0" rIns="0" bIns="0" rtlCol="0" anchor="ctr"/>
+          <a:lstStyle/>
+          <a:p>
+            <a:pPr indent="0" marL="0">
+              <a:buNone/>
+            </a:pPr>
+            <a:r>
+              <a:rPr lang="en-US" sz="1600" dirty="0">
+                <a:solidFill>
+                  <a:srgbClr val="1E293B"/>
+                </a:solidFill>
+                <a:latin typeface="Calibri" pitchFamily="34" charset="0"/>
+                <a:ea typeface="Calibri" pitchFamily="34" charset="-122"/>
+                <a:cs typeface="Calibri" pitchFamily="34" charset="-120"/>
+              </a:rPr>
+              <a:t>The king’s soup and the princess’s spoon were gone.</a:t>
+            </a:r>
+            <a:endParaRPr lang="en-US" sz="1600" dirty="0"/>
+          </a:p>
+        </p:txBody>
+      </p:sp>
+      <p:sp>
+        <p:nvSpPr>
+          <p:cNvPr id="9" name="Shape 7"/>
+          <p:cNvSpPr/>
+          <p:nvPr/>
+        </p:nvSpPr>
+        <p:spPr>
+          <a:xfrm>
+            <a:off x="365760" y="2542032"/>
+            <a:ext cx="8412480" cy="658368"/>
+          </a:xfrm>
+          <a:prstGeom prst="roundRect">
+            <a:avLst>
+              <a:gd name="adj" fmla="val 13889"/>
+            </a:avLst>
+          </a:prstGeom>
+          <a:solidFill>
+            <a:srgbClr val="FEF6E8"/>
+          </a:solidFill>
+          <a:ln/>
+          <a:effectLst>
+            <a:outerShdw sx="100000" sy="100000" kx="0" ky="0" algn="bl" rotWithShape="0" blurRad="101600" dist="38100" dir="2700000">
+              <a:srgbClr val="000000">
+                <a:alpha val="12000"/>
+              </a:srgbClr>
+            </a:outerShdw>
+          </a:effectLst>
+        </p:spPr>
+      </p:sp>
+      <p:sp>
+        <p:nvSpPr>
+          <p:cNvPr id="10" name="Text 8"/>
+          <p:cNvSpPr/>
+          <p:nvPr/>
+        </p:nvSpPr>
+        <p:spPr>
+          <a:xfrm>
+            <a:off x="594360" y="2688336"/>
+            <a:ext cx="7863840" cy="402336"/>
+          </a:xfrm>
+          <a:prstGeom prst="rect">
+            <a:avLst/>
+          </a:prstGeom>
+          <a:noFill/>
+          <a:ln/>
+        </p:spPr>
+        <p:txBody>
+          <a:bodyPr wrap="square" lIns="0" tIns="0" rIns="0" bIns="0" rtlCol="0" anchor="ctr"/>
+          <a:lstStyle/>
+          <a:p>
+            <a:pPr indent="0" marL="0">
+              <a:buNone/>
+            </a:pPr>
+            <a:r>
+              <a:rPr lang="en-US" sz="1600" dirty="0">
+                <a:solidFill>
+                  <a:srgbClr val="1E293B"/>
+                </a:solidFill>
+                <a:latin typeface="Calibri" pitchFamily="34" charset="0"/>
+                <a:ea typeface="Calibri" pitchFamily="34" charset="-122"/>
+                <a:cs typeface="Calibri" pitchFamily="34" charset="-120"/>
+              </a:rPr>
+              <a:t>Mig’s father traded her for a hen’s egg.</a:t>
+            </a:r>
+            <a:endParaRPr lang="en-US" sz="1600" dirty="0"/>
+          </a:p>
+        </p:txBody>
+      </p:sp>
+      <p:sp>
+        <p:nvSpPr>
+          <p:cNvPr id="11" name="Shape 9"/>
+          <p:cNvSpPr/>
+          <p:nvPr/>
+        </p:nvSpPr>
+        <p:spPr>
+          <a:xfrm>
+            <a:off x="365760" y="3273552"/>
+            <a:ext cx="8412480" cy="658368"/>
+          </a:xfrm>
+          <a:prstGeom prst="roundRect">
+            <a:avLst>
+              <a:gd name="adj" fmla="val 13889"/>
+            </a:avLst>
+          </a:prstGeom>
+          <a:solidFill>
+            <a:srgbClr val="FFFFFF"/>
+          </a:solidFill>
+          <a:ln/>
+          <a:effectLst>
+            <a:outerShdw sx="100000" sy="100000" kx="0" ky="0" algn="bl" rotWithShape="0" blurRad="101600" dist="38100" dir="2700000">
+              <a:srgbClr val="000000">
+                <a:alpha val="12000"/>
+              </a:srgbClr>
+            </a:outerShdw>
+          </a:effectLst>
+        </p:spPr>
+      </p:sp>
+      <p:sp>
+        <p:nvSpPr>
           <p:cNvPr id="12" name="Text 10"/>
           <p:cNvSpPr/>
           <p:nvPr/>
         </p:nvSpPr>
         <p:spPr>
           <a:xfrm>
-            <a:off x="4709160" y="1700784"/>
-            <a:ext cx="3931920" cy="1883664"/>
-          </a:xfrm>
-          <a:prstGeom prst="rect">
-            <a:avLst/>
-          </a:prstGeom>
-          <a:noFill/>
-          <a:ln/>
-        </p:spPr>
-        <p:txBody>
-          <a:bodyPr wrap="square" lIns="0" tIns="0" rIns="0" bIns="0" rtlCol="0" anchor="ctr"/>
-          <a:lstStyle/>
-          <a:p>
-            <a:pPr algn="ctr" indent="0" marL="0">
-              <a:buNone/>
-            </a:pPr>
-            <a:r>
-              <a:rPr lang="en-US" sz="1400" dirty="0">
-                <a:solidFill>
-                  <a:srgbClr val="1E293B"/>
-                </a:solidFill>
-                <a:latin typeface="Calibri" pitchFamily="34" charset="0"/>
-                <a:ea typeface="Calibri" pitchFamily="34" charset="-122"/>
-                <a:cs typeface="Calibri" pitchFamily="34" charset="-120"/>
-              </a:rPr>
-              <a:t>hopeful</a:t>
-            </a:r>
-            <a:endParaRPr lang="en-US" sz="1400" dirty="0"/>
-          </a:p>
-          <a:p>
-            <a:pPr algn="ctr" indent="0" marL="0">
-              <a:buNone/>
-            </a:pPr>
-            <a:r>
-              <a:rPr lang="en-US" sz="1400" dirty="0">
-                <a:solidFill>
-                  <a:srgbClr val="1E293B"/>
-                </a:solidFill>
-                <a:latin typeface="Calibri" pitchFamily="34" charset="0"/>
-                <a:ea typeface="Calibri" pitchFamily="34" charset="-122"/>
-                <a:cs typeface="Calibri" pitchFamily="34" charset="-120"/>
-              </a:rPr>
-              <a:t>careful</a:t>
-            </a:r>
-            <a:endParaRPr lang="en-US" sz="1400" dirty="0"/>
-          </a:p>
-          <a:p>
-            <a:pPr algn="ctr" indent="0" marL="0">
-              <a:buNone/>
-            </a:pPr>
-            <a:r>
-              <a:rPr lang="en-US" sz="1400" dirty="0">
-                <a:solidFill>
-                  <a:srgbClr val="1E293B"/>
-                </a:solidFill>
-                <a:latin typeface="Calibri" pitchFamily="34" charset="0"/>
-                <a:ea typeface="Calibri" pitchFamily="34" charset="-122"/>
-                <a:cs typeface="Calibri" pitchFamily="34" charset="-120"/>
-              </a:rPr>
-              <a:t>useless</a:t>
-            </a:r>
-            <a:endParaRPr lang="en-US" sz="1400" dirty="0"/>
-          </a:p>
-          <a:p>
-            <a:pPr algn="ctr" indent="0" marL="0">
-              <a:buNone/>
-            </a:pPr>
-            <a:r>
-              <a:rPr lang="en-US" sz="1400" dirty="0">
-                <a:solidFill>
-                  <a:srgbClr val="1E293B"/>
-                </a:solidFill>
-                <a:latin typeface="Calibri" pitchFamily="34" charset="0"/>
-                <a:ea typeface="Calibri" pitchFamily="34" charset="-122"/>
-                <a:cs typeface="Calibri" pitchFamily="34" charset="-120"/>
-              </a:rPr>
-              <a:t>bravely</a:t>
-            </a:r>
-            <a:endParaRPr lang="en-US" sz="1400" dirty="0"/>
+            <a:off x="594360" y="3419856"/>
+            <a:ext cx="7863840" cy="402336"/>
+          </a:xfrm>
+          <a:prstGeom prst="rect">
+            <a:avLst/>
+          </a:prstGeom>
+          <a:noFill/>
+          <a:ln/>
+        </p:spPr>
+        <p:txBody>
+          <a:bodyPr wrap="square" lIns="0" tIns="0" rIns="0" bIns="0" rtlCol="0" anchor="ctr"/>
+          <a:lstStyle/>
+          <a:p>
+            <a:pPr indent="0" marL="0">
+              <a:buNone/>
+            </a:pPr>
+            <a:r>
+              <a:rPr lang="en-US" sz="1600" dirty="0">
+                <a:solidFill>
+                  <a:srgbClr val="1E293B"/>
+                </a:solidFill>
+                <a:latin typeface="Calibri" pitchFamily="34" charset="0"/>
+                <a:ea typeface="Calibri" pitchFamily="34" charset="-122"/>
+                <a:cs typeface="Calibri" pitchFamily="34" charset="-120"/>
+              </a:rPr>
+              <a:t>The mouse’s tail brushed the rat’s whisker.</a:t>
+            </a:r>
+            <a:endParaRPr lang="en-US" sz="1600" dirty="0"/>
+          </a:p>
+        </p:txBody>
+      </p:sp>
+      <p:sp>
+        <p:nvSpPr>
+          <p:cNvPr id="13" name="Text 11"/>
+          <p:cNvSpPr/>
+          <p:nvPr/>
+        </p:nvSpPr>
+        <p:spPr>
+          <a:xfrm>
+            <a:off x="365760" y="4050792"/>
+            <a:ext cx="8412480" cy="365760"/>
+          </a:xfrm>
+          <a:prstGeom prst="rect">
+            <a:avLst/>
+          </a:prstGeom>
+          <a:noFill/>
+          <a:ln/>
+        </p:spPr>
+        <p:txBody>
+          <a:bodyPr wrap="square" lIns="0" tIns="0" rIns="0" bIns="0" rtlCol="0" anchor="ctr"/>
+          <a:lstStyle/>
+          <a:p>
+            <a:pPr indent="0" marL="0">
+              <a:buNone/>
+            </a:pPr>
+            <a:r>
+              <a:rPr lang="en-US" sz="1500" i="1" dirty="0">
+                <a:solidFill>
+                  <a:srgbClr val="64748B"/>
+                </a:solidFill>
+                <a:latin typeface="Calibri" pitchFamily="34" charset="0"/>
+                <a:ea typeface="Calibri" pitchFamily="34" charset="-122"/>
+                <a:cs typeface="Calibri" pitchFamily="34" charset="-120"/>
+              </a:rPr>
+              <a:t>Your turn. Tap every possessive noun in each sentence — there is more than one. The sentence only finishes when you have found them all.</a:t>
+            </a:r>
+            <a:endParaRPr lang="en-US" sz="1500" dirty="0"/>
           </a:p>
         </p:txBody>
       </p:sp>
@@ -4571,6 +5646,2320 @@
 <file path=ppt/slides/slide15.xml><?xml version="1.0" encoding="utf-8"?>
 <p:sld xmlns:a="http://schemas.openxmlformats.org/drawingml/2006/main" xmlns:r="http://schemas.openxmlformats.org/officeDocument/2006/relationships" xmlns:p="http://schemas.openxmlformats.org/presentationml/2006/main">
   <p:cSld name="Slide 15">
+    <p:bg>
+      <p:bgPr>
+        <a:solidFill>
+          <a:srgbClr val="F8FAFC"/>
+        </a:solidFill>
+      </p:bgPr>
+    </p:bg>
+    <p:spTree>
+      <p:nvGrpSpPr>
+        <p:cNvPr id="1" name=""/>
+        <p:cNvGrpSpPr/>
+        <p:nvPr/>
+      </p:nvGrpSpPr>
+      <p:grpSpPr>
+        <a:xfrm>
+          <a:off x="0" y="0"/>
+          <a:ext cx="0" cy="0"/>
+          <a:chOff x="0" y="0"/>
+          <a:chExt cx="0" cy="0"/>
+        </a:xfrm>
+      </p:grpSpPr>
+      <p:sp>
+        <p:nvSpPr>
+          <p:cNvPr id="2" name="Shape 0"/>
+          <p:cNvSpPr/>
+          <p:nvPr/>
+        </p:nvSpPr>
+        <p:spPr>
+          <a:xfrm>
+            <a:off x="0" y="0"/>
+            <a:ext cx="9144000" cy="566928"/>
+          </a:xfrm>
+          <a:prstGeom prst="rect">
+            <a:avLst/>
+          </a:prstGeom>
+          <a:solidFill>
+            <a:srgbClr val="C7922C"/>
+          </a:solidFill>
+          <a:ln/>
+        </p:spPr>
+      </p:sp>
+      <p:sp>
+        <p:nvSpPr>
+          <p:cNvPr id="3" name="Text 1"/>
+          <p:cNvSpPr/>
+          <p:nvPr/>
+        </p:nvSpPr>
+        <p:spPr>
+          <a:xfrm>
+            <a:off x="365760" y="54864"/>
+            <a:ext cx="8412480" cy="457200"/>
+          </a:xfrm>
+          <a:prstGeom prst="rect">
+            <a:avLst/>
+          </a:prstGeom>
+          <a:noFill/>
+          <a:ln/>
+        </p:spPr>
+        <p:txBody>
+          <a:bodyPr wrap="square" lIns="0" tIns="0" rIns="0" bIns="0" rtlCol="0" anchor="ctr"/>
+          <a:lstStyle/>
+          <a:p>
+            <a:pPr indent="0" marL="0">
+              <a:buNone/>
+            </a:pPr>
+            <a:r>
+              <a:rPr lang="en-US" sz="2200" b="1" dirty="0">
+                <a:solidFill>
+                  <a:srgbClr val="FFFFFF"/>
+                </a:solidFill>
+                <a:latin typeface="Calibri" pitchFamily="34" charset="0"/>
+                <a:ea typeface="Calibri" pitchFamily="34" charset="-122"/>
+                <a:cs typeface="Calibri" pitchFamily="34" charset="-120"/>
+              </a:rPr>
+              <a:t>✏️  Grammar</a:t>
+            </a:r>
+            <a:endParaRPr lang="en-US" sz="2200" dirty="0"/>
+          </a:p>
+        </p:txBody>
+      </p:sp>
+      <p:sp>
+        <p:nvSpPr>
+          <p:cNvPr id="4" name="Text 2"/>
+          <p:cNvSpPr/>
+          <p:nvPr/>
+        </p:nvSpPr>
+        <p:spPr>
+          <a:xfrm>
+            <a:off x="365760" y="777240"/>
+            <a:ext cx="8229600" cy="237744"/>
+          </a:xfrm>
+          <a:prstGeom prst="rect">
+            <a:avLst/>
+          </a:prstGeom>
+          <a:noFill/>
+          <a:ln/>
+        </p:spPr>
+        <p:txBody>
+          <a:bodyPr wrap="square" lIns="0" tIns="0" rIns="0" bIns="0" rtlCol="0" anchor="ctr"/>
+          <a:lstStyle/>
+          <a:p>
+            <a:pPr indent="0" marL="0">
+              <a:buNone/>
+            </a:pPr>
+            <a:r>
+              <a:rPr lang="en-US" sz="1100" b="1" spc="100" kern="0" dirty="0">
+                <a:solidFill>
+                  <a:srgbClr val="C7922C"/>
+                </a:solidFill>
+                <a:latin typeface="Calibri" pitchFamily="34" charset="0"/>
+                <a:ea typeface="Calibri" pitchFamily="34" charset="-122"/>
+                <a:cs typeface="Calibri" pitchFamily="34" charset="-120"/>
+              </a:rPr>
+              <a:t>POSSESSIVE NOUNS</a:t>
+            </a:r>
+            <a:endParaRPr lang="en-US" sz="1100" dirty="0"/>
+          </a:p>
+        </p:txBody>
+      </p:sp>
+      <p:sp>
+        <p:nvSpPr>
+          <p:cNvPr id="5" name="Shape 3"/>
+          <p:cNvSpPr/>
+          <p:nvPr/>
+        </p:nvSpPr>
+        <p:spPr>
+          <a:xfrm>
+            <a:off x="365760" y="1078992"/>
+            <a:ext cx="8412480" cy="658368"/>
+          </a:xfrm>
+          <a:prstGeom prst="roundRect">
+            <a:avLst>
+              <a:gd name="adj" fmla="val 13889"/>
+            </a:avLst>
+          </a:prstGeom>
+          <a:solidFill>
+            <a:srgbClr val="FEF6E8"/>
+          </a:solidFill>
+          <a:ln/>
+          <a:effectLst>
+            <a:outerShdw sx="100000" sy="100000" kx="0" ky="0" algn="bl" rotWithShape="0" blurRad="101600" dist="38100" dir="2700000">
+              <a:srgbClr val="000000">
+                <a:alpha val="12000"/>
+              </a:srgbClr>
+            </a:outerShdw>
+          </a:effectLst>
+        </p:spPr>
+      </p:sp>
+      <p:sp>
+        <p:nvSpPr>
+          <p:cNvPr id="6" name="Text 4"/>
+          <p:cNvSpPr/>
+          <p:nvPr/>
+        </p:nvSpPr>
+        <p:spPr>
+          <a:xfrm>
+            <a:off x="594360" y="1225296"/>
+            <a:ext cx="7863840" cy="402336"/>
+          </a:xfrm>
+          <a:prstGeom prst="rect">
+            <a:avLst/>
+          </a:prstGeom>
+          <a:noFill/>
+          <a:ln/>
+        </p:spPr>
+        <p:txBody>
+          <a:bodyPr wrap="square" lIns="0" tIns="0" rIns="0" bIns="0" rtlCol="0" anchor="ctr"/>
+          <a:lstStyle/>
+          <a:p>
+            <a:pPr indent="0" marL="0">
+              <a:buNone/>
+            </a:pPr>
+            <a:r>
+              <a:rPr lang="en-US" sz="1600" b="1" dirty="0">
+                <a:solidFill>
+                  <a:srgbClr val="34B76F"/>
+                </a:solidFill>
+                <a:latin typeface="Calibri" pitchFamily="34" charset="0"/>
+                <a:ea typeface="Calibri" pitchFamily="34" charset="-122"/>
+                <a:cs typeface="Calibri" pitchFamily="34" charset="-120"/>
+              </a:rPr>
+              <a:t>Despereaux’s </a:t>
+            </a:r>
+            <a:pPr indent="0" marL="0">
+              <a:buNone/>
+            </a:pPr>
+            <a:r>
+              <a:rPr lang="en-US" sz="1600" dirty="0">
+                <a:solidFill>
+                  <a:srgbClr val="1E293B"/>
+                </a:solidFill>
+                <a:latin typeface="Calibri" pitchFamily="34" charset="0"/>
+                <a:ea typeface="Calibri" pitchFamily="34" charset="-122"/>
+                <a:cs typeface="Calibri" pitchFamily="34" charset="-120"/>
+              </a:rPr>
+              <a:t>ears </a:t>
+            </a:r>
+            <a:pPr indent="0" marL="0">
+              <a:buNone/>
+            </a:pPr>
+            <a:r>
+              <a:rPr lang="en-US" sz="1600" dirty="0">
+                <a:solidFill>
+                  <a:srgbClr val="1E293B"/>
+                </a:solidFill>
+                <a:latin typeface="Calibri" pitchFamily="34" charset="0"/>
+                <a:ea typeface="Calibri" pitchFamily="34" charset="-122"/>
+                <a:cs typeface="Calibri" pitchFamily="34" charset="-120"/>
+              </a:rPr>
+              <a:t>were </a:t>
+            </a:r>
+            <a:pPr indent="0" marL="0">
+              <a:buNone/>
+            </a:pPr>
+            <a:r>
+              <a:rPr lang="en-US" sz="1600" dirty="0">
+                <a:solidFill>
+                  <a:srgbClr val="1E293B"/>
+                </a:solidFill>
+                <a:latin typeface="Calibri" pitchFamily="34" charset="0"/>
+                <a:ea typeface="Calibri" pitchFamily="34" charset="-122"/>
+                <a:cs typeface="Calibri" pitchFamily="34" charset="-120"/>
+              </a:rPr>
+              <a:t>bigger </a:t>
+            </a:r>
+            <a:pPr indent="0" marL="0">
+              <a:buNone/>
+            </a:pPr>
+            <a:r>
+              <a:rPr lang="en-US" sz="1600" dirty="0">
+                <a:solidFill>
+                  <a:srgbClr val="1E293B"/>
+                </a:solidFill>
+                <a:latin typeface="Calibri" pitchFamily="34" charset="0"/>
+                <a:ea typeface="Calibri" pitchFamily="34" charset="-122"/>
+                <a:cs typeface="Calibri" pitchFamily="34" charset="-120"/>
+              </a:rPr>
+              <a:t>than </a:t>
+            </a:r>
+            <a:pPr indent="0" marL="0">
+              <a:buNone/>
+            </a:pPr>
+            <a:r>
+              <a:rPr lang="en-US" sz="1600" dirty="0">
+                <a:solidFill>
+                  <a:srgbClr val="1E293B"/>
+                </a:solidFill>
+                <a:latin typeface="Calibri" pitchFamily="34" charset="0"/>
+                <a:ea typeface="Calibri" pitchFamily="34" charset="-122"/>
+                <a:cs typeface="Calibri" pitchFamily="34" charset="-120"/>
+              </a:rPr>
+              <a:t>his </a:t>
+            </a:r>
+            <a:pPr indent="0" marL="0">
+              <a:buNone/>
+            </a:pPr>
+            <a:r>
+              <a:rPr lang="en-US" sz="1600" b="1" dirty="0">
+                <a:solidFill>
+                  <a:srgbClr val="34B76F"/>
+                </a:solidFill>
+                <a:latin typeface="Calibri" pitchFamily="34" charset="0"/>
+                <a:ea typeface="Calibri" pitchFamily="34" charset="-122"/>
+                <a:cs typeface="Calibri" pitchFamily="34" charset="-120"/>
+              </a:rPr>
+              <a:t>brother’s </a:t>
+            </a:r>
+            <a:pPr indent="0" marL="0">
+              <a:buNone/>
+            </a:pPr>
+            <a:r>
+              <a:rPr lang="en-US" sz="1600" dirty="0">
+                <a:solidFill>
+                  <a:srgbClr val="1E293B"/>
+                </a:solidFill>
+                <a:latin typeface="Calibri" pitchFamily="34" charset="0"/>
+                <a:ea typeface="Calibri" pitchFamily="34" charset="-122"/>
+                <a:cs typeface="Calibri" pitchFamily="34" charset="-120"/>
+              </a:rPr>
+              <a:t>ears.</a:t>
+            </a:r>
+            <a:endParaRPr lang="en-US" sz="1600" dirty="0"/>
+          </a:p>
+        </p:txBody>
+      </p:sp>
+      <p:sp>
+        <p:nvSpPr>
+          <p:cNvPr id="7" name="Shape 5"/>
+          <p:cNvSpPr/>
+          <p:nvPr/>
+        </p:nvSpPr>
+        <p:spPr>
+          <a:xfrm>
+            <a:off x="365760" y="1810512"/>
+            <a:ext cx="8412480" cy="658368"/>
+          </a:xfrm>
+          <a:prstGeom prst="roundRect">
+            <a:avLst>
+              <a:gd name="adj" fmla="val 13889"/>
+            </a:avLst>
+          </a:prstGeom>
+          <a:solidFill>
+            <a:srgbClr val="FFFFFF"/>
+          </a:solidFill>
+          <a:ln/>
+          <a:effectLst>
+            <a:outerShdw sx="100000" sy="100000" kx="0" ky="0" algn="bl" rotWithShape="0" blurRad="101600" dist="38100" dir="2700000">
+              <a:srgbClr val="000000">
+                <a:alpha val="12000"/>
+              </a:srgbClr>
+            </a:outerShdw>
+          </a:effectLst>
+        </p:spPr>
+      </p:sp>
+      <p:sp>
+        <p:nvSpPr>
+          <p:cNvPr id="8" name="Text 6"/>
+          <p:cNvSpPr/>
+          <p:nvPr/>
+        </p:nvSpPr>
+        <p:spPr>
+          <a:xfrm>
+            <a:off x="594360" y="1956816"/>
+            <a:ext cx="7863840" cy="402336"/>
+          </a:xfrm>
+          <a:prstGeom prst="rect">
+            <a:avLst/>
+          </a:prstGeom>
+          <a:noFill/>
+          <a:ln/>
+        </p:spPr>
+        <p:txBody>
+          <a:bodyPr wrap="square" lIns="0" tIns="0" rIns="0" bIns="0" rtlCol="0" anchor="ctr"/>
+          <a:lstStyle/>
+          <a:p>
+            <a:pPr indent="0" marL="0">
+              <a:buNone/>
+            </a:pPr>
+            <a:r>
+              <a:rPr lang="en-US" sz="1600" dirty="0">
+                <a:solidFill>
+                  <a:srgbClr val="1E293B"/>
+                </a:solidFill>
+                <a:latin typeface="Calibri" pitchFamily="34" charset="0"/>
+                <a:ea typeface="Calibri" pitchFamily="34" charset="-122"/>
+                <a:cs typeface="Calibri" pitchFamily="34" charset="-120"/>
+              </a:rPr>
+              <a:t>The </a:t>
+            </a:r>
+            <a:pPr indent="0" marL="0">
+              <a:buNone/>
+            </a:pPr>
+            <a:r>
+              <a:rPr lang="en-US" sz="1600" b="1" dirty="0">
+                <a:solidFill>
+                  <a:srgbClr val="34B76F"/>
+                </a:solidFill>
+                <a:latin typeface="Calibri" pitchFamily="34" charset="0"/>
+                <a:ea typeface="Calibri" pitchFamily="34" charset="-122"/>
+                <a:cs typeface="Calibri" pitchFamily="34" charset="-120"/>
+              </a:rPr>
+              <a:t>king’s </a:t>
+            </a:r>
+            <a:pPr indent="0" marL="0">
+              <a:buNone/>
+            </a:pPr>
+            <a:r>
+              <a:rPr lang="en-US" sz="1600" dirty="0">
+                <a:solidFill>
+                  <a:srgbClr val="1E293B"/>
+                </a:solidFill>
+                <a:latin typeface="Calibri" pitchFamily="34" charset="0"/>
+                <a:ea typeface="Calibri" pitchFamily="34" charset="-122"/>
+                <a:cs typeface="Calibri" pitchFamily="34" charset="-120"/>
+              </a:rPr>
+              <a:t>soup </a:t>
+            </a:r>
+            <a:pPr indent="0" marL="0">
+              <a:buNone/>
+            </a:pPr>
+            <a:r>
+              <a:rPr lang="en-US" sz="1600" dirty="0">
+                <a:solidFill>
+                  <a:srgbClr val="1E293B"/>
+                </a:solidFill>
+                <a:latin typeface="Calibri" pitchFamily="34" charset="0"/>
+                <a:ea typeface="Calibri" pitchFamily="34" charset="-122"/>
+                <a:cs typeface="Calibri" pitchFamily="34" charset="-120"/>
+              </a:rPr>
+              <a:t>and </a:t>
+            </a:r>
+            <a:pPr indent="0" marL="0">
+              <a:buNone/>
+            </a:pPr>
+            <a:r>
+              <a:rPr lang="en-US" sz="1600" dirty="0">
+                <a:solidFill>
+                  <a:srgbClr val="1E293B"/>
+                </a:solidFill>
+                <a:latin typeface="Calibri" pitchFamily="34" charset="0"/>
+                <a:ea typeface="Calibri" pitchFamily="34" charset="-122"/>
+                <a:cs typeface="Calibri" pitchFamily="34" charset="-120"/>
+              </a:rPr>
+              <a:t>the </a:t>
+            </a:r>
+            <a:pPr indent="0" marL="0">
+              <a:buNone/>
+            </a:pPr>
+            <a:r>
+              <a:rPr lang="en-US" sz="1600" b="1" dirty="0">
+                <a:solidFill>
+                  <a:srgbClr val="34B76F"/>
+                </a:solidFill>
+                <a:latin typeface="Calibri" pitchFamily="34" charset="0"/>
+                <a:ea typeface="Calibri" pitchFamily="34" charset="-122"/>
+                <a:cs typeface="Calibri" pitchFamily="34" charset="-120"/>
+              </a:rPr>
+              <a:t>princess’s </a:t>
+            </a:r>
+            <a:pPr indent="0" marL="0">
+              <a:buNone/>
+            </a:pPr>
+            <a:r>
+              <a:rPr lang="en-US" sz="1600" dirty="0">
+                <a:solidFill>
+                  <a:srgbClr val="1E293B"/>
+                </a:solidFill>
+                <a:latin typeface="Calibri" pitchFamily="34" charset="0"/>
+                <a:ea typeface="Calibri" pitchFamily="34" charset="-122"/>
+                <a:cs typeface="Calibri" pitchFamily="34" charset="-120"/>
+              </a:rPr>
+              <a:t>spoon </a:t>
+            </a:r>
+            <a:pPr indent="0" marL="0">
+              <a:buNone/>
+            </a:pPr>
+            <a:r>
+              <a:rPr lang="en-US" sz="1600" dirty="0">
+                <a:solidFill>
+                  <a:srgbClr val="1E293B"/>
+                </a:solidFill>
+                <a:latin typeface="Calibri" pitchFamily="34" charset="0"/>
+                <a:ea typeface="Calibri" pitchFamily="34" charset="-122"/>
+                <a:cs typeface="Calibri" pitchFamily="34" charset="-120"/>
+              </a:rPr>
+              <a:t>were </a:t>
+            </a:r>
+            <a:pPr indent="0" marL="0">
+              <a:buNone/>
+            </a:pPr>
+            <a:r>
+              <a:rPr lang="en-US" sz="1600" dirty="0">
+                <a:solidFill>
+                  <a:srgbClr val="1E293B"/>
+                </a:solidFill>
+                <a:latin typeface="Calibri" pitchFamily="34" charset="0"/>
+                <a:ea typeface="Calibri" pitchFamily="34" charset="-122"/>
+                <a:cs typeface="Calibri" pitchFamily="34" charset="-120"/>
+              </a:rPr>
+              <a:t>gone.</a:t>
+            </a:r>
+            <a:endParaRPr lang="en-US" sz="1600" dirty="0"/>
+          </a:p>
+        </p:txBody>
+      </p:sp>
+      <p:sp>
+        <p:nvSpPr>
+          <p:cNvPr id="9" name="Shape 7"/>
+          <p:cNvSpPr/>
+          <p:nvPr/>
+        </p:nvSpPr>
+        <p:spPr>
+          <a:xfrm>
+            <a:off x="365760" y="2542032"/>
+            <a:ext cx="8412480" cy="658368"/>
+          </a:xfrm>
+          <a:prstGeom prst="roundRect">
+            <a:avLst>
+              <a:gd name="adj" fmla="val 13889"/>
+            </a:avLst>
+          </a:prstGeom>
+          <a:solidFill>
+            <a:srgbClr val="FEF6E8"/>
+          </a:solidFill>
+          <a:ln/>
+          <a:effectLst>
+            <a:outerShdw sx="100000" sy="100000" kx="0" ky="0" algn="bl" rotWithShape="0" blurRad="101600" dist="38100" dir="2700000">
+              <a:srgbClr val="000000">
+                <a:alpha val="12000"/>
+              </a:srgbClr>
+            </a:outerShdw>
+          </a:effectLst>
+        </p:spPr>
+      </p:sp>
+      <p:sp>
+        <p:nvSpPr>
+          <p:cNvPr id="10" name="Text 8"/>
+          <p:cNvSpPr/>
+          <p:nvPr/>
+        </p:nvSpPr>
+        <p:spPr>
+          <a:xfrm>
+            <a:off x="594360" y="2688336"/>
+            <a:ext cx="7863840" cy="402336"/>
+          </a:xfrm>
+          <a:prstGeom prst="rect">
+            <a:avLst/>
+          </a:prstGeom>
+          <a:noFill/>
+          <a:ln/>
+        </p:spPr>
+        <p:txBody>
+          <a:bodyPr wrap="square" lIns="0" tIns="0" rIns="0" bIns="0" rtlCol="0" anchor="ctr"/>
+          <a:lstStyle/>
+          <a:p>
+            <a:pPr indent="0" marL="0">
+              <a:buNone/>
+            </a:pPr>
+            <a:r>
+              <a:rPr lang="en-US" sz="1600" b="1" dirty="0">
+                <a:solidFill>
+                  <a:srgbClr val="34B76F"/>
+                </a:solidFill>
+                <a:latin typeface="Calibri" pitchFamily="34" charset="0"/>
+                <a:ea typeface="Calibri" pitchFamily="34" charset="-122"/>
+                <a:cs typeface="Calibri" pitchFamily="34" charset="-120"/>
+              </a:rPr>
+              <a:t>Mig’s </a:t>
+            </a:r>
+            <a:pPr indent="0" marL="0">
+              <a:buNone/>
+            </a:pPr>
+            <a:r>
+              <a:rPr lang="en-US" sz="1600" dirty="0">
+                <a:solidFill>
+                  <a:srgbClr val="1E293B"/>
+                </a:solidFill>
+                <a:latin typeface="Calibri" pitchFamily="34" charset="0"/>
+                <a:ea typeface="Calibri" pitchFamily="34" charset="-122"/>
+                <a:cs typeface="Calibri" pitchFamily="34" charset="-120"/>
+              </a:rPr>
+              <a:t>father </a:t>
+            </a:r>
+            <a:pPr indent="0" marL="0">
+              <a:buNone/>
+            </a:pPr>
+            <a:r>
+              <a:rPr lang="en-US" sz="1600" dirty="0">
+                <a:solidFill>
+                  <a:srgbClr val="1E293B"/>
+                </a:solidFill>
+                <a:latin typeface="Calibri" pitchFamily="34" charset="0"/>
+                <a:ea typeface="Calibri" pitchFamily="34" charset="-122"/>
+                <a:cs typeface="Calibri" pitchFamily="34" charset="-120"/>
+              </a:rPr>
+              <a:t>traded </a:t>
+            </a:r>
+            <a:pPr indent="0" marL="0">
+              <a:buNone/>
+            </a:pPr>
+            <a:r>
+              <a:rPr lang="en-US" sz="1600" dirty="0">
+                <a:solidFill>
+                  <a:srgbClr val="1E293B"/>
+                </a:solidFill>
+                <a:latin typeface="Calibri" pitchFamily="34" charset="0"/>
+                <a:ea typeface="Calibri" pitchFamily="34" charset="-122"/>
+                <a:cs typeface="Calibri" pitchFamily="34" charset="-120"/>
+              </a:rPr>
+              <a:t>her </a:t>
+            </a:r>
+            <a:pPr indent="0" marL="0">
+              <a:buNone/>
+            </a:pPr>
+            <a:r>
+              <a:rPr lang="en-US" sz="1600" dirty="0">
+                <a:solidFill>
+                  <a:srgbClr val="1E293B"/>
+                </a:solidFill>
+                <a:latin typeface="Calibri" pitchFamily="34" charset="0"/>
+                <a:ea typeface="Calibri" pitchFamily="34" charset="-122"/>
+                <a:cs typeface="Calibri" pitchFamily="34" charset="-120"/>
+              </a:rPr>
+              <a:t>for </a:t>
+            </a:r>
+            <a:pPr indent="0" marL="0">
+              <a:buNone/>
+            </a:pPr>
+            <a:r>
+              <a:rPr lang="en-US" sz="1600" dirty="0">
+                <a:solidFill>
+                  <a:srgbClr val="1E293B"/>
+                </a:solidFill>
+                <a:latin typeface="Calibri" pitchFamily="34" charset="0"/>
+                <a:ea typeface="Calibri" pitchFamily="34" charset="-122"/>
+                <a:cs typeface="Calibri" pitchFamily="34" charset="-120"/>
+              </a:rPr>
+              <a:t>a </a:t>
+            </a:r>
+            <a:pPr indent="0" marL="0">
+              <a:buNone/>
+            </a:pPr>
+            <a:r>
+              <a:rPr lang="en-US" sz="1600" b="1" dirty="0">
+                <a:solidFill>
+                  <a:srgbClr val="34B76F"/>
+                </a:solidFill>
+                <a:latin typeface="Calibri" pitchFamily="34" charset="0"/>
+                <a:ea typeface="Calibri" pitchFamily="34" charset="-122"/>
+                <a:cs typeface="Calibri" pitchFamily="34" charset="-120"/>
+              </a:rPr>
+              <a:t>hen’s </a:t>
+            </a:r>
+            <a:pPr indent="0" marL="0">
+              <a:buNone/>
+            </a:pPr>
+            <a:r>
+              <a:rPr lang="en-US" sz="1600" dirty="0">
+                <a:solidFill>
+                  <a:srgbClr val="1E293B"/>
+                </a:solidFill>
+                <a:latin typeface="Calibri" pitchFamily="34" charset="0"/>
+                <a:ea typeface="Calibri" pitchFamily="34" charset="-122"/>
+                <a:cs typeface="Calibri" pitchFamily="34" charset="-120"/>
+              </a:rPr>
+              <a:t>egg.</a:t>
+            </a:r>
+            <a:endParaRPr lang="en-US" sz="1600" dirty="0"/>
+          </a:p>
+        </p:txBody>
+      </p:sp>
+      <p:sp>
+        <p:nvSpPr>
+          <p:cNvPr id="11" name="Shape 9"/>
+          <p:cNvSpPr/>
+          <p:nvPr/>
+        </p:nvSpPr>
+        <p:spPr>
+          <a:xfrm>
+            <a:off x="365760" y="3273552"/>
+            <a:ext cx="8412480" cy="658368"/>
+          </a:xfrm>
+          <a:prstGeom prst="roundRect">
+            <a:avLst>
+              <a:gd name="adj" fmla="val 13889"/>
+            </a:avLst>
+          </a:prstGeom>
+          <a:solidFill>
+            <a:srgbClr val="FFFFFF"/>
+          </a:solidFill>
+          <a:ln/>
+          <a:effectLst>
+            <a:outerShdw sx="100000" sy="100000" kx="0" ky="0" algn="bl" rotWithShape="0" blurRad="101600" dist="38100" dir="2700000">
+              <a:srgbClr val="000000">
+                <a:alpha val="12000"/>
+              </a:srgbClr>
+            </a:outerShdw>
+          </a:effectLst>
+        </p:spPr>
+      </p:sp>
+      <p:sp>
+        <p:nvSpPr>
+          <p:cNvPr id="12" name="Text 10"/>
+          <p:cNvSpPr/>
+          <p:nvPr/>
+        </p:nvSpPr>
+        <p:spPr>
+          <a:xfrm>
+            <a:off x="594360" y="3419856"/>
+            <a:ext cx="7863840" cy="402336"/>
+          </a:xfrm>
+          <a:prstGeom prst="rect">
+            <a:avLst/>
+          </a:prstGeom>
+          <a:noFill/>
+          <a:ln/>
+        </p:spPr>
+        <p:txBody>
+          <a:bodyPr wrap="square" lIns="0" tIns="0" rIns="0" bIns="0" rtlCol="0" anchor="ctr"/>
+          <a:lstStyle/>
+          <a:p>
+            <a:pPr indent="0" marL="0">
+              <a:buNone/>
+            </a:pPr>
+            <a:r>
+              <a:rPr lang="en-US" sz="1600" dirty="0">
+                <a:solidFill>
+                  <a:srgbClr val="1E293B"/>
+                </a:solidFill>
+                <a:latin typeface="Calibri" pitchFamily="34" charset="0"/>
+                <a:ea typeface="Calibri" pitchFamily="34" charset="-122"/>
+                <a:cs typeface="Calibri" pitchFamily="34" charset="-120"/>
+              </a:rPr>
+              <a:t>The </a:t>
+            </a:r>
+            <a:pPr indent="0" marL="0">
+              <a:buNone/>
+            </a:pPr>
+            <a:r>
+              <a:rPr lang="en-US" sz="1600" b="1" dirty="0">
+                <a:solidFill>
+                  <a:srgbClr val="34B76F"/>
+                </a:solidFill>
+                <a:latin typeface="Calibri" pitchFamily="34" charset="0"/>
+                <a:ea typeface="Calibri" pitchFamily="34" charset="-122"/>
+                <a:cs typeface="Calibri" pitchFamily="34" charset="-120"/>
+              </a:rPr>
+              <a:t>mouse’s </a:t>
+            </a:r>
+            <a:pPr indent="0" marL="0">
+              <a:buNone/>
+            </a:pPr>
+            <a:r>
+              <a:rPr lang="en-US" sz="1600" dirty="0">
+                <a:solidFill>
+                  <a:srgbClr val="1E293B"/>
+                </a:solidFill>
+                <a:latin typeface="Calibri" pitchFamily="34" charset="0"/>
+                <a:ea typeface="Calibri" pitchFamily="34" charset="-122"/>
+                <a:cs typeface="Calibri" pitchFamily="34" charset="-120"/>
+              </a:rPr>
+              <a:t>tail </a:t>
+            </a:r>
+            <a:pPr indent="0" marL="0">
+              <a:buNone/>
+            </a:pPr>
+            <a:r>
+              <a:rPr lang="en-US" sz="1600" dirty="0">
+                <a:solidFill>
+                  <a:srgbClr val="1E293B"/>
+                </a:solidFill>
+                <a:latin typeface="Calibri" pitchFamily="34" charset="0"/>
+                <a:ea typeface="Calibri" pitchFamily="34" charset="-122"/>
+                <a:cs typeface="Calibri" pitchFamily="34" charset="-120"/>
+              </a:rPr>
+              <a:t>brushed </a:t>
+            </a:r>
+            <a:pPr indent="0" marL="0">
+              <a:buNone/>
+            </a:pPr>
+            <a:r>
+              <a:rPr lang="en-US" sz="1600" dirty="0">
+                <a:solidFill>
+                  <a:srgbClr val="1E293B"/>
+                </a:solidFill>
+                <a:latin typeface="Calibri" pitchFamily="34" charset="0"/>
+                <a:ea typeface="Calibri" pitchFamily="34" charset="-122"/>
+                <a:cs typeface="Calibri" pitchFamily="34" charset="-120"/>
+              </a:rPr>
+              <a:t>the </a:t>
+            </a:r>
+            <a:pPr indent="0" marL="0">
+              <a:buNone/>
+            </a:pPr>
+            <a:r>
+              <a:rPr lang="en-US" sz="1600" b="1" dirty="0">
+                <a:solidFill>
+                  <a:srgbClr val="34B76F"/>
+                </a:solidFill>
+                <a:latin typeface="Calibri" pitchFamily="34" charset="0"/>
+                <a:ea typeface="Calibri" pitchFamily="34" charset="-122"/>
+                <a:cs typeface="Calibri" pitchFamily="34" charset="-120"/>
+              </a:rPr>
+              <a:t>rat’s </a:t>
+            </a:r>
+            <a:pPr indent="0" marL="0">
+              <a:buNone/>
+            </a:pPr>
+            <a:r>
+              <a:rPr lang="en-US" sz="1600" dirty="0">
+                <a:solidFill>
+                  <a:srgbClr val="1E293B"/>
+                </a:solidFill>
+                <a:latin typeface="Calibri" pitchFamily="34" charset="0"/>
+                <a:ea typeface="Calibri" pitchFamily="34" charset="-122"/>
+                <a:cs typeface="Calibri" pitchFamily="34" charset="-120"/>
+              </a:rPr>
+              <a:t>whisker.</a:t>
+            </a:r>
+            <a:endParaRPr lang="en-US" sz="1600" dirty="0"/>
+          </a:p>
+        </p:txBody>
+      </p:sp>
+      <p:sp>
+        <p:nvSpPr>
+          <p:cNvPr id="13" name="Text 11"/>
+          <p:cNvSpPr/>
+          <p:nvPr/>
+        </p:nvSpPr>
+        <p:spPr>
+          <a:xfrm>
+            <a:off x="365760" y="4050792"/>
+            <a:ext cx="8412480" cy="365760"/>
+          </a:xfrm>
+          <a:prstGeom prst="rect">
+            <a:avLst/>
+          </a:prstGeom>
+          <a:noFill/>
+          <a:ln/>
+        </p:spPr>
+        <p:txBody>
+          <a:bodyPr wrap="square" lIns="0" tIns="0" rIns="0" bIns="0" rtlCol="0" anchor="ctr"/>
+          <a:lstStyle/>
+          <a:p>
+            <a:pPr indent="0" marL="0">
+              <a:buNone/>
+            </a:pPr>
+            <a:r>
+              <a:rPr lang="en-US" sz="1500" b="1" dirty="0">
+                <a:solidFill>
+                  <a:srgbClr val="34B76F"/>
+                </a:solidFill>
+                <a:latin typeface="Calibri" pitchFamily="34" charset="0"/>
+                <a:ea typeface="Calibri" pitchFamily="34" charset="-122"/>
+                <a:cs typeface="Calibri" pitchFamily="34" charset="-120"/>
+              </a:rPr>
+              <a:t>✅  Answers revealed</a:t>
+            </a:r>
+            <a:endParaRPr lang="en-US" sz="1500" dirty="0"/>
+          </a:p>
+        </p:txBody>
+      </p:sp>
+    </p:spTree>
+  </p:cSld>
+  <p:clrMapOvr>
+    <a:masterClrMapping/>
+  </p:clrMapOvr>
+</p:sld>
+</file>
+
+<file path=ppt/slides/slide16.xml><?xml version="1.0" encoding="utf-8"?>
+<p:sld xmlns:a="http://schemas.openxmlformats.org/drawingml/2006/main" xmlns:r="http://schemas.openxmlformats.org/officeDocument/2006/relationships" xmlns:p="http://schemas.openxmlformats.org/presentationml/2006/main">
+  <p:cSld name="Slide 16">
+    <p:bg>
+      <p:bgPr>
+        <a:solidFill>
+          <a:srgbClr val="F8FAFC"/>
+        </a:solidFill>
+      </p:bgPr>
+    </p:bg>
+    <p:spTree>
+      <p:nvGrpSpPr>
+        <p:cNvPr id="1" name=""/>
+        <p:cNvGrpSpPr/>
+        <p:nvPr/>
+      </p:nvGrpSpPr>
+      <p:grpSpPr>
+        <a:xfrm>
+          <a:off x="0" y="0"/>
+          <a:ext cx="0" cy="0"/>
+          <a:chOff x="0" y="0"/>
+          <a:chExt cx="0" cy="0"/>
+        </a:xfrm>
+      </p:grpSpPr>
+      <p:sp>
+        <p:nvSpPr>
+          <p:cNvPr id="2" name="Shape 0"/>
+          <p:cNvSpPr/>
+          <p:nvPr/>
+        </p:nvSpPr>
+        <p:spPr>
+          <a:xfrm>
+            <a:off x="0" y="0"/>
+            <a:ext cx="9144000" cy="566928"/>
+          </a:xfrm>
+          <a:prstGeom prst="rect">
+            <a:avLst/>
+          </a:prstGeom>
+          <a:solidFill>
+            <a:srgbClr val="0E1C42"/>
+          </a:solidFill>
+          <a:ln/>
+        </p:spPr>
+      </p:sp>
+      <p:sp>
+        <p:nvSpPr>
+          <p:cNvPr id="3" name="Text 1"/>
+          <p:cNvSpPr/>
+          <p:nvPr/>
+        </p:nvSpPr>
+        <p:spPr>
+          <a:xfrm>
+            <a:off x="365760" y="54864"/>
+            <a:ext cx="8412480" cy="457200"/>
+          </a:xfrm>
+          <a:prstGeom prst="rect">
+            <a:avLst/>
+          </a:prstGeom>
+          <a:noFill/>
+          <a:ln/>
+        </p:spPr>
+        <p:txBody>
+          <a:bodyPr wrap="square" lIns="0" tIns="0" rIns="0" bIns="0" rtlCol="0" anchor="ctr"/>
+          <a:lstStyle/>
+          <a:p>
+            <a:pPr indent="0" marL="0">
+              <a:buNone/>
+            </a:pPr>
+            <a:r>
+              <a:rPr lang="en-US" sz="2200" b="1" dirty="0">
+                <a:solidFill>
+                  <a:srgbClr val="FFFFFF"/>
+                </a:solidFill>
+                <a:latin typeface="Calibri" pitchFamily="34" charset="0"/>
+                <a:ea typeface="Calibri" pitchFamily="34" charset="-122"/>
+                <a:cs typeface="Calibri" pitchFamily="34" charset="-120"/>
+              </a:rPr>
+              <a:t>🔠  Spelling</a:t>
+            </a:r>
+            <a:endParaRPr lang="en-US" sz="2200" dirty="0"/>
+          </a:p>
+        </p:txBody>
+      </p:sp>
+      <p:sp>
+        <p:nvSpPr>
+          <p:cNvPr id="4" name="Text 2"/>
+          <p:cNvSpPr/>
+          <p:nvPr/>
+        </p:nvSpPr>
+        <p:spPr>
+          <a:xfrm>
+            <a:off x="365760" y="777240"/>
+            <a:ext cx="8229600" cy="237744"/>
+          </a:xfrm>
+          <a:prstGeom prst="rect">
+            <a:avLst/>
+          </a:prstGeom>
+          <a:noFill/>
+          <a:ln/>
+        </p:spPr>
+        <p:txBody>
+          <a:bodyPr wrap="square" lIns="0" tIns="0" rIns="0" bIns="0" rtlCol="0" anchor="ctr"/>
+          <a:lstStyle/>
+          <a:p>
+            <a:pPr indent="0" marL="0">
+              <a:buNone/>
+            </a:pPr>
+            <a:r>
+              <a:rPr lang="en-US" sz="1100" b="1" spc="100" kern="0" dirty="0">
+                <a:solidFill>
+                  <a:srgbClr val="0E1C42"/>
+                </a:solidFill>
+                <a:latin typeface="Calibri" pitchFamily="34" charset="0"/>
+                <a:ea typeface="Calibri" pitchFamily="34" charset="-122"/>
+                <a:cs typeface="Calibri" pitchFamily="34" charset="-120"/>
+              </a:rPr>
+              <a:t>Y TO I BEFORE SUFFIX</a:t>
+            </a:r>
+            <a:endParaRPr lang="en-US" sz="1100" dirty="0"/>
+          </a:p>
+        </p:txBody>
+      </p:sp>
+      <p:sp>
+        <p:nvSpPr>
+          <p:cNvPr id="5" name="Text 3"/>
+          <p:cNvSpPr/>
+          <p:nvPr/>
+        </p:nvSpPr>
+        <p:spPr>
+          <a:xfrm>
+            <a:off x="365760" y="1051560"/>
+            <a:ext cx="8229600" cy="237744"/>
+          </a:xfrm>
+          <a:prstGeom prst="rect">
+            <a:avLst/>
+          </a:prstGeom>
+          <a:noFill/>
+          <a:ln/>
+        </p:spPr>
+        <p:txBody>
+          <a:bodyPr wrap="square" lIns="0" tIns="0" rIns="0" bIns="0" rtlCol="0" anchor="ctr"/>
+          <a:lstStyle/>
+          <a:p>
+            <a:pPr indent="0" marL="0">
+              <a:buNone/>
+            </a:pPr>
+            <a:r>
+              <a:rPr lang="en-US" sz="1100" b="1" spc="100" kern="0" dirty="0">
+                <a:solidFill>
+                  <a:srgbClr val="C7922C"/>
+                </a:solidFill>
+                <a:latin typeface="Calibri" pitchFamily="34" charset="0"/>
+                <a:ea typeface="Calibri" pitchFamily="34" charset="-122"/>
+                <a:cs typeface="Calibri" pitchFamily="34" charset="-120"/>
+              </a:rPr>
+              <a:t>📖  THE RULE</a:t>
+            </a:r>
+            <a:endParaRPr lang="en-US" sz="1100" dirty="0"/>
+          </a:p>
+        </p:txBody>
+      </p:sp>
+      <p:sp>
+        <p:nvSpPr>
+          <p:cNvPr id="6" name="Shape 4"/>
+          <p:cNvSpPr/>
+          <p:nvPr/>
+        </p:nvSpPr>
+        <p:spPr>
+          <a:xfrm>
+            <a:off x="365760" y="1298448"/>
+            <a:ext cx="8412480" cy="960120"/>
+          </a:xfrm>
+          <a:prstGeom prst="roundRect">
+            <a:avLst>
+              <a:gd name="adj" fmla="val 9524"/>
+            </a:avLst>
+          </a:prstGeom>
+          <a:solidFill>
+            <a:srgbClr val="FEF6E8"/>
+          </a:solidFill>
+          <a:ln w="19050">
+            <a:solidFill>
+              <a:srgbClr val="C7922C"/>
+            </a:solidFill>
+            <a:prstDash val="solid"/>
+          </a:ln>
+          <a:effectLst>
+            <a:outerShdw sx="100000" sy="100000" kx="0" ky="0" algn="bl" rotWithShape="0" blurRad="101600" dist="38100" dir="2700000">
+              <a:srgbClr val="000000">
+                <a:alpha val="12000"/>
+              </a:srgbClr>
+            </a:outerShdw>
+          </a:effectLst>
+        </p:spPr>
+      </p:sp>
+      <p:sp>
+        <p:nvSpPr>
+          <p:cNvPr id="7" name="Text 5"/>
+          <p:cNvSpPr/>
+          <p:nvPr/>
+        </p:nvSpPr>
+        <p:spPr>
+          <a:xfrm>
+            <a:off x="594360" y="1426464"/>
+            <a:ext cx="7955280" cy="704088"/>
+          </a:xfrm>
+          <a:prstGeom prst="rect">
+            <a:avLst/>
+          </a:prstGeom>
+          <a:noFill/>
+          <a:ln/>
+        </p:spPr>
+        <p:txBody>
+          <a:bodyPr wrap="square" lIns="0" tIns="0" rIns="0" bIns="0" rtlCol="0" anchor="ctr"/>
+          <a:lstStyle/>
+          <a:p>
+            <a:pPr indent="0" marL="0">
+              <a:buNone/>
+            </a:pPr>
+            <a:r>
+              <a:rPr lang="en-US" sz="1700" dirty="0">
+                <a:solidFill>
+                  <a:srgbClr val="1E293B"/>
+                </a:solidFill>
+                <a:latin typeface="Calibri" pitchFamily="34" charset="0"/>
+                <a:ea typeface="Calibri" pitchFamily="34" charset="-122"/>
+                <a:cs typeface="Calibri" pitchFamily="34" charset="-120"/>
+              </a:rPr>
+              <a:t>When a word ends in a consonant + y, change the y to i before most endings: carry → carried. Two exceptions: keep the y before -ing (carrying), and change nothing when a vowel comes before the y (played).</a:t>
+            </a:r>
+            <a:endParaRPr lang="en-US" sz="1700" dirty="0"/>
+          </a:p>
+        </p:txBody>
+      </p:sp>
+      <p:sp>
+        <p:nvSpPr>
+          <p:cNvPr id="8" name="Text 6"/>
+          <p:cNvSpPr/>
+          <p:nvPr/>
+        </p:nvSpPr>
+        <p:spPr>
+          <a:xfrm>
+            <a:off x="365760" y="2395728"/>
+            <a:ext cx="8412480" cy="411480"/>
+          </a:xfrm>
+          <a:prstGeom prst="rect">
+            <a:avLst/>
+          </a:prstGeom>
+          <a:noFill/>
+          <a:ln/>
+        </p:spPr>
+        <p:txBody>
+          <a:bodyPr wrap="square" lIns="0" tIns="0" rIns="0" bIns="0" rtlCol="0" anchor="ctr"/>
+          <a:lstStyle/>
+          <a:p>
+            <a:pPr indent="0" marL="0">
+              <a:buNone/>
+            </a:pPr>
+            <a:r>
+              <a:rPr lang="en-US" sz="1400" i="1" dirty="0">
+                <a:solidFill>
+                  <a:srgbClr val="64748B"/>
+                </a:solidFill>
+                <a:latin typeface="Calibri" pitchFamily="34" charset="0"/>
+                <a:ea typeface="Calibri" pitchFamily="34" charset="-122"/>
+                <a:cs typeface="Calibri" pitchFamily="34" charset="-120"/>
+              </a:rPr>
+              <a:t>Sound Detective! One word in each row swapped its y for an i.</a:t>
+            </a:r>
+            <a:endParaRPr lang="en-US" sz="1400" dirty="0"/>
+          </a:p>
+        </p:txBody>
+      </p:sp>
+      <p:sp>
+        <p:nvSpPr>
+          <p:cNvPr id="9" name="Shape 7"/>
+          <p:cNvSpPr/>
+          <p:nvPr/>
+        </p:nvSpPr>
+        <p:spPr>
+          <a:xfrm>
+            <a:off x="365760" y="2852928"/>
+            <a:ext cx="8412480" cy="438912"/>
+          </a:xfrm>
+          <a:prstGeom prst="roundRect">
+            <a:avLst>
+              <a:gd name="adj" fmla="val 20833"/>
+            </a:avLst>
+          </a:prstGeom>
+          <a:solidFill>
+            <a:srgbClr val="F8FAFC"/>
+          </a:solidFill>
+          <a:ln/>
+          <a:effectLst>
+            <a:outerShdw sx="100000" sy="100000" kx="0" ky="0" algn="bl" rotWithShape="0" blurRad="101600" dist="38100" dir="2700000">
+              <a:srgbClr val="000000">
+                <a:alpha val="12000"/>
+              </a:srgbClr>
+            </a:outerShdw>
+          </a:effectLst>
+        </p:spPr>
+      </p:sp>
+      <p:sp>
+        <p:nvSpPr>
+          <p:cNvPr id="10" name="Text 8"/>
+          <p:cNvSpPr/>
+          <p:nvPr/>
+        </p:nvSpPr>
+        <p:spPr>
+          <a:xfrm>
+            <a:off x="594360" y="2916936"/>
+            <a:ext cx="7863840" cy="310896"/>
+          </a:xfrm>
+          <a:prstGeom prst="rect">
+            <a:avLst/>
+          </a:prstGeom>
+          <a:noFill/>
+          <a:ln/>
+        </p:spPr>
+        <p:txBody>
+          <a:bodyPr wrap="square" lIns="0" tIns="0" rIns="0" bIns="0" rtlCol="0" anchor="ctr"/>
+          <a:lstStyle/>
+          <a:p>
+            <a:pPr indent="0" marL="0">
+              <a:buNone/>
+            </a:pPr>
+            <a:r>
+              <a:rPr lang="en-US" sz="1500" dirty="0">
+                <a:solidFill>
+                  <a:srgbClr val="1E293B"/>
+                </a:solidFill>
+                <a:latin typeface="Calibri" pitchFamily="34" charset="0"/>
+                <a:ea typeface="Calibri" pitchFamily="34" charset="-122"/>
+                <a:cs typeface="Calibri" pitchFamily="34" charset="-120"/>
+              </a:rPr>
+              <a:t>carried     ·     </a:t>
+            </a:r>
+            <a:pPr indent="0" marL="0">
+              <a:buNone/>
+            </a:pPr>
+            <a:r>
+              <a:rPr lang="en-US" sz="1500" dirty="0">
+                <a:solidFill>
+                  <a:srgbClr val="1E293B"/>
+                </a:solidFill>
+                <a:latin typeface="Calibri" pitchFamily="34" charset="0"/>
+                <a:ea typeface="Calibri" pitchFamily="34" charset="-122"/>
+                <a:cs typeface="Calibri" pitchFamily="34" charset="-120"/>
+              </a:rPr>
+              <a:t>played     ·     </a:t>
+            </a:r>
+            <a:pPr indent="0" marL="0">
+              <a:buNone/>
+            </a:pPr>
+            <a:r>
+              <a:rPr lang="en-US" sz="1500" dirty="0">
+                <a:solidFill>
+                  <a:srgbClr val="1E293B"/>
+                </a:solidFill>
+                <a:latin typeface="Calibri" pitchFamily="34" charset="0"/>
+                <a:ea typeface="Calibri" pitchFamily="34" charset="-122"/>
+                <a:cs typeface="Calibri" pitchFamily="34" charset="-120"/>
+              </a:rPr>
+              <a:t>stayed     ·     </a:t>
+            </a:r>
+            <a:pPr indent="0" marL="0">
+              <a:buNone/>
+            </a:pPr>
+            <a:r>
+              <a:rPr lang="en-US" sz="1500" dirty="0">
+                <a:solidFill>
+                  <a:srgbClr val="1E293B"/>
+                </a:solidFill>
+                <a:latin typeface="Calibri" pitchFamily="34" charset="0"/>
+                <a:ea typeface="Calibri" pitchFamily="34" charset="-122"/>
+                <a:cs typeface="Calibri" pitchFamily="34" charset="-120"/>
+              </a:rPr>
+              <a:t>enjoyed</a:t>
+            </a:r>
+            <a:endParaRPr lang="en-US" sz="1500" dirty="0"/>
+          </a:p>
+        </p:txBody>
+      </p:sp>
+      <p:sp>
+        <p:nvSpPr>
+          <p:cNvPr id="11" name="Shape 9"/>
+          <p:cNvSpPr/>
+          <p:nvPr/>
+        </p:nvSpPr>
+        <p:spPr>
+          <a:xfrm>
+            <a:off x="365760" y="3337560"/>
+            <a:ext cx="8412480" cy="438912"/>
+          </a:xfrm>
+          <a:prstGeom prst="roundRect">
+            <a:avLst>
+              <a:gd name="adj" fmla="val 20833"/>
+            </a:avLst>
+          </a:prstGeom>
+          <a:solidFill>
+            <a:srgbClr val="FFFFFF"/>
+          </a:solidFill>
+          <a:ln/>
+          <a:effectLst>
+            <a:outerShdw sx="100000" sy="100000" kx="0" ky="0" algn="bl" rotWithShape="0" blurRad="101600" dist="38100" dir="2700000">
+              <a:srgbClr val="000000">
+                <a:alpha val="12000"/>
+              </a:srgbClr>
+            </a:outerShdw>
+          </a:effectLst>
+        </p:spPr>
+      </p:sp>
+      <p:sp>
+        <p:nvSpPr>
+          <p:cNvPr id="12" name="Text 10"/>
+          <p:cNvSpPr/>
+          <p:nvPr/>
+        </p:nvSpPr>
+        <p:spPr>
+          <a:xfrm>
+            <a:off x="594360" y="3401568"/>
+            <a:ext cx="7863840" cy="310896"/>
+          </a:xfrm>
+          <a:prstGeom prst="rect">
+            <a:avLst/>
+          </a:prstGeom>
+          <a:noFill/>
+          <a:ln/>
+        </p:spPr>
+        <p:txBody>
+          <a:bodyPr wrap="square" lIns="0" tIns="0" rIns="0" bIns="0" rtlCol="0" anchor="ctr"/>
+          <a:lstStyle/>
+          <a:p>
+            <a:pPr indent="0" marL="0">
+              <a:buNone/>
+            </a:pPr>
+            <a:r>
+              <a:rPr lang="en-US" sz="1500" dirty="0">
+                <a:solidFill>
+                  <a:srgbClr val="1E293B"/>
+                </a:solidFill>
+                <a:latin typeface="Calibri" pitchFamily="34" charset="0"/>
+                <a:ea typeface="Calibri" pitchFamily="34" charset="-122"/>
+                <a:cs typeface="Calibri" pitchFamily="34" charset="-120"/>
+              </a:rPr>
+              <a:t>louder     ·     </a:t>
+            </a:r>
+            <a:pPr indent="0" marL="0">
+              <a:buNone/>
+            </a:pPr>
+            <a:r>
+              <a:rPr lang="en-US" sz="1500" dirty="0">
+                <a:solidFill>
+                  <a:srgbClr val="1E293B"/>
+                </a:solidFill>
+                <a:latin typeface="Calibri" pitchFamily="34" charset="0"/>
+                <a:ea typeface="Calibri" pitchFamily="34" charset="-122"/>
+                <a:cs typeface="Calibri" pitchFamily="34" charset="-120"/>
+              </a:rPr>
+              <a:t>happier     ·     </a:t>
+            </a:r>
+            <a:pPr indent="0" marL="0">
+              <a:buNone/>
+            </a:pPr>
+            <a:r>
+              <a:rPr lang="en-US" sz="1500" dirty="0">
+                <a:solidFill>
+                  <a:srgbClr val="1E293B"/>
+                </a:solidFill>
+                <a:latin typeface="Calibri" pitchFamily="34" charset="0"/>
+                <a:ea typeface="Calibri" pitchFamily="34" charset="-122"/>
+                <a:cs typeface="Calibri" pitchFamily="34" charset="-120"/>
+              </a:rPr>
+              <a:t>softer     ·     </a:t>
+            </a:r>
+            <a:pPr indent="0" marL="0">
+              <a:buNone/>
+            </a:pPr>
+            <a:r>
+              <a:rPr lang="en-US" sz="1500" dirty="0">
+                <a:solidFill>
+                  <a:srgbClr val="1E293B"/>
+                </a:solidFill>
+                <a:latin typeface="Calibri" pitchFamily="34" charset="0"/>
+                <a:ea typeface="Calibri" pitchFamily="34" charset="-122"/>
+                <a:cs typeface="Calibri" pitchFamily="34" charset="-120"/>
+              </a:rPr>
+              <a:t>kinder</a:t>
+            </a:r>
+            <a:endParaRPr lang="en-US" sz="1500" dirty="0"/>
+          </a:p>
+        </p:txBody>
+      </p:sp>
+      <p:sp>
+        <p:nvSpPr>
+          <p:cNvPr id="13" name="Shape 11"/>
+          <p:cNvSpPr/>
+          <p:nvPr/>
+        </p:nvSpPr>
+        <p:spPr>
+          <a:xfrm>
+            <a:off x="365760" y="3822192"/>
+            <a:ext cx="8412480" cy="438912"/>
+          </a:xfrm>
+          <a:prstGeom prst="roundRect">
+            <a:avLst>
+              <a:gd name="adj" fmla="val 20833"/>
+            </a:avLst>
+          </a:prstGeom>
+          <a:solidFill>
+            <a:srgbClr val="F8FAFC"/>
+          </a:solidFill>
+          <a:ln/>
+          <a:effectLst>
+            <a:outerShdw sx="100000" sy="100000" kx="0" ky="0" algn="bl" rotWithShape="0" blurRad="101600" dist="38100" dir="2700000">
+              <a:srgbClr val="000000">
+                <a:alpha val="12000"/>
+              </a:srgbClr>
+            </a:outerShdw>
+          </a:effectLst>
+        </p:spPr>
+      </p:sp>
+      <p:sp>
+        <p:nvSpPr>
+          <p:cNvPr id="14" name="Text 12"/>
+          <p:cNvSpPr/>
+          <p:nvPr/>
+        </p:nvSpPr>
+        <p:spPr>
+          <a:xfrm>
+            <a:off x="594360" y="3886200"/>
+            <a:ext cx="7863840" cy="310896"/>
+          </a:xfrm>
+          <a:prstGeom prst="rect">
+            <a:avLst/>
+          </a:prstGeom>
+          <a:noFill/>
+          <a:ln/>
+        </p:spPr>
+        <p:txBody>
+          <a:bodyPr wrap="square" lIns="0" tIns="0" rIns="0" bIns="0" rtlCol="0" anchor="ctr"/>
+          <a:lstStyle/>
+          <a:p>
+            <a:pPr indent="0" marL="0">
+              <a:buNone/>
+            </a:pPr>
+            <a:r>
+              <a:rPr lang="en-US" sz="1500" dirty="0">
+                <a:solidFill>
+                  <a:srgbClr val="1E293B"/>
+                </a:solidFill>
+                <a:latin typeface="Calibri" pitchFamily="34" charset="0"/>
+                <a:ea typeface="Calibri" pitchFamily="34" charset="-122"/>
+                <a:cs typeface="Calibri" pitchFamily="34" charset="-120"/>
+              </a:rPr>
+              <a:t>boxes     ·     </a:t>
+            </a:r>
+            <a:pPr indent="0" marL="0">
+              <a:buNone/>
+            </a:pPr>
+            <a:r>
+              <a:rPr lang="en-US" sz="1500" dirty="0">
+                <a:solidFill>
+                  <a:srgbClr val="1E293B"/>
+                </a:solidFill>
+                <a:latin typeface="Calibri" pitchFamily="34" charset="0"/>
+                <a:ea typeface="Calibri" pitchFamily="34" charset="-122"/>
+                <a:cs typeface="Calibri" pitchFamily="34" charset="-120"/>
+              </a:rPr>
+              <a:t>dishes     ·     </a:t>
+            </a:r>
+            <a:pPr indent="0" marL="0">
+              <a:buNone/>
+            </a:pPr>
+            <a:r>
+              <a:rPr lang="en-US" sz="1500" dirty="0">
+                <a:solidFill>
+                  <a:srgbClr val="1E293B"/>
+                </a:solidFill>
+                <a:latin typeface="Calibri" pitchFamily="34" charset="0"/>
+                <a:ea typeface="Calibri" pitchFamily="34" charset="-122"/>
+                <a:cs typeface="Calibri" pitchFamily="34" charset="-120"/>
+              </a:rPr>
+              <a:t>cities     ·     </a:t>
+            </a:r>
+            <a:pPr indent="0" marL="0">
+              <a:buNone/>
+            </a:pPr>
+            <a:r>
+              <a:rPr lang="en-US" sz="1500" dirty="0">
+                <a:solidFill>
+                  <a:srgbClr val="1E293B"/>
+                </a:solidFill>
+                <a:latin typeface="Calibri" pitchFamily="34" charset="0"/>
+                <a:ea typeface="Calibri" pitchFamily="34" charset="-122"/>
+                <a:cs typeface="Calibri" pitchFamily="34" charset="-120"/>
+              </a:rPr>
+              <a:t>benches</a:t>
+            </a:r>
+            <a:endParaRPr lang="en-US" sz="1500" dirty="0"/>
+          </a:p>
+        </p:txBody>
+      </p:sp>
+      <p:sp>
+        <p:nvSpPr>
+          <p:cNvPr id="15" name="Shape 13"/>
+          <p:cNvSpPr/>
+          <p:nvPr/>
+        </p:nvSpPr>
+        <p:spPr>
+          <a:xfrm>
+            <a:off x="365760" y="4306824"/>
+            <a:ext cx="8412480" cy="438912"/>
+          </a:xfrm>
+          <a:prstGeom prst="roundRect">
+            <a:avLst>
+              <a:gd name="adj" fmla="val 20833"/>
+            </a:avLst>
+          </a:prstGeom>
+          <a:solidFill>
+            <a:srgbClr val="FFFFFF"/>
+          </a:solidFill>
+          <a:ln/>
+          <a:effectLst>
+            <a:outerShdw sx="100000" sy="100000" kx="0" ky="0" algn="bl" rotWithShape="0" blurRad="101600" dist="38100" dir="2700000">
+              <a:srgbClr val="000000">
+                <a:alpha val="12000"/>
+              </a:srgbClr>
+            </a:outerShdw>
+          </a:effectLst>
+        </p:spPr>
+      </p:sp>
+      <p:sp>
+        <p:nvSpPr>
+          <p:cNvPr id="16" name="Text 14"/>
+          <p:cNvSpPr/>
+          <p:nvPr/>
+        </p:nvSpPr>
+        <p:spPr>
+          <a:xfrm>
+            <a:off x="594360" y="4370832"/>
+            <a:ext cx="7863840" cy="310896"/>
+          </a:xfrm>
+          <a:prstGeom prst="rect">
+            <a:avLst/>
+          </a:prstGeom>
+          <a:noFill/>
+          <a:ln/>
+        </p:spPr>
+        <p:txBody>
+          <a:bodyPr wrap="square" lIns="0" tIns="0" rIns="0" bIns="0" rtlCol="0" anchor="ctr"/>
+          <a:lstStyle/>
+          <a:p>
+            <a:pPr indent="0" marL="0">
+              <a:buNone/>
+            </a:pPr>
+            <a:r>
+              <a:rPr lang="en-US" sz="1500" dirty="0">
+                <a:solidFill>
+                  <a:srgbClr val="1E293B"/>
+                </a:solidFill>
+                <a:latin typeface="Calibri" pitchFamily="34" charset="0"/>
+                <a:ea typeface="Calibri" pitchFamily="34" charset="-122"/>
+                <a:cs typeface="Calibri" pitchFamily="34" charset="-120"/>
+              </a:rPr>
+              <a:t>stayed     ·     </a:t>
+            </a:r>
+            <a:pPr indent="0" marL="0">
+              <a:buNone/>
+            </a:pPr>
+            <a:r>
+              <a:rPr lang="en-US" sz="1500" dirty="0">
+                <a:solidFill>
+                  <a:srgbClr val="1E293B"/>
+                </a:solidFill>
+                <a:latin typeface="Calibri" pitchFamily="34" charset="0"/>
+                <a:ea typeface="Calibri" pitchFamily="34" charset="-122"/>
+                <a:cs typeface="Calibri" pitchFamily="34" charset="-120"/>
+              </a:rPr>
+              <a:t>prayed     ·     </a:t>
+            </a:r>
+            <a:pPr indent="0" marL="0">
+              <a:buNone/>
+            </a:pPr>
+            <a:r>
+              <a:rPr lang="en-US" sz="1500" dirty="0">
+                <a:solidFill>
+                  <a:srgbClr val="1E293B"/>
+                </a:solidFill>
+                <a:latin typeface="Calibri" pitchFamily="34" charset="0"/>
+                <a:ea typeface="Calibri" pitchFamily="34" charset="-122"/>
+                <a:cs typeface="Calibri" pitchFamily="34" charset="-120"/>
+              </a:rPr>
+              <a:t>obeyed     ·     </a:t>
+            </a:r>
+            <a:pPr indent="0" marL="0">
+              <a:buNone/>
+            </a:pPr>
+            <a:r>
+              <a:rPr lang="en-US" sz="1500" dirty="0">
+                <a:solidFill>
+                  <a:srgbClr val="1E293B"/>
+                </a:solidFill>
+                <a:latin typeface="Calibri" pitchFamily="34" charset="0"/>
+                <a:ea typeface="Calibri" pitchFamily="34" charset="-122"/>
+                <a:cs typeface="Calibri" pitchFamily="34" charset="-120"/>
+              </a:rPr>
+              <a:t>tried</a:t>
+            </a:r>
+            <a:endParaRPr lang="en-US" sz="1500" dirty="0"/>
+          </a:p>
+        </p:txBody>
+      </p:sp>
+    </p:spTree>
+  </p:cSld>
+  <p:clrMapOvr>
+    <a:masterClrMapping/>
+  </p:clrMapOvr>
+</p:sld>
+</file>
+
+<file path=ppt/slides/slide17.xml><?xml version="1.0" encoding="utf-8"?>
+<p:sld xmlns:a="http://schemas.openxmlformats.org/drawingml/2006/main" xmlns:r="http://schemas.openxmlformats.org/officeDocument/2006/relationships" xmlns:p="http://schemas.openxmlformats.org/presentationml/2006/main">
+  <p:cSld name="Slide 17">
+    <p:bg>
+      <p:bgPr>
+        <a:solidFill>
+          <a:srgbClr val="F8FAFC"/>
+        </a:solidFill>
+      </p:bgPr>
+    </p:bg>
+    <p:spTree>
+      <p:nvGrpSpPr>
+        <p:cNvPr id="1" name=""/>
+        <p:cNvGrpSpPr/>
+        <p:nvPr/>
+      </p:nvGrpSpPr>
+      <p:grpSpPr>
+        <a:xfrm>
+          <a:off x="0" y="0"/>
+          <a:ext cx="0" cy="0"/>
+          <a:chOff x="0" y="0"/>
+          <a:chExt cx="0" cy="0"/>
+        </a:xfrm>
+      </p:grpSpPr>
+      <p:sp>
+        <p:nvSpPr>
+          <p:cNvPr id="2" name="Shape 0"/>
+          <p:cNvSpPr/>
+          <p:nvPr/>
+        </p:nvSpPr>
+        <p:spPr>
+          <a:xfrm>
+            <a:off x="0" y="0"/>
+            <a:ext cx="9144000" cy="566928"/>
+          </a:xfrm>
+          <a:prstGeom prst="rect">
+            <a:avLst/>
+          </a:prstGeom>
+          <a:solidFill>
+            <a:srgbClr val="0E1C42"/>
+          </a:solidFill>
+          <a:ln/>
+        </p:spPr>
+      </p:sp>
+      <p:sp>
+        <p:nvSpPr>
+          <p:cNvPr id="3" name="Text 1"/>
+          <p:cNvSpPr/>
+          <p:nvPr/>
+        </p:nvSpPr>
+        <p:spPr>
+          <a:xfrm>
+            <a:off x="365760" y="54864"/>
+            <a:ext cx="8412480" cy="457200"/>
+          </a:xfrm>
+          <a:prstGeom prst="rect">
+            <a:avLst/>
+          </a:prstGeom>
+          <a:noFill/>
+          <a:ln/>
+        </p:spPr>
+        <p:txBody>
+          <a:bodyPr wrap="square" lIns="0" tIns="0" rIns="0" bIns="0" rtlCol="0" anchor="ctr"/>
+          <a:lstStyle/>
+          <a:p>
+            <a:pPr indent="0" marL="0">
+              <a:buNone/>
+            </a:pPr>
+            <a:r>
+              <a:rPr lang="en-US" sz="2200" b="1" dirty="0">
+                <a:solidFill>
+                  <a:srgbClr val="FFFFFF"/>
+                </a:solidFill>
+                <a:latin typeface="Calibri" pitchFamily="34" charset="0"/>
+                <a:ea typeface="Calibri" pitchFamily="34" charset="-122"/>
+                <a:cs typeface="Calibri" pitchFamily="34" charset="-120"/>
+              </a:rPr>
+              <a:t>🔠  Spelling</a:t>
+            </a:r>
+            <a:endParaRPr lang="en-US" sz="2200" dirty="0"/>
+          </a:p>
+        </p:txBody>
+      </p:sp>
+      <p:sp>
+        <p:nvSpPr>
+          <p:cNvPr id="4" name="Text 2"/>
+          <p:cNvSpPr/>
+          <p:nvPr/>
+        </p:nvSpPr>
+        <p:spPr>
+          <a:xfrm>
+            <a:off x="365760" y="777240"/>
+            <a:ext cx="8229600" cy="237744"/>
+          </a:xfrm>
+          <a:prstGeom prst="rect">
+            <a:avLst/>
+          </a:prstGeom>
+          <a:noFill/>
+          <a:ln/>
+        </p:spPr>
+        <p:txBody>
+          <a:bodyPr wrap="square" lIns="0" tIns="0" rIns="0" bIns="0" rtlCol="0" anchor="ctr"/>
+          <a:lstStyle/>
+          <a:p>
+            <a:pPr indent="0" marL="0">
+              <a:buNone/>
+            </a:pPr>
+            <a:r>
+              <a:rPr lang="en-US" sz="1100" b="1" spc="100" kern="0" dirty="0">
+                <a:solidFill>
+                  <a:srgbClr val="0E1C42"/>
+                </a:solidFill>
+                <a:latin typeface="Calibri" pitchFamily="34" charset="0"/>
+                <a:ea typeface="Calibri" pitchFamily="34" charset="-122"/>
+                <a:cs typeface="Calibri" pitchFamily="34" charset="-120"/>
+              </a:rPr>
+              <a:t>Y TO I BEFORE SUFFIX</a:t>
+            </a:r>
+            <a:endParaRPr lang="en-US" sz="1100" dirty="0"/>
+          </a:p>
+        </p:txBody>
+      </p:sp>
+      <p:sp>
+        <p:nvSpPr>
+          <p:cNvPr id="5" name="Text 3"/>
+          <p:cNvSpPr/>
+          <p:nvPr/>
+        </p:nvSpPr>
+        <p:spPr>
+          <a:xfrm>
+            <a:off x="365760" y="1051560"/>
+            <a:ext cx="8229600" cy="237744"/>
+          </a:xfrm>
+          <a:prstGeom prst="rect">
+            <a:avLst/>
+          </a:prstGeom>
+          <a:noFill/>
+          <a:ln/>
+        </p:spPr>
+        <p:txBody>
+          <a:bodyPr wrap="square" lIns="0" tIns="0" rIns="0" bIns="0" rtlCol="0" anchor="ctr"/>
+          <a:lstStyle/>
+          <a:p>
+            <a:pPr indent="0" marL="0">
+              <a:buNone/>
+            </a:pPr>
+            <a:r>
+              <a:rPr lang="en-US" sz="1100" b="1" spc="100" kern="0" dirty="0">
+                <a:solidFill>
+                  <a:srgbClr val="C7922C"/>
+                </a:solidFill>
+                <a:latin typeface="Calibri" pitchFamily="34" charset="0"/>
+                <a:ea typeface="Calibri" pitchFamily="34" charset="-122"/>
+                <a:cs typeface="Calibri" pitchFamily="34" charset="-120"/>
+              </a:rPr>
+              <a:t>📖  THE RULE</a:t>
+            </a:r>
+            <a:endParaRPr lang="en-US" sz="1100" dirty="0"/>
+          </a:p>
+        </p:txBody>
+      </p:sp>
+      <p:sp>
+        <p:nvSpPr>
+          <p:cNvPr id="6" name="Shape 4"/>
+          <p:cNvSpPr/>
+          <p:nvPr/>
+        </p:nvSpPr>
+        <p:spPr>
+          <a:xfrm>
+            <a:off x="365760" y="1298448"/>
+            <a:ext cx="8412480" cy="960120"/>
+          </a:xfrm>
+          <a:prstGeom prst="roundRect">
+            <a:avLst>
+              <a:gd name="adj" fmla="val 9524"/>
+            </a:avLst>
+          </a:prstGeom>
+          <a:solidFill>
+            <a:srgbClr val="FEF6E8"/>
+          </a:solidFill>
+          <a:ln w="19050">
+            <a:solidFill>
+              <a:srgbClr val="C7922C"/>
+            </a:solidFill>
+            <a:prstDash val="solid"/>
+          </a:ln>
+          <a:effectLst>
+            <a:outerShdw sx="100000" sy="100000" kx="0" ky="0" algn="bl" rotWithShape="0" blurRad="101600" dist="38100" dir="2700000">
+              <a:srgbClr val="000000">
+                <a:alpha val="12000"/>
+              </a:srgbClr>
+            </a:outerShdw>
+          </a:effectLst>
+        </p:spPr>
+      </p:sp>
+      <p:sp>
+        <p:nvSpPr>
+          <p:cNvPr id="7" name="Text 5"/>
+          <p:cNvSpPr/>
+          <p:nvPr/>
+        </p:nvSpPr>
+        <p:spPr>
+          <a:xfrm>
+            <a:off x="594360" y="1426464"/>
+            <a:ext cx="7955280" cy="704088"/>
+          </a:xfrm>
+          <a:prstGeom prst="rect">
+            <a:avLst/>
+          </a:prstGeom>
+          <a:noFill/>
+          <a:ln/>
+        </p:spPr>
+        <p:txBody>
+          <a:bodyPr wrap="square" lIns="0" tIns="0" rIns="0" bIns="0" rtlCol="0" anchor="ctr"/>
+          <a:lstStyle/>
+          <a:p>
+            <a:pPr indent="0" marL="0">
+              <a:buNone/>
+            </a:pPr>
+            <a:r>
+              <a:rPr lang="en-US" sz="1700" dirty="0">
+                <a:solidFill>
+                  <a:srgbClr val="1E293B"/>
+                </a:solidFill>
+                <a:latin typeface="Calibri" pitchFamily="34" charset="0"/>
+                <a:ea typeface="Calibri" pitchFamily="34" charset="-122"/>
+                <a:cs typeface="Calibri" pitchFamily="34" charset="-120"/>
+              </a:rPr>
+              <a:t>When a word ends in a consonant + y, change the y to i before most endings: carry → carried. Two exceptions: keep the y before -ing (carrying), and change nothing when a vowel comes before the y (played).</a:t>
+            </a:r>
+            <a:endParaRPr lang="en-US" sz="1700" dirty="0"/>
+          </a:p>
+        </p:txBody>
+      </p:sp>
+      <p:sp>
+        <p:nvSpPr>
+          <p:cNvPr id="8" name="Text 6"/>
+          <p:cNvSpPr/>
+          <p:nvPr/>
+        </p:nvSpPr>
+        <p:spPr>
+          <a:xfrm>
+            <a:off x="365760" y="2395728"/>
+            <a:ext cx="8412480" cy="411480"/>
+          </a:xfrm>
+          <a:prstGeom prst="rect">
+            <a:avLst/>
+          </a:prstGeom>
+          <a:noFill/>
+          <a:ln/>
+        </p:spPr>
+        <p:txBody>
+          <a:bodyPr wrap="square" lIns="0" tIns="0" rIns="0" bIns="0" rtlCol="0" anchor="ctr"/>
+          <a:lstStyle/>
+          <a:p>
+            <a:pPr indent="0" marL="0">
+              <a:buNone/>
+            </a:pPr>
+            <a:r>
+              <a:rPr lang="en-US" sz="1400" i="1" dirty="0">
+                <a:solidFill>
+                  <a:srgbClr val="64748B"/>
+                </a:solidFill>
+                <a:latin typeface="Calibri" pitchFamily="34" charset="0"/>
+                <a:ea typeface="Calibri" pitchFamily="34" charset="-122"/>
+                <a:cs typeface="Calibri" pitchFamily="34" charset="-120"/>
+              </a:rPr>
+              <a:t>Sound Detective! One word in each row swapped its y for an i.</a:t>
+            </a:r>
+            <a:endParaRPr lang="en-US" sz="1400" dirty="0"/>
+          </a:p>
+        </p:txBody>
+      </p:sp>
+      <p:sp>
+        <p:nvSpPr>
+          <p:cNvPr id="9" name="Shape 7"/>
+          <p:cNvSpPr/>
+          <p:nvPr/>
+        </p:nvSpPr>
+        <p:spPr>
+          <a:xfrm>
+            <a:off x="365760" y="2852928"/>
+            <a:ext cx="8412480" cy="438912"/>
+          </a:xfrm>
+          <a:prstGeom prst="roundRect">
+            <a:avLst>
+              <a:gd name="adj" fmla="val 20833"/>
+            </a:avLst>
+          </a:prstGeom>
+          <a:solidFill>
+            <a:srgbClr val="F8FAFC"/>
+          </a:solidFill>
+          <a:ln/>
+          <a:effectLst>
+            <a:outerShdw sx="100000" sy="100000" kx="0" ky="0" algn="bl" rotWithShape="0" blurRad="101600" dist="38100" dir="2700000">
+              <a:srgbClr val="000000">
+                <a:alpha val="12000"/>
+              </a:srgbClr>
+            </a:outerShdw>
+          </a:effectLst>
+        </p:spPr>
+      </p:sp>
+      <p:sp>
+        <p:nvSpPr>
+          <p:cNvPr id="10" name="Text 8"/>
+          <p:cNvSpPr/>
+          <p:nvPr/>
+        </p:nvSpPr>
+        <p:spPr>
+          <a:xfrm>
+            <a:off x="594360" y="2916936"/>
+            <a:ext cx="7863840" cy="310896"/>
+          </a:xfrm>
+          <a:prstGeom prst="rect">
+            <a:avLst/>
+          </a:prstGeom>
+          <a:noFill/>
+          <a:ln/>
+        </p:spPr>
+        <p:txBody>
+          <a:bodyPr wrap="square" lIns="0" tIns="0" rIns="0" bIns="0" rtlCol="0" anchor="ctr"/>
+          <a:lstStyle/>
+          <a:p>
+            <a:pPr indent="0" marL="0">
+              <a:buNone/>
+            </a:pPr>
+            <a:r>
+              <a:rPr lang="en-US" sz="1500" b="1" dirty="0">
+                <a:solidFill>
+                  <a:srgbClr val="34B76F"/>
+                </a:solidFill>
+                <a:latin typeface="Calibri" pitchFamily="34" charset="0"/>
+                <a:ea typeface="Calibri" pitchFamily="34" charset="-122"/>
+                <a:cs typeface="Calibri" pitchFamily="34" charset="-120"/>
+              </a:rPr>
+              <a:t>carried     ·     </a:t>
+            </a:r>
+            <a:pPr indent="0" marL="0">
+              <a:buNone/>
+            </a:pPr>
+            <a:r>
+              <a:rPr lang="en-US" sz="1500" dirty="0">
+                <a:solidFill>
+                  <a:srgbClr val="1E293B"/>
+                </a:solidFill>
+                <a:latin typeface="Calibri" pitchFamily="34" charset="0"/>
+                <a:ea typeface="Calibri" pitchFamily="34" charset="-122"/>
+                <a:cs typeface="Calibri" pitchFamily="34" charset="-120"/>
+              </a:rPr>
+              <a:t>played     ·     </a:t>
+            </a:r>
+            <a:pPr indent="0" marL="0">
+              <a:buNone/>
+            </a:pPr>
+            <a:r>
+              <a:rPr lang="en-US" sz="1500" dirty="0">
+                <a:solidFill>
+                  <a:srgbClr val="1E293B"/>
+                </a:solidFill>
+                <a:latin typeface="Calibri" pitchFamily="34" charset="0"/>
+                <a:ea typeface="Calibri" pitchFamily="34" charset="-122"/>
+                <a:cs typeface="Calibri" pitchFamily="34" charset="-120"/>
+              </a:rPr>
+              <a:t>stayed     ·     </a:t>
+            </a:r>
+            <a:pPr indent="0" marL="0">
+              <a:buNone/>
+            </a:pPr>
+            <a:r>
+              <a:rPr lang="en-US" sz="1500" dirty="0">
+                <a:solidFill>
+                  <a:srgbClr val="1E293B"/>
+                </a:solidFill>
+                <a:latin typeface="Calibri" pitchFamily="34" charset="0"/>
+                <a:ea typeface="Calibri" pitchFamily="34" charset="-122"/>
+                <a:cs typeface="Calibri" pitchFamily="34" charset="-120"/>
+              </a:rPr>
+              <a:t>enjoyed</a:t>
+            </a:r>
+            <a:endParaRPr lang="en-US" sz="1500" dirty="0"/>
+          </a:p>
+        </p:txBody>
+      </p:sp>
+      <p:sp>
+        <p:nvSpPr>
+          <p:cNvPr id="11" name="Shape 9"/>
+          <p:cNvSpPr/>
+          <p:nvPr/>
+        </p:nvSpPr>
+        <p:spPr>
+          <a:xfrm>
+            <a:off x="365760" y="3337560"/>
+            <a:ext cx="8412480" cy="438912"/>
+          </a:xfrm>
+          <a:prstGeom prst="roundRect">
+            <a:avLst>
+              <a:gd name="adj" fmla="val 20833"/>
+            </a:avLst>
+          </a:prstGeom>
+          <a:solidFill>
+            <a:srgbClr val="FFFFFF"/>
+          </a:solidFill>
+          <a:ln/>
+          <a:effectLst>
+            <a:outerShdw sx="100000" sy="100000" kx="0" ky="0" algn="bl" rotWithShape="0" blurRad="101600" dist="38100" dir="2700000">
+              <a:srgbClr val="000000">
+                <a:alpha val="12000"/>
+              </a:srgbClr>
+            </a:outerShdw>
+          </a:effectLst>
+        </p:spPr>
+      </p:sp>
+      <p:sp>
+        <p:nvSpPr>
+          <p:cNvPr id="12" name="Text 10"/>
+          <p:cNvSpPr/>
+          <p:nvPr/>
+        </p:nvSpPr>
+        <p:spPr>
+          <a:xfrm>
+            <a:off x="594360" y="3401568"/>
+            <a:ext cx="7863840" cy="310896"/>
+          </a:xfrm>
+          <a:prstGeom prst="rect">
+            <a:avLst/>
+          </a:prstGeom>
+          <a:noFill/>
+          <a:ln/>
+        </p:spPr>
+        <p:txBody>
+          <a:bodyPr wrap="square" lIns="0" tIns="0" rIns="0" bIns="0" rtlCol="0" anchor="ctr"/>
+          <a:lstStyle/>
+          <a:p>
+            <a:pPr indent="0" marL="0">
+              <a:buNone/>
+            </a:pPr>
+            <a:r>
+              <a:rPr lang="en-US" sz="1500" dirty="0">
+                <a:solidFill>
+                  <a:srgbClr val="1E293B"/>
+                </a:solidFill>
+                <a:latin typeface="Calibri" pitchFamily="34" charset="0"/>
+                <a:ea typeface="Calibri" pitchFamily="34" charset="-122"/>
+                <a:cs typeface="Calibri" pitchFamily="34" charset="-120"/>
+              </a:rPr>
+              <a:t>louder     ·     </a:t>
+            </a:r>
+            <a:pPr indent="0" marL="0">
+              <a:buNone/>
+            </a:pPr>
+            <a:r>
+              <a:rPr lang="en-US" sz="1500" b="1" dirty="0">
+                <a:solidFill>
+                  <a:srgbClr val="34B76F"/>
+                </a:solidFill>
+                <a:latin typeface="Calibri" pitchFamily="34" charset="0"/>
+                <a:ea typeface="Calibri" pitchFamily="34" charset="-122"/>
+                <a:cs typeface="Calibri" pitchFamily="34" charset="-120"/>
+              </a:rPr>
+              <a:t>happier     ·     </a:t>
+            </a:r>
+            <a:pPr indent="0" marL="0">
+              <a:buNone/>
+            </a:pPr>
+            <a:r>
+              <a:rPr lang="en-US" sz="1500" dirty="0">
+                <a:solidFill>
+                  <a:srgbClr val="1E293B"/>
+                </a:solidFill>
+                <a:latin typeface="Calibri" pitchFamily="34" charset="0"/>
+                <a:ea typeface="Calibri" pitchFamily="34" charset="-122"/>
+                <a:cs typeface="Calibri" pitchFamily="34" charset="-120"/>
+              </a:rPr>
+              <a:t>softer     ·     </a:t>
+            </a:r>
+            <a:pPr indent="0" marL="0">
+              <a:buNone/>
+            </a:pPr>
+            <a:r>
+              <a:rPr lang="en-US" sz="1500" dirty="0">
+                <a:solidFill>
+                  <a:srgbClr val="1E293B"/>
+                </a:solidFill>
+                <a:latin typeface="Calibri" pitchFamily="34" charset="0"/>
+                <a:ea typeface="Calibri" pitchFamily="34" charset="-122"/>
+                <a:cs typeface="Calibri" pitchFamily="34" charset="-120"/>
+              </a:rPr>
+              <a:t>kinder</a:t>
+            </a:r>
+            <a:endParaRPr lang="en-US" sz="1500" dirty="0"/>
+          </a:p>
+        </p:txBody>
+      </p:sp>
+      <p:sp>
+        <p:nvSpPr>
+          <p:cNvPr id="13" name="Shape 11"/>
+          <p:cNvSpPr/>
+          <p:nvPr/>
+        </p:nvSpPr>
+        <p:spPr>
+          <a:xfrm>
+            <a:off x="365760" y="3822192"/>
+            <a:ext cx="8412480" cy="438912"/>
+          </a:xfrm>
+          <a:prstGeom prst="roundRect">
+            <a:avLst>
+              <a:gd name="adj" fmla="val 20833"/>
+            </a:avLst>
+          </a:prstGeom>
+          <a:solidFill>
+            <a:srgbClr val="F8FAFC"/>
+          </a:solidFill>
+          <a:ln/>
+          <a:effectLst>
+            <a:outerShdw sx="100000" sy="100000" kx="0" ky="0" algn="bl" rotWithShape="0" blurRad="101600" dist="38100" dir="2700000">
+              <a:srgbClr val="000000">
+                <a:alpha val="12000"/>
+              </a:srgbClr>
+            </a:outerShdw>
+          </a:effectLst>
+        </p:spPr>
+      </p:sp>
+      <p:sp>
+        <p:nvSpPr>
+          <p:cNvPr id="14" name="Text 12"/>
+          <p:cNvSpPr/>
+          <p:nvPr/>
+        </p:nvSpPr>
+        <p:spPr>
+          <a:xfrm>
+            <a:off x="594360" y="3886200"/>
+            <a:ext cx="7863840" cy="310896"/>
+          </a:xfrm>
+          <a:prstGeom prst="rect">
+            <a:avLst/>
+          </a:prstGeom>
+          <a:noFill/>
+          <a:ln/>
+        </p:spPr>
+        <p:txBody>
+          <a:bodyPr wrap="square" lIns="0" tIns="0" rIns="0" bIns="0" rtlCol="0" anchor="ctr"/>
+          <a:lstStyle/>
+          <a:p>
+            <a:pPr indent="0" marL="0">
+              <a:buNone/>
+            </a:pPr>
+            <a:r>
+              <a:rPr lang="en-US" sz="1500" dirty="0">
+                <a:solidFill>
+                  <a:srgbClr val="1E293B"/>
+                </a:solidFill>
+                <a:latin typeface="Calibri" pitchFamily="34" charset="0"/>
+                <a:ea typeface="Calibri" pitchFamily="34" charset="-122"/>
+                <a:cs typeface="Calibri" pitchFamily="34" charset="-120"/>
+              </a:rPr>
+              <a:t>boxes     ·     </a:t>
+            </a:r>
+            <a:pPr indent="0" marL="0">
+              <a:buNone/>
+            </a:pPr>
+            <a:r>
+              <a:rPr lang="en-US" sz="1500" dirty="0">
+                <a:solidFill>
+                  <a:srgbClr val="1E293B"/>
+                </a:solidFill>
+                <a:latin typeface="Calibri" pitchFamily="34" charset="0"/>
+                <a:ea typeface="Calibri" pitchFamily="34" charset="-122"/>
+                <a:cs typeface="Calibri" pitchFamily="34" charset="-120"/>
+              </a:rPr>
+              <a:t>dishes     ·     </a:t>
+            </a:r>
+            <a:pPr indent="0" marL="0">
+              <a:buNone/>
+            </a:pPr>
+            <a:r>
+              <a:rPr lang="en-US" sz="1500" b="1" dirty="0">
+                <a:solidFill>
+                  <a:srgbClr val="34B76F"/>
+                </a:solidFill>
+                <a:latin typeface="Calibri" pitchFamily="34" charset="0"/>
+                <a:ea typeface="Calibri" pitchFamily="34" charset="-122"/>
+                <a:cs typeface="Calibri" pitchFamily="34" charset="-120"/>
+              </a:rPr>
+              <a:t>cities     ·     </a:t>
+            </a:r>
+            <a:pPr indent="0" marL="0">
+              <a:buNone/>
+            </a:pPr>
+            <a:r>
+              <a:rPr lang="en-US" sz="1500" dirty="0">
+                <a:solidFill>
+                  <a:srgbClr val="1E293B"/>
+                </a:solidFill>
+                <a:latin typeface="Calibri" pitchFamily="34" charset="0"/>
+                <a:ea typeface="Calibri" pitchFamily="34" charset="-122"/>
+                <a:cs typeface="Calibri" pitchFamily="34" charset="-120"/>
+              </a:rPr>
+              <a:t>benches</a:t>
+            </a:r>
+            <a:endParaRPr lang="en-US" sz="1500" dirty="0"/>
+          </a:p>
+        </p:txBody>
+      </p:sp>
+      <p:sp>
+        <p:nvSpPr>
+          <p:cNvPr id="15" name="Shape 13"/>
+          <p:cNvSpPr/>
+          <p:nvPr/>
+        </p:nvSpPr>
+        <p:spPr>
+          <a:xfrm>
+            <a:off x="365760" y="4306824"/>
+            <a:ext cx="8412480" cy="438912"/>
+          </a:xfrm>
+          <a:prstGeom prst="roundRect">
+            <a:avLst>
+              <a:gd name="adj" fmla="val 20833"/>
+            </a:avLst>
+          </a:prstGeom>
+          <a:solidFill>
+            <a:srgbClr val="FFFFFF"/>
+          </a:solidFill>
+          <a:ln/>
+          <a:effectLst>
+            <a:outerShdw sx="100000" sy="100000" kx="0" ky="0" algn="bl" rotWithShape="0" blurRad="101600" dist="38100" dir="2700000">
+              <a:srgbClr val="000000">
+                <a:alpha val="12000"/>
+              </a:srgbClr>
+            </a:outerShdw>
+          </a:effectLst>
+        </p:spPr>
+      </p:sp>
+      <p:sp>
+        <p:nvSpPr>
+          <p:cNvPr id="16" name="Text 14"/>
+          <p:cNvSpPr/>
+          <p:nvPr/>
+        </p:nvSpPr>
+        <p:spPr>
+          <a:xfrm>
+            <a:off x="594360" y="4370832"/>
+            <a:ext cx="7863840" cy="310896"/>
+          </a:xfrm>
+          <a:prstGeom prst="rect">
+            <a:avLst/>
+          </a:prstGeom>
+          <a:noFill/>
+          <a:ln/>
+        </p:spPr>
+        <p:txBody>
+          <a:bodyPr wrap="square" lIns="0" tIns="0" rIns="0" bIns="0" rtlCol="0" anchor="ctr"/>
+          <a:lstStyle/>
+          <a:p>
+            <a:pPr indent="0" marL="0">
+              <a:buNone/>
+            </a:pPr>
+            <a:r>
+              <a:rPr lang="en-US" sz="1500" dirty="0">
+                <a:solidFill>
+                  <a:srgbClr val="1E293B"/>
+                </a:solidFill>
+                <a:latin typeface="Calibri" pitchFamily="34" charset="0"/>
+                <a:ea typeface="Calibri" pitchFamily="34" charset="-122"/>
+                <a:cs typeface="Calibri" pitchFamily="34" charset="-120"/>
+              </a:rPr>
+              <a:t>stayed     ·     </a:t>
+            </a:r>
+            <a:pPr indent="0" marL="0">
+              <a:buNone/>
+            </a:pPr>
+            <a:r>
+              <a:rPr lang="en-US" sz="1500" dirty="0">
+                <a:solidFill>
+                  <a:srgbClr val="1E293B"/>
+                </a:solidFill>
+                <a:latin typeface="Calibri" pitchFamily="34" charset="0"/>
+                <a:ea typeface="Calibri" pitchFamily="34" charset="-122"/>
+                <a:cs typeface="Calibri" pitchFamily="34" charset="-120"/>
+              </a:rPr>
+              <a:t>prayed     ·     </a:t>
+            </a:r>
+            <a:pPr indent="0" marL="0">
+              <a:buNone/>
+            </a:pPr>
+            <a:r>
+              <a:rPr lang="en-US" sz="1500" dirty="0">
+                <a:solidFill>
+                  <a:srgbClr val="1E293B"/>
+                </a:solidFill>
+                <a:latin typeface="Calibri" pitchFamily="34" charset="0"/>
+                <a:ea typeface="Calibri" pitchFamily="34" charset="-122"/>
+                <a:cs typeface="Calibri" pitchFamily="34" charset="-120"/>
+              </a:rPr>
+              <a:t>obeyed     ·     </a:t>
+            </a:r>
+            <a:pPr indent="0" marL="0">
+              <a:buNone/>
+            </a:pPr>
+            <a:r>
+              <a:rPr lang="en-US" sz="1500" b="1" dirty="0">
+                <a:solidFill>
+                  <a:srgbClr val="34B76F"/>
+                </a:solidFill>
+                <a:latin typeface="Calibri" pitchFamily="34" charset="0"/>
+                <a:ea typeface="Calibri" pitchFamily="34" charset="-122"/>
+                <a:cs typeface="Calibri" pitchFamily="34" charset="-120"/>
+              </a:rPr>
+              <a:t>tried</a:t>
+            </a:r>
+            <a:endParaRPr lang="en-US" sz="1500" dirty="0"/>
+          </a:p>
+        </p:txBody>
+      </p:sp>
+      <p:sp>
+        <p:nvSpPr>
+          <p:cNvPr id="17" name="Text 15"/>
+          <p:cNvSpPr/>
+          <p:nvPr/>
+        </p:nvSpPr>
+        <p:spPr>
+          <a:xfrm>
+            <a:off x="365760" y="4809744"/>
+            <a:ext cx="8412480" cy="274320"/>
+          </a:xfrm>
+          <a:prstGeom prst="rect">
+            <a:avLst/>
+          </a:prstGeom>
+          <a:noFill/>
+          <a:ln/>
+        </p:spPr>
+        <p:txBody>
+          <a:bodyPr wrap="square" lIns="0" tIns="0" rIns="0" bIns="0" rtlCol="0" anchor="ctr"/>
+          <a:lstStyle/>
+          <a:p>
+            <a:pPr indent="0" marL="0">
+              <a:buNone/>
+            </a:pPr>
+            <a:r>
+              <a:rPr lang="en-US" sz="1300" b="1" dirty="0">
+                <a:solidFill>
+                  <a:srgbClr val="34B76F"/>
+                </a:solidFill>
+                <a:latin typeface="Calibri" pitchFamily="34" charset="0"/>
+                <a:ea typeface="Calibri" pitchFamily="34" charset="-122"/>
+                <a:cs typeface="Calibri" pitchFamily="34" charset="-120"/>
+              </a:rPr>
+              <a:t>✅  Answers revealed</a:t>
+            </a:r>
+            <a:endParaRPr lang="en-US" sz="1300" dirty="0"/>
+          </a:p>
+        </p:txBody>
+      </p:sp>
+    </p:spTree>
+  </p:cSld>
+  <p:clrMapOvr>
+    <a:masterClrMapping/>
+  </p:clrMapOvr>
+</p:sld>
+</file>
+
+<file path=ppt/slides/slide18.xml><?xml version="1.0" encoding="utf-8"?>
+<p:sld xmlns:a="http://schemas.openxmlformats.org/drawingml/2006/main" xmlns:r="http://schemas.openxmlformats.org/officeDocument/2006/relationships" xmlns:p="http://schemas.openxmlformats.org/presentationml/2006/main">
+  <p:cSld name="Slide 18">
     <p:bg>
       <p:bgPr>
         <a:solidFill>
@@ -4905,9 +8294,9 @@
 </p:sld>
 </file>
 
-<file path=ppt/slides/slide16.xml><?xml version="1.0" encoding="utf-8"?>
+<file path=ppt/slides/slide19.xml><?xml version="1.0" encoding="utf-8"?>
 <p:sld xmlns:a="http://schemas.openxmlformats.org/drawingml/2006/main" xmlns:r="http://schemas.openxmlformats.org/officeDocument/2006/relationships" xmlns:p="http://schemas.openxmlformats.org/presentationml/2006/main">
-  <p:cSld name="Slide 16">
+  <p:cSld name="Slide 19">
     <p:bg>
       <p:bgPr>
         <a:solidFill>
@@ -6445,7 +9834,7 @@
                 <a:ea typeface="Calibri" pitchFamily="34" charset="-122"/>
                 <a:cs typeface="Calibri" pitchFamily="34" charset="-120"/>
               </a:rPr>
-              <a:t>Good readers watch for unexpected connections . This week, pay attention to the moments when two very different characters find something in common.</a:t>
+              <a:t>Good readers watch for unexpected connections. This week, pay attention to the moments when two very different characters find something in common.</a:t>
             </a:r>
             <a:endParaRPr lang="en-US" sz="1500" dirty="0"/>
           </a:p>
@@ -6465,7 +9854,7 @@
     <p:bg>
       <p:bgPr>
         <a:solidFill>
-          <a:srgbClr val="F8FAFC"/>
+          <a:srgbClr val="FFFFFF"/>
         </a:solidFill>
       </p:bgPr>
     </p:bg>
@@ -6550,7 +9939,7 @@
         </p:nvSpPr>
         <p:spPr>
           <a:xfrm>
-            <a:off x="365760" y="749808"/>
+            <a:off x="365760" y="804672"/>
             <a:ext cx="8229600" cy="237744"/>
           </a:xfrm>
           <a:prstGeom prst="rect">
@@ -6575,7 +9964,7 @@
                 <a:ea typeface="Calibri" pitchFamily="34" charset="-122"/>
                 <a:cs typeface="Calibri" pitchFamily="34" charset="-120"/>
               </a:rPr>
-              <a:t>FIX THESE SENTENCES</a:t>
+              <a:t>CORRECT MODEL — STUDY WHAT IS RIGHT</a:t>
             </a:r>
             <a:endParaRPr lang="en-US" sz="1100" dirty="0"/>
           </a:p>
@@ -6589,16 +9978,16 @@
         </p:nvSpPr>
         <p:spPr>
           <a:xfrm>
-            <a:off x="365760" y="1024128"/>
-            <a:ext cx="8412480" cy="777240"/>
+            <a:off x="365760" y="1078992"/>
+            <a:ext cx="8412480" cy="822960"/>
           </a:xfrm>
           <a:prstGeom prst="roundRect">
             <a:avLst>
-              <a:gd name="adj" fmla="val 11765"/>
+              <a:gd name="adj" fmla="val 11111"/>
             </a:avLst>
           </a:prstGeom>
           <a:solidFill>
-            <a:srgbClr val="FFFFFF"/>
+            <a:srgbClr val="E5F7FC"/>
           </a:solidFill>
           <a:ln w="19050">
             <a:solidFill>
@@ -6623,8 +10012,8 @@
         </p:nvSpPr>
         <p:spPr>
           <a:xfrm>
-            <a:off x="594360" y="1152144"/>
-            <a:ext cx="7955280" cy="521208"/>
+            <a:off x="594360" y="1207008"/>
+            <a:ext cx="7955280" cy="566928"/>
           </a:xfrm>
           <a:prstGeom prst="rect">
             <a:avLst/>
@@ -6648,7 +10037,7 @@
                 <a:ea typeface="Calibri" pitchFamily="34" charset="-122"/>
                 <a:cs typeface="Calibri" pitchFamily="34" charset="-120"/>
               </a:rPr>
-              <a:t>1. gregory the jailer carried a candle with a long rope tied around his waist so he could find his way</a:t>
+              <a:t>Gregory's rope was tied around his ankle so the dungeon could never keep him.</a:t>
             </a:r>
             <a:endParaRPr lang="en-US" sz="1700" dirty="0"/>
           </a:p>
@@ -6656,37 +10045,42 @@
       </p:sp>
       <p:sp>
         <p:nvSpPr>
-          <p:cNvPr id="7" name="Shape 5"/>
-          <p:cNvSpPr/>
-          <p:nvPr/>
-        </p:nvSpPr>
-        <p:spPr>
-          <a:xfrm>
-            <a:off x="365760" y="1874520"/>
-            <a:ext cx="8412480" cy="777240"/>
-          </a:xfrm>
-          <a:prstGeom prst="roundRect">
-            <a:avLst>
-              <a:gd name="adj" fmla="val 11765"/>
-            </a:avLst>
-          </a:prstGeom>
-          <a:solidFill>
-            <a:srgbClr val="FFFFFF"/>
-          </a:solidFill>
-          <a:ln w="19050">
-            <a:solidFill>
-              <a:srgbClr val="55C8E8"/>
-            </a:solidFill>
-            <a:prstDash val="solid"/>
-          </a:ln>
-          <a:effectLst>
-            <a:outerShdw sx="100000" sy="100000" kx="0" ky="0" algn="bl" rotWithShape="0" blurRad="101600" dist="38100" dir="2700000">
-              <a:srgbClr val="000000">
-                <a:alpha val="12000"/>
-              </a:srgbClr>
-            </a:outerShdw>
-          </a:effectLst>
-        </p:spPr>
+          <p:cNvPr id="7" name="Text 5"/>
+          <p:cNvSpPr/>
+          <p:nvPr/>
+        </p:nvSpPr>
+        <p:spPr>
+          <a:xfrm>
+            <a:off x="365760" y="2103120"/>
+            <a:ext cx="8229600" cy="237744"/>
+          </a:xfrm>
+          <a:prstGeom prst="rect">
+            <a:avLst/>
+          </a:prstGeom>
+          <a:noFill/>
+          <a:ln/>
+        </p:spPr>
+        <p:txBody>
+          <a:bodyPr wrap="square" lIns="0" tIns="0" rIns="0" bIns="0" rtlCol="0" anchor="ctr"/>
+          <a:lstStyle/>
+          <a:p>
+            <a:pPr indent="0" marL="0">
+              <a:buNone/>
+            </a:pPr>
+            <a:r>
+              <a:rPr lang="en-US" sz="1100" b="1" spc="100" kern="0" dirty="0">
+                <a:solidFill>
+                  <a:srgbClr val="55C8E8"/>
+                </a:solidFill>
+                <a:latin typeface="Calibri" pitchFamily="34" charset="0"/>
+                <a:ea typeface="Calibri" pitchFamily="34" charset="-122"/>
+                <a:cs typeface="Calibri" pitchFamily="34" charset="-120"/>
+              </a:rPr>
+              <a:t>NOTICE</a:t>
+            </a:r>
+            <a:endParaRPr lang="en-US" sz="1100" dirty="0"/>
+          </a:p>
+        </p:txBody>
       </p:sp>
       <p:sp>
         <p:nvSpPr>
@@ -6696,73 +10090,34 @@
         </p:nvSpPr>
         <p:spPr>
           <a:xfrm>
-            <a:off x="594360" y="2002536"/>
-            <a:ext cx="7955280" cy="521208"/>
-          </a:xfrm>
-          <a:prstGeom prst="rect">
-            <a:avLst/>
-          </a:prstGeom>
-          <a:noFill/>
-          <a:ln/>
-        </p:spPr>
-        <p:txBody>
-          <a:bodyPr wrap="square" lIns="0" tIns="0" rIns="0" bIns="0" rtlCol="0" anchor="ctr"/>
-          <a:lstStyle/>
-          <a:p>
-            <a:pPr indent="0" marL="0">
-              <a:buNone/>
-            </a:pPr>
-            <a:r>
-              <a:rPr lang="en-US" sz="1700" dirty="0">
-                <a:solidFill>
-                  <a:srgbClr val="1E293B"/>
-                </a:solidFill>
-                <a:latin typeface="Calibri" pitchFamily="34" charset="0"/>
-                <a:ea typeface="Calibri" pitchFamily="34" charset="-122"/>
-                <a:cs typeface="Calibri" pitchFamily="34" charset="-120"/>
-              </a:rPr>
-              <a:t>2. roscuro sat near the old man and listened to him tell stories in the dark</a:t>
-            </a:r>
-            <a:endParaRPr lang="en-US" sz="1700" dirty="0"/>
-          </a:p>
-        </p:txBody>
-      </p:sp>
-      <p:sp>
-        <p:nvSpPr>
-          <p:cNvPr id="9" name="Text 7"/>
-          <p:cNvSpPr/>
-          <p:nvPr/>
-        </p:nvSpPr>
-        <p:spPr>
-          <a:xfrm>
-            <a:off x="365760" y="2788920"/>
-            <a:ext cx="8412480" cy="365760"/>
-          </a:xfrm>
-          <a:prstGeom prst="rect">
-            <a:avLst/>
-          </a:prstGeom>
-          <a:noFill/>
-          <a:ln/>
-        </p:spPr>
-        <p:txBody>
-          <a:bodyPr wrap="square" lIns="0" tIns="0" rIns="0" bIns="0" rtlCol="0" anchor="ctr"/>
-          <a:lstStyle/>
-          <a:p>
-            <a:pPr indent="0" marL="0">
-              <a:buNone/>
-            </a:pPr>
-            <a:r>
-              <a:rPr lang="en-US" sz="1600" b="1" dirty="0">
-                <a:solidFill>
-                  <a:srgbClr val="0E1C42"/>
-                </a:solidFill>
-                <a:latin typeface="Calibri" pitchFamily="34" charset="0"/>
-                <a:ea typeface="Calibri" pitchFamily="34" charset="-122"/>
-                <a:cs typeface="Calibri" pitchFamily="34" charset="-120"/>
-              </a:rPr>
-              <a:t>Rewrite both sentences correctly in your notebook.</a:t>
-            </a:r>
-            <a:endParaRPr lang="en-US" sz="1600" dirty="0"/>
+            <a:off x="365760" y="2359152"/>
+            <a:ext cx="8412480" cy="1097280"/>
+          </a:xfrm>
+          <a:prstGeom prst="rect">
+            <a:avLst/>
+          </a:prstGeom>
+          <a:noFill/>
+          <a:ln/>
+        </p:spPr>
+        <p:txBody>
+          <a:bodyPr wrap="square" lIns="0" tIns="0" rIns="0" bIns="0" rtlCol="0" anchor="t"/>
+          <a:lstStyle/>
+          <a:p>
+            <a:pPr indent="0" marL="0">
+              <a:buNone/>
+            </a:pPr>
+            <a:r>
+              <a:rPr lang="en-US" sz="1500" dirty="0">
+                <a:solidFill>
+                  <a:srgbClr val="1E293B"/>
+                </a:solidFill>
+                <a:latin typeface="Calibri" pitchFamily="34" charset="0"/>
+                <a:ea typeface="Calibri" pitchFamily="34" charset="-122"/>
+                <a:cs typeface="Calibri" pitchFamily="34" charset="-120"/>
+              </a:rPr>
+              <a:t>Gregory’s has an apostrophe and an s because one person owns the rope. Gregory is a name, so it starts with a capital letter. A period ends the sentence.</a:t>
+            </a:r>
+            <a:endParaRPr lang="en-US" sz="1500" dirty="0"/>
           </a:p>
         </p:txBody>
       </p:sp>
@@ -6890,7 +10245,7 @@
                 <a:ea typeface="Calibri" pitchFamily="34" charset="-122"/>
                 <a:cs typeface="Calibri" pitchFamily="34" charset="-120"/>
               </a:rPr>
-              <a:t>FIX THESE SENTENCES</a:t>
+              <a:t>NOW FIX THIS ONE</a:t>
             </a:r>
             <a:endParaRPr lang="en-US" sz="1100" dirty="0"/>
           </a:p>
@@ -6963,7 +10318,7 @@
                 <a:ea typeface="Calibri" pitchFamily="34" charset="-122"/>
                 <a:cs typeface="Calibri" pitchFamily="34" charset="-120"/>
               </a:rPr>
-              <a:t>1. gregory the jailer carried a candle with a long rope tied around his waist so he could find his way</a:t>
+              <a:t>gregory the jailer carried a candle with a long rope tied around his waist so he could find his way</a:t>
             </a:r>
             <a:endParaRPr lang="en-US" sz="1700" dirty="0"/>
           </a:p>
@@ -6971,226 +10326,40 @@
       </p:sp>
       <p:sp>
         <p:nvSpPr>
-          <p:cNvPr id="7" name="Shape 5"/>
-          <p:cNvSpPr/>
-          <p:nvPr/>
-        </p:nvSpPr>
-        <p:spPr>
-          <a:xfrm>
-            <a:off x="365760" y="1874520"/>
-            <a:ext cx="8412480" cy="777240"/>
-          </a:xfrm>
-          <a:prstGeom prst="roundRect">
-            <a:avLst>
-              <a:gd name="adj" fmla="val 11765"/>
-            </a:avLst>
-          </a:prstGeom>
-          <a:solidFill>
-            <a:srgbClr val="FFFFFF"/>
-          </a:solidFill>
-          <a:ln w="19050">
-            <a:solidFill>
-              <a:srgbClr val="55C8E8"/>
-            </a:solidFill>
-            <a:prstDash val="solid"/>
-          </a:ln>
-          <a:effectLst>
-            <a:outerShdw sx="100000" sy="100000" kx="0" ky="0" algn="bl" rotWithShape="0" blurRad="101600" dist="38100" dir="2700000">
-              <a:srgbClr val="000000">
-                <a:alpha val="12000"/>
-              </a:srgbClr>
-            </a:outerShdw>
-          </a:effectLst>
-        </p:spPr>
-      </p:sp>
-      <p:sp>
-        <p:nvSpPr>
-          <p:cNvPr id="8" name="Text 6"/>
-          <p:cNvSpPr/>
-          <p:nvPr/>
-        </p:nvSpPr>
-        <p:spPr>
-          <a:xfrm>
-            <a:off x="594360" y="2002536"/>
-            <a:ext cx="7955280" cy="521208"/>
-          </a:xfrm>
-          <a:prstGeom prst="rect">
-            <a:avLst/>
-          </a:prstGeom>
-          <a:noFill/>
-          <a:ln/>
-        </p:spPr>
-        <p:txBody>
-          <a:bodyPr wrap="square" lIns="0" tIns="0" rIns="0" bIns="0" rtlCol="0" anchor="ctr"/>
-          <a:lstStyle/>
-          <a:p>
-            <a:pPr indent="0" marL="0">
-              <a:buNone/>
-            </a:pPr>
-            <a:r>
-              <a:rPr lang="en-US" sz="1700" dirty="0">
-                <a:solidFill>
-                  <a:srgbClr val="1E293B"/>
-                </a:solidFill>
-                <a:latin typeface="Calibri" pitchFamily="34" charset="0"/>
-                <a:ea typeface="Calibri" pitchFamily="34" charset="-122"/>
-                <a:cs typeface="Calibri" pitchFamily="34" charset="-120"/>
-              </a:rPr>
-              <a:t>2. roscuro sat near the old man and listened to him tell stories in the dark</a:t>
-            </a:r>
-            <a:endParaRPr lang="en-US" sz="1700" dirty="0"/>
-          </a:p>
-        </p:txBody>
-      </p:sp>
-      <p:sp>
-        <p:nvSpPr>
-          <p:cNvPr id="9" name="Shape 7"/>
-          <p:cNvSpPr/>
-          <p:nvPr/>
-        </p:nvSpPr>
-        <p:spPr>
-          <a:xfrm>
-            <a:off x="365760" y="2743200"/>
-            <a:ext cx="8412480" cy="1417320"/>
-          </a:xfrm>
-          <a:prstGeom prst="roundRect">
-            <a:avLst>
-              <a:gd name="adj" fmla="val 6452"/>
-            </a:avLst>
-          </a:prstGeom>
-          <a:solidFill>
-            <a:srgbClr val="E8F8EF"/>
-          </a:solidFill>
-          <a:ln/>
-          <a:effectLst>
-            <a:outerShdw sx="100000" sy="100000" kx="0" ky="0" algn="bl" rotWithShape="0" blurRad="101600" dist="38100" dir="2700000">
-              <a:srgbClr val="000000">
-                <a:alpha val="12000"/>
-              </a:srgbClr>
-            </a:outerShdw>
-          </a:effectLst>
-        </p:spPr>
-      </p:sp>
-      <p:sp>
-        <p:nvSpPr>
-          <p:cNvPr id="10" name="Text 8"/>
-          <p:cNvSpPr/>
-          <p:nvPr/>
-        </p:nvSpPr>
-        <p:spPr>
-          <a:xfrm>
-            <a:off x="566928" y="2816352"/>
-            <a:ext cx="8229600" cy="237744"/>
-          </a:xfrm>
-          <a:prstGeom prst="rect">
-            <a:avLst/>
-          </a:prstGeom>
-          <a:noFill/>
-          <a:ln/>
-        </p:spPr>
-        <p:txBody>
-          <a:bodyPr wrap="square" lIns="0" tIns="0" rIns="0" bIns="0" rtlCol="0" anchor="ctr"/>
-          <a:lstStyle/>
-          <a:p>
-            <a:pPr indent="0" marL="0">
-              <a:buNone/>
-            </a:pPr>
-            <a:r>
-              <a:rPr lang="en-US" sz="1100" b="1" spc="100" kern="0" dirty="0">
-                <a:solidFill>
-                  <a:srgbClr val="34B76F"/>
-                </a:solidFill>
-                <a:latin typeface="Calibri" pitchFamily="34" charset="0"/>
-                <a:ea typeface="Calibri" pitchFamily="34" charset="-122"/>
-                <a:cs typeface="Calibri" pitchFamily="34" charset="-120"/>
-              </a:rPr>
-              <a:t>✅  CORRECTED</a:t>
-            </a:r>
-            <a:endParaRPr lang="en-US" sz="1100" dirty="0"/>
-          </a:p>
-        </p:txBody>
-      </p:sp>
-      <p:sp>
-        <p:nvSpPr>
-          <p:cNvPr id="11" name="Text 9"/>
-          <p:cNvSpPr/>
-          <p:nvPr/>
-        </p:nvSpPr>
-        <p:spPr>
-          <a:xfrm>
-            <a:off x="566928" y="3072384"/>
-            <a:ext cx="8010144" cy="685800"/>
-          </a:xfrm>
-          <a:prstGeom prst="rect">
-            <a:avLst/>
-          </a:prstGeom>
-          <a:noFill/>
-          <a:ln/>
-        </p:spPr>
-        <p:txBody>
-          <a:bodyPr wrap="square" lIns="0" tIns="0" rIns="0" bIns="0" rtlCol="0" anchor="ctr"/>
-          <a:lstStyle/>
-          <a:p>
-            <a:pPr indent="0" marL="0">
-              <a:buNone/>
-            </a:pPr>
-            <a:endParaRPr lang="en-US" sz="1400" dirty="0"/>
-          </a:p>
-          <a:p>
-            <a:pPr indent="0" marL="0">
-              <a:buNone/>
-            </a:pPr>
-            <a:r>
-              <a:rPr lang="en-US" sz="1400" i="1" dirty="0">
-                <a:solidFill>
-                  <a:srgbClr val="1E293B"/>
-                </a:solidFill>
-                <a:latin typeface="Calibri" pitchFamily="34" charset="0"/>
-                <a:ea typeface="Calibri" pitchFamily="34" charset="-122"/>
-                <a:cs typeface="Calibri" pitchFamily="34" charset="-120"/>
-              </a:rPr>
-              <a:t>1. Gregory the jailer carried a candle with a long rope tied around his waist so he could find his way.</a:t>
-            </a:r>
-            <a:endParaRPr lang="en-US" sz="1400" dirty="0"/>
-          </a:p>
-        </p:txBody>
-      </p:sp>
-      <p:sp>
-        <p:nvSpPr>
-          <p:cNvPr id="12" name="Text 10"/>
-          <p:cNvSpPr/>
-          <p:nvPr/>
-        </p:nvSpPr>
-        <p:spPr>
-          <a:xfrm>
-            <a:off x="566928" y="3767328"/>
-            <a:ext cx="8010144" cy="320040"/>
-          </a:xfrm>
-          <a:prstGeom prst="rect">
-            <a:avLst/>
-          </a:prstGeom>
-          <a:noFill/>
-          <a:ln/>
-        </p:spPr>
-        <p:txBody>
-          <a:bodyPr wrap="square" lIns="0" tIns="0" rIns="0" bIns="0" rtlCol="0" anchor="ctr"/>
-          <a:lstStyle/>
-          <a:p>
-            <a:pPr indent="0" marL="0">
-              <a:buNone/>
-            </a:pPr>
-            <a:r>
-              <a:rPr lang="en-US" sz="1200" dirty="0">
-                <a:solidFill>
-                  <a:srgbClr val="64748B"/>
-                </a:solidFill>
-                <a:latin typeface="Calibri" pitchFamily="34" charset="0"/>
-                <a:ea typeface="Calibri" pitchFamily="34" charset="-122"/>
-                <a:cs typeface="Calibri" pitchFamily="34" charset="-120"/>
-              </a:rPr>
-              <a:t>Did you catch the proper noun (Gregory, Roscuro), the comma, and capital letters at the start of each sentence?</a:t>
-            </a:r>
-            <a:endParaRPr lang="en-US" sz="1200" dirty="0"/>
+          <p:cNvPr id="7" name="Text 5"/>
+          <p:cNvSpPr/>
+          <p:nvPr/>
+        </p:nvSpPr>
+        <p:spPr>
+          <a:xfrm>
+            <a:off x="365760" y="2788920"/>
+            <a:ext cx="8412480" cy="365760"/>
+          </a:xfrm>
+          <a:prstGeom prst="rect">
+            <a:avLst/>
+          </a:prstGeom>
+          <a:noFill/>
+          <a:ln/>
+        </p:spPr>
+        <p:txBody>
+          <a:bodyPr wrap="square" lIns="0" tIns="0" rIns="0" bIns="0" rtlCol="0" anchor="ctr"/>
+          <a:lstStyle/>
+          <a:p>
+            <a:pPr indent="0" marL="0">
+              <a:buNone/>
+            </a:pPr>
+            <a:r>
+              <a:rPr lang="en-US" sz="1600" b="1" dirty="0">
+                <a:solidFill>
+                  <a:srgbClr val="0E1C42"/>
+                </a:solidFill>
+                <a:latin typeface="Calibri" pitchFamily="34" charset="0"/>
+                <a:ea typeface="Calibri" pitchFamily="34" charset="-122"/>
+                <a:cs typeface="Calibri" pitchFamily="34" charset="-120"/>
+              </a:rPr>
+              <a:t>Rewrite the sentence correctly in your notebook.</a:t>
+            </a:r>
+            <a:endParaRPr lang="en-US" sz="1600" dirty="0"/>
           </a:p>
         </p:txBody>
       </p:sp>
@@ -7208,7 +10377,7 @@
     <p:bg>
       <p:bgPr>
         <a:solidFill>
-          <a:srgbClr val="FFFFFF"/>
+          <a:srgbClr val="F8FAFC"/>
         </a:solidFill>
       </p:bgPr>
     </p:bg>
@@ -7241,7 +10410,7 @@
             <a:avLst/>
           </a:prstGeom>
           <a:solidFill>
-            <a:srgbClr val="8B6FC0"/>
+            <a:srgbClr val="55C8E8"/>
           </a:solidFill>
           <a:ln/>
         </p:spPr>
@@ -7279,7 +10448,7 @@
                 <a:ea typeface="Calibri" pitchFamily="34" charset="-122"/>
                 <a:cs typeface="Calibri" pitchFamily="34" charset="-120"/>
               </a:rPr>
-              <a:t>🌱  Morphology</a:t>
+              <a:t>✏️  Daily Oral Language</a:t>
             </a:r>
             <a:endParaRPr lang="en-US" sz="2200" dirty="0"/>
           </a:p>
@@ -7293,7 +10462,7 @@
         </p:nvSpPr>
         <p:spPr>
           <a:xfrm>
-            <a:off x="365760" y="804672"/>
+            <a:off x="365760" y="749808"/>
             <a:ext cx="8229600" cy="237744"/>
           </a:xfrm>
           <a:prstGeom prst="rect">
@@ -7312,13 +10481,13 @@
             <a:r>
               <a:rPr lang="en-US" sz="1100" b="1" spc="100" kern="0" dirty="0">
                 <a:solidFill>
-                  <a:srgbClr val="8B6FC0"/>
-                </a:solidFill>
-                <a:latin typeface="Calibri" pitchFamily="34" charset="0"/>
-                <a:ea typeface="Calibri" pitchFamily="34" charset="-122"/>
-                <a:cs typeface="Calibri" pitchFamily="34" charset="-120"/>
-              </a:rPr>
-              <a:t>-LESS</a:t>
+                  <a:srgbClr val="55C8E8"/>
+                </a:solidFill>
+                <a:latin typeface="Calibri" pitchFamily="34" charset="0"/>
+                <a:ea typeface="Calibri" pitchFamily="34" charset="-122"/>
+                <a:cs typeface="Calibri" pitchFamily="34" charset="-120"/>
+              </a:rPr>
+              <a:t>NOW FIX THIS ONE</a:t>
             </a:r>
             <a:endParaRPr lang="en-US" sz="1100" dirty="0"/>
           </a:p>
@@ -7332,18 +10501,23 @@
         </p:nvSpPr>
         <p:spPr>
           <a:xfrm>
-            <a:off x="365760" y="1097280"/>
-            <a:ext cx="8412480" cy="621792"/>
+            <a:off x="365760" y="1024128"/>
+            <a:ext cx="8412480" cy="777240"/>
           </a:xfrm>
           <a:prstGeom prst="roundRect">
             <a:avLst>
-              <a:gd name="adj" fmla="val 14706"/>
+              <a:gd name="adj" fmla="val 11765"/>
             </a:avLst>
           </a:prstGeom>
           <a:solidFill>
-            <a:srgbClr val="F0E8FF"/>
+            <a:srgbClr val="FFFFFF"/>
           </a:solidFill>
-          <a:ln/>
+          <a:ln w="19050">
+            <a:solidFill>
+              <a:srgbClr val="55C8E8"/>
+            </a:solidFill>
+            <a:prstDash val="solid"/>
+          </a:ln>
           <a:effectLst>
             <a:outerShdw sx="100000" sy="100000" kx="0" ky="0" algn="bl" rotWithShape="0" blurRad="101600" dist="38100" dir="2700000">
               <a:srgbClr val="000000">
@@ -7361,34 +10535,34 @@
         </p:nvSpPr>
         <p:spPr>
           <a:xfrm>
-            <a:off x="594360" y="1216152"/>
-            <a:ext cx="7863840" cy="384048"/>
-          </a:xfrm>
-          <a:prstGeom prst="rect">
-            <a:avLst/>
-          </a:prstGeom>
-          <a:noFill/>
-          <a:ln/>
-        </p:spPr>
-        <p:txBody>
-          <a:bodyPr wrap="square" lIns="0" tIns="0" rIns="0" bIns="0" rtlCol="0" anchor="ctr"/>
-          <a:lstStyle/>
-          <a:p>
-            <a:pPr indent="0" marL="0">
-              <a:buNone/>
-            </a:pPr>
-            <a:r>
-              <a:rPr lang="en-US" sz="1500" dirty="0">
-                <a:solidFill>
-                  <a:srgbClr val="1E293B"/>
-                </a:solidFill>
-                <a:latin typeface="Calibri" pitchFamily="34" charset="0"/>
-                <a:ea typeface="Calibri" pitchFamily="34" charset="-122"/>
-                <a:cs typeface="Calibri" pitchFamily="34" charset="-120"/>
-              </a:rPr>
-              <a:t>🌱  hopeless — base word: hope</a:t>
-            </a:r>
-            <a:endParaRPr lang="en-US" sz="1500" dirty="0"/>
+            <a:off x="594360" y="1152144"/>
+            <a:ext cx="7955280" cy="521208"/>
+          </a:xfrm>
+          <a:prstGeom prst="rect">
+            <a:avLst/>
+          </a:prstGeom>
+          <a:noFill/>
+          <a:ln/>
+        </p:spPr>
+        <p:txBody>
+          <a:bodyPr wrap="square" lIns="0" tIns="0" rIns="0" bIns="0" rtlCol="0" anchor="ctr"/>
+          <a:lstStyle/>
+          <a:p>
+            <a:pPr indent="0" marL="0">
+              <a:buNone/>
+            </a:pPr>
+            <a:r>
+              <a:rPr lang="en-US" sz="1700" dirty="0">
+                <a:solidFill>
+                  <a:srgbClr val="1E293B"/>
+                </a:solidFill>
+                <a:latin typeface="Calibri" pitchFamily="34" charset="0"/>
+                <a:ea typeface="Calibri" pitchFamily="34" charset="-122"/>
+                <a:cs typeface="Calibri" pitchFamily="34" charset="-120"/>
+              </a:rPr>
+              <a:t>gregory the jailer carried a candle with a long rope tied around his waist so he could find his way</a:t>
+            </a:r>
+            <a:endParaRPr lang="en-US" sz="1700" dirty="0"/>
           </a:p>
         </p:txBody>
       </p:sp>
@@ -7400,16 +10574,16 @@
         </p:nvSpPr>
         <p:spPr>
           <a:xfrm>
-            <a:off x="365760" y="1792224"/>
-            <a:ext cx="8412480" cy="621792"/>
+            <a:off x="365760" y="2743200"/>
+            <a:ext cx="8412480" cy="1417320"/>
           </a:xfrm>
           <a:prstGeom prst="roundRect">
             <a:avLst>
-              <a:gd name="adj" fmla="val 14706"/>
+              <a:gd name="adj" fmla="val 6452"/>
             </a:avLst>
           </a:prstGeom>
           <a:solidFill>
-            <a:srgbClr val="F8F4FF"/>
+            <a:srgbClr val="E8F8EF"/>
           </a:solidFill>
           <a:ln/>
           <a:effectLst>
@@ -7429,170 +10603,79 @@
         </p:nvSpPr>
         <p:spPr>
           <a:xfrm>
-            <a:off x="594360" y="1911096"/>
-            <a:ext cx="7863840" cy="384048"/>
-          </a:xfrm>
-          <a:prstGeom prst="rect">
-            <a:avLst/>
-          </a:prstGeom>
-          <a:noFill/>
-          <a:ln/>
-        </p:spPr>
-        <p:txBody>
-          <a:bodyPr wrap="square" lIns="0" tIns="0" rIns="0" bIns="0" rtlCol="0" anchor="ctr"/>
-          <a:lstStyle/>
-          <a:p>
-            <a:pPr indent="0" marL="0">
-              <a:buNone/>
-            </a:pPr>
-            <a:r>
-              <a:rPr lang="en-US" sz="1500" dirty="0">
-                <a:solidFill>
-                  <a:srgbClr val="1E293B"/>
-                </a:solidFill>
-                <a:latin typeface="Calibri" pitchFamily="34" charset="0"/>
-                <a:ea typeface="Calibri" pitchFamily="34" charset="-122"/>
-                <a:cs typeface="Calibri" pitchFamily="34" charset="-120"/>
-              </a:rPr>
-              <a:t>🌱  fearless — base word: fear</a:t>
-            </a:r>
-            <a:endParaRPr lang="en-US" sz="1500" dirty="0"/>
-          </a:p>
-        </p:txBody>
-      </p:sp>
-      <p:sp>
-        <p:nvSpPr>
-          <p:cNvPr id="9" name="Shape 7"/>
-          <p:cNvSpPr/>
-          <p:nvPr/>
-        </p:nvSpPr>
-        <p:spPr>
-          <a:xfrm>
-            <a:off x="365760" y="2487168"/>
-            <a:ext cx="8412480" cy="621792"/>
-          </a:xfrm>
-          <a:prstGeom prst="roundRect">
-            <a:avLst>
-              <a:gd name="adj" fmla="val 14706"/>
-            </a:avLst>
-          </a:prstGeom>
-          <a:solidFill>
-            <a:srgbClr val="F0E8FF"/>
-          </a:solidFill>
-          <a:ln/>
-          <a:effectLst>
-            <a:outerShdw sx="100000" sy="100000" kx="0" ky="0" algn="bl" rotWithShape="0" blurRad="101600" dist="38100" dir="2700000">
-              <a:srgbClr val="000000">
-                <a:alpha val="12000"/>
-              </a:srgbClr>
-            </a:outerShdw>
-          </a:effectLst>
-        </p:spPr>
-      </p:sp>
-      <p:sp>
-        <p:nvSpPr>
-          <p:cNvPr id="10" name="Text 8"/>
-          <p:cNvSpPr/>
-          <p:nvPr/>
-        </p:nvSpPr>
-        <p:spPr>
-          <a:xfrm>
-            <a:off x="594360" y="2606040"/>
-            <a:ext cx="7863840" cy="384048"/>
-          </a:xfrm>
-          <a:prstGeom prst="rect">
-            <a:avLst/>
-          </a:prstGeom>
-          <a:noFill/>
-          <a:ln/>
-        </p:spPr>
-        <p:txBody>
-          <a:bodyPr wrap="square" lIns="0" tIns="0" rIns="0" bIns="0" rtlCol="0" anchor="ctr"/>
-          <a:lstStyle/>
-          <a:p>
-            <a:pPr indent="0" marL="0">
-              <a:buNone/>
-            </a:pPr>
-            <a:r>
-              <a:rPr lang="en-US" sz="1500" dirty="0">
-                <a:solidFill>
-                  <a:srgbClr val="1E293B"/>
-                </a:solidFill>
-                <a:latin typeface="Calibri" pitchFamily="34" charset="0"/>
-                <a:ea typeface="Calibri" pitchFamily="34" charset="-122"/>
-                <a:cs typeface="Calibri" pitchFamily="34" charset="-120"/>
-              </a:rPr>
-              <a:t>🌱  endless — base word: end</a:t>
-            </a:r>
-            <a:endParaRPr lang="en-US" sz="1500" dirty="0"/>
-          </a:p>
-        </p:txBody>
-      </p:sp>
-      <p:sp>
-        <p:nvSpPr>
-          <p:cNvPr id="11" name="Shape 9"/>
-          <p:cNvSpPr/>
-          <p:nvPr/>
-        </p:nvSpPr>
-        <p:spPr>
-          <a:xfrm>
-            <a:off x="365760" y="3182112"/>
-            <a:ext cx="8412480" cy="621792"/>
-          </a:xfrm>
-          <a:prstGeom prst="roundRect">
-            <a:avLst>
-              <a:gd name="adj" fmla="val 14706"/>
-            </a:avLst>
-          </a:prstGeom>
-          <a:solidFill>
-            <a:srgbClr val="F8F4FF"/>
-          </a:solidFill>
-          <a:ln/>
-          <a:effectLst>
-            <a:outerShdw sx="100000" sy="100000" kx="0" ky="0" algn="bl" rotWithShape="0" blurRad="101600" dist="38100" dir="2700000">
-              <a:srgbClr val="000000">
-                <a:alpha val="12000"/>
-              </a:srgbClr>
-            </a:outerShdw>
-          </a:effectLst>
-        </p:spPr>
-      </p:sp>
-      <p:sp>
-        <p:nvSpPr>
-          <p:cNvPr id="12" name="Text 10"/>
-          <p:cNvSpPr/>
-          <p:nvPr/>
-        </p:nvSpPr>
-        <p:spPr>
-          <a:xfrm>
-            <a:off x="594360" y="3300984"/>
-            <a:ext cx="7863840" cy="384048"/>
-          </a:xfrm>
-          <a:prstGeom prst="rect">
-            <a:avLst/>
-          </a:prstGeom>
-          <a:noFill/>
-          <a:ln/>
-        </p:spPr>
-        <p:txBody>
-          <a:bodyPr wrap="square" lIns="0" tIns="0" rIns="0" bIns="0" rtlCol="0" anchor="ctr"/>
-          <a:lstStyle/>
-          <a:p>
-            <a:pPr indent="0" marL="0">
-              <a:buNone/>
-            </a:pPr>
-            <a:r>
-              <a:rPr lang="en-US" sz="1500" dirty="0">
-                <a:solidFill>
-                  <a:srgbClr val="1E293B"/>
-                </a:solidFill>
-                <a:latin typeface="Calibri" pitchFamily="34" charset="0"/>
-                <a:ea typeface="Calibri" pitchFamily="34" charset="-122"/>
-                <a:cs typeface="Calibri" pitchFamily="34" charset="-120"/>
-              </a:rPr>
-              <a:t>🌱  useless — base word: use</a:t>
-            </a:r>
-            <a:endParaRPr lang="en-US" sz="1500" dirty="0"/>
+            <a:off x="566928" y="2816352"/>
+            <a:ext cx="8229600" cy="237744"/>
+          </a:xfrm>
+          <a:prstGeom prst="rect">
+            <a:avLst/>
+          </a:prstGeom>
+          <a:noFill/>
+          <a:ln/>
+        </p:spPr>
+        <p:txBody>
+          <a:bodyPr wrap="square" lIns="0" tIns="0" rIns="0" bIns="0" rtlCol="0" anchor="ctr"/>
+          <a:lstStyle/>
+          <a:p>
+            <a:pPr indent="0" marL="0">
+              <a:buNone/>
+            </a:pPr>
+            <a:r>
+              <a:rPr lang="en-US" sz="1100" b="1" spc="100" kern="0" dirty="0">
+                <a:solidFill>
+                  <a:srgbClr val="34B76F"/>
+                </a:solidFill>
+                <a:latin typeface="Calibri" pitchFamily="34" charset="0"/>
+                <a:ea typeface="Calibri" pitchFamily="34" charset="-122"/>
+                <a:cs typeface="Calibri" pitchFamily="34" charset="-120"/>
+              </a:rPr>
+              <a:t>✅  CORRECTED</a:t>
+            </a:r>
+            <a:endParaRPr lang="en-US" sz="1100" dirty="0"/>
+          </a:p>
+        </p:txBody>
+      </p:sp>
+      <p:sp>
+        <p:nvSpPr>
+          <p:cNvPr id="9" name="Text 7"/>
+          <p:cNvSpPr/>
+          <p:nvPr/>
+        </p:nvSpPr>
+        <p:spPr>
+          <a:xfrm>
+            <a:off x="566928" y="3072384"/>
+            <a:ext cx="8010144" cy="685800"/>
+          </a:xfrm>
+          <a:prstGeom prst="rect">
+            <a:avLst/>
+          </a:prstGeom>
+          <a:noFill/>
+          <a:ln/>
+        </p:spPr>
+        <p:txBody>
+          <a:bodyPr wrap="square" lIns="0" tIns="0" rIns="0" bIns="0" rtlCol="0" anchor="ctr"/>
+          <a:lstStyle/>
+          <a:p>
+            <a:pPr indent="0" marL="0">
+              <a:buNone/>
+            </a:pPr>
+            <a:r>
+              <a:rPr lang="en-US" sz="1400" i="1" dirty="0">
+                <a:solidFill>
+                  <a:srgbClr val="1E293B"/>
+                </a:solidFill>
+                <a:latin typeface="Calibri" pitchFamily="34" charset="0"/>
+                <a:ea typeface="Calibri" pitchFamily="34" charset="-122"/>
+                <a:cs typeface="Calibri" pitchFamily="34" charset="-120"/>
+              </a:rPr>
+              <a:t>Gregory the jailer carried a candle with a long rope tied around his waist so he could find his way.</a:t>
+            </a:r>
+            <a:endParaRPr lang="en-US" sz="1400" dirty="0"/>
+          </a:p>
+          <a:p>
+            <a:pPr indent="0" marL="0">
+              <a:buNone/>
+            </a:pPr>
+            <a:endParaRPr lang="en-US" sz="1400" dirty="0"/>
           </a:p>
         </p:txBody>
       </p:sp>
